--- a/Data/Damage_Intelligence_EN_v2.pptx
+++ b/Data/Damage_Intelligence_EN_v2.pptx
@@ -1555,7 +1555,15 @@
           <c:idx val="0"/>
           <c:order val="0"/>
           <c:tx>
-            <c:v>Dossiers</c:v>
+            <c:strRef>
+              <c:f>Sheet1!$B$1</c:f>
+              <c:strCache>
+                <c:ptCount val="1"/>
+                <c:pt idx="0">
+                  <c:v/>
+                </c:pt>
+              </c:strCache>
+            </c:strRef>
           </c:tx>
           <c:spPr>
             <a:solidFill xmlns:a="http://schemas.openxmlformats.org/drawingml/2006/main">
@@ -1564,38 +1572,38 @@
           </c:spPr>
           <c:cat>
             <c:strRef>
-              <c:f>'Chart Data'!$A$2:$A$8</c:f>
+              <c:f>Sheet1!$A$2:$A$8</c:f>
               <c:strCache>
                 <c:ptCount val="7"/>
                 <c:pt idx="0">
-                  <c:v>Stationnement</c:v>
+                  <c:v>Parking</c:v>
                 </c:pt>
                 <c:pt idx="1">
-                  <c:v>Manœuvre</c:v>
+                  <c:v>Manoeuvring</c:v>
                 </c:pt>
                 <c:pt idx="2">
-                  <c:v>Collision arrière</c:v>
+                  <c:v>Rear-end collision</c:v>
                 </c:pt>
                 <c:pt idx="3">
-                  <c:v>Gravillons</c:v>
+                  <c:v>Stone chip</c:v>
                 </c:pt>
                 <c:pt idx="4">
-                  <c:v>Grêle</c:v>
+                  <c:v>Hail</c:v>
                 </c:pt>
                 <c:pt idx="5">
-                  <c:v>Vandalisme</c:v>
+                  <c:v>Vandalism</c:v>
                 </c:pt>
                 <c:pt idx="6">
-                  <c:v>Animal</c:v>
+                  <c:v>Wildlife</c:v>
                 </c:pt>
               </c:strCache>
             </c:strRef>
           </c:cat>
           <c:val>
             <c:numRef>
-              <c:f>'Chart Data'!$B$2:$B$8</c:f>
+              <c:f>Sheet1!$B$2:$B$8</c:f>
               <c:numCache>
-                <c:formatCode>0</c:formatCode>
+                <c:formatCode>General</c:formatCode>
                 <c:ptCount val="7"/>
                 <c:pt idx="0">
                   <c:v>110</c:v>
@@ -4490,7 +4498,7 @@
                 <a:ea typeface="Arial"/>
                 <a:cs typeface="Arial"/>
               </a:rPr>
-              <a:t>99,9 %</a:t>
+              <a:t>99.9%</a:t>
             </a:r>
           </a:p>
         </p:txBody>
@@ -5105,7 +5113,7 @@
                 <a:ea typeface="Arial"/>
                 <a:cs typeface="Arial"/>
               </a:rPr>
-              <a:t>¹ Insurance: 434 damage cases. Severity: 284 train / 150 test. On the full 977: DeepSeek 68.7% vs a 79.5% data-ceiling.</a:t>
+              <a:t>¹ Insurance: 434 damage cases. Severity: 284 train / 150 test. On the 434 damage cases: DeepSeek severity 68.7% vs a 79.5% data-ceiling.</a:t>
             </a:r>
           </a:p>
         </p:txBody>

--- a/Data/Damage_Intelligence_EN_v2.pptx
+++ b/Data/Damage_Intelligence_EN_v2.pptx
@@ -1,1552 +1,130 @@
 
 <file path=ppt/presentation.xml><?xml version="1.0" encoding="utf-8"?>
-<p:presentation xmlns:p="http://schemas.openxmlformats.org/presentationml/2006/main">
+<p:presentation xmlns:a="http://schemas.openxmlformats.org/drawingml/2006/main" xmlns:r="http://schemas.openxmlformats.org/officeDocument/2006/relationships" xmlns:p="http://schemas.openxmlformats.org/presentationml/2006/main">
   <p:sldMasterIdLst>
-    <p:sldMasterId xmlns:r="http://schemas.openxmlformats.org/officeDocument/2006/relationships" id="2147483648" r:id="Rd15d4828066f4c4e"/>
+    <p:sldMasterId id="2147483648" r:id="rId1"/>
   </p:sldMasterIdLst>
   <p:notesMasterIdLst>
-    <p:notesMasterId xmlns:r="http://schemas.openxmlformats.org/officeDocument/2006/relationships" r:id="Ra4c3de909ef64d10"/>
+    <p:notesMasterId r:id="rId8"/>
   </p:notesMasterIdLst>
   <p:sldIdLst>
-    <p:sldId xmlns:r="http://schemas.openxmlformats.org/officeDocument/2006/relationships" id="256" r:id="Rdb0144ecf6534137"/>
-    <p:sldId xmlns:r="http://schemas.openxmlformats.org/officeDocument/2006/relationships" id="257" r:id="R0256ee8a6b3340e3"/>
-    <p:sldId xmlns:r="http://schemas.openxmlformats.org/officeDocument/2006/relationships" id="258" r:id="R5819b93a127a4ef9"/>
-    <p:sldId xmlns:r="http://schemas.openxmlformats.org/officeDocument/2006/relationships" id="259" r:id="R099c577d55334562"/>
-    <p:sldId xmlns:r="http://schemas.openxmlformats.org/officeDocument/2006/relationships" id="260" r:id="R0b4f5f3c7bdd49fe"/>
-    <p:sldId xmlns:r="http://schemas.openxmlformats.org/officeDocument/2006/relationships" id="261" r:id="R920367bc987f451d"/>
+    <p:sldId id="256" r:id="rId2"/>
+    <p:sldId id="257" r:id="rId3"/>
+    <p:sldId id="258" r:id="rId4"/>
+    <p:sldId id="259" r:id="rId5"/>
+    <p:sldId id="260" r:id="rId6"/>
+    <p:sldId id="261" r:id="rId7"/>
   </p:sldIdLst>
   <p:sldSz cx="12192000" cy="6858000"/>
   <p:notesSz cx="6858000" cy="9144000"/>
+  <p:defaultTextStyle>
+    <a:defPPr>
+      <a:defRPr lang="en-US"/>
+    </a:defPPr>
+    <a:lvl1pPr marL="0" algn="l" defTabSz="914400" rtl="0" eaLnBrk="1" latinLnBrk="0" hangingPunct="1">
+      <a:defRPr sz="1800" kern="1200">
+        <a:solidFill>
+          <a:schemeClr val="tx1"/>
+        </a:solidFill>
+        <a:latin typeface="+mn-lt"/>
+        <a:ea typeface="+mn-ea"/>
+        <a:cs typeface="+mn-cs"/>
+      </a:defRPr>
+    </a:lvl1pPr>
+    <a:lvl2pPr marL="457200" algn="l" defTabSz="914400" rtl="0" eaLnBrk="1" latinLnBrk="0" hangingPunct="1">
+      <a:defRPr sz="1800" kern="1200">
+        <a:solidFill>
+          <a:schemeClr val="tx1"/>
+        </a:solidFill>
+        <a:latin typeface="+mn-lt"/>
+        <a:ea typeface="+mn-ea"/>
+        <a:cs typeface="+mn-cs"/>
+      </a:defRPr>
+    </a:lvl2pPr>
+    <a:lvl3pPr marL="914400" algn="l" defTabSz="914400" rtl="0" eaLnBrk="1" latinLnBrk="0" hangingPunct="1">
+      <a:defRPr sz="1800" kern="1200">
+        <a:solidFill>
+          <a:schemeClr val="tx1"/>
+        </a:solidFill>
+        <a:latin typeface="+mn-lt"/>
+        <a:ea typeface="+mn-ea"/>
+        <a:cs typeface="+mn-cs"/>
+      </a:defRPr>
+    </a:lvl3pPr>
+    <a:lvl4pPr marL="1371600" algn="l" defTabSz="914400" rtl="0" eaLnBrk="1" latinLnBrk="0" hangingPunct="1">
+      <a:defRPr sz="1800" kern="1200">
+        <a:solidFill>
+          <a:schemeClr val="tx1"/>
+        </a:solidFill>
+        <a:latin typeface="+mn-lt"/>
+        <a:ea typeface="+mn-ea"/>
+        <a:cs typeface="+mn-cs"/>
+      </a:defRPr>
+    </a:lvl4pPr>
+    <a:lvl5pPr marL="1828800" algn="l" defTabSz="914400" rtl="0" eaLnBrk="1" latinLnBrk="0" hangingPunct="1">
+      <a:defRPr sz="1800" kern="1200">
+        <a:solidFill>
+          <a:schemeClr val="tx1"/>
+        </a:solidFill>
+        <a:latin typeface="+mn-lt"/>
+        <a:ea typeface="+mn-ea"/>
+        <a:cs typeface="+mn-cs"/>
+      </a:defRPr>
+    </a:lvl5pPr>
+    <a:lvl6pPr marL="2286000" algn="l" defTabSz="914400" rtl="0" eaLnBrk="1" latinLnBrk="0" hangingPunct="1">
+      <a:defRPr sz="1800" kern="1200">
+        <a:solidFill>
+          <a:schemeClr val="tx1"/>
+        </a:solidFill>
+        <a:latin typeface="+mn-lt"/>
+        <a:ea typeface="+mn-ea"/>
+        <a:cs typeface="+mn-cs"/>
+      </a:defRPr>
+    </a:lvl6pPr>
+    <a:lvl7pPr marL="2743200" algn="l" defTabSz="914400" rtl="0" eaLnBrk="1" latinLnBrk="0" hangingPunct="1">
+      <a:defRPr sz="1800" kern="1200">
+        <a:solidFill>
+          <a:schemeClr val="tx1"/>
+        </a:solidFill>
+        <a:latin typeface="+mn-lt"/>
+        <a:ea typeface="+mn-ea"/>
+        <a:cs typeface="+mn-cs"/>
+      </a:defRPr>
+    </a:lvl7pPr>
+    <a:lvl8pPr marL="3200400" algn="l" defTabSz="914400" rtl="0" eaLnBrk="1" latinLnBrk="0" hangingPunct="1">
+      <a:defRPr sz="1800" kern="1200">
+        <a:solidFill>
+          <a:schemeClr val="tx1"/>
+        </a:solidFill>
+        <a:latin typeface="+mn-lt"/>
+        <a:ea typeface="+mn-ea"/>
+        <a:cs typeface="+mn-cs"/>
+      </a:defRPr>
+    </a:lvl8pPr>
+    <a:lvl9pPr marL="3657600" algn="l" defTabSz="914400" rtl="0" eaLnBrk="1" latinLnBrk="0" hangingPunct="1">
+      <a:defRPr sz="1800" kern="1200">
+        <a:solidFill>
+          <a:schemeClr val="tx1"/>
+        </a:solidFill>
+        <a:latin typeface="+mn-lt"/>
+        <a:ea typeface="+mn-ea"/>
+        <a:cs typeface="+mn-cs"/>
+      </a:defRPr>
+    </a:lvl9pPr>
+  </p:defaultTextStyle>
 </p:presentation>
 </file>
 
-<file path=ppt/notesMasters/notesMaster1.xml><?xml version="1.0" encoding="utf-8"?>
-<p:notesMaster xmlns:p="http://schemas.openxmlformats.org/presentationml/2006/main">
-  <p:cSld>
-    <p:bg>
-      <p:bgRef idx="1001">
-        <a:schemeClr xmlns:a="http://schemas.openxmlformats.org/drawingml/2006/main" val="bg1"/>
-      </p:bgRef>
-    </p:bg>
-    <p:spTree>
-      <p:nvGrpSpPr>
-        <p:cNvPr id="1" name=""/>
-        <p:cNvGrpSpPr/>
-        <p:nvPr/>
-      </p:nvGrpSpPr>
-      <p:grpSpPr>
-        <a:xfrm xmlns:a="http://schemas.openxmlformats.org/drawingml/2006/main"/>
-      </p:grpSpPr>
-      <p:sp>
-        <p:nvSpPr>
-          <p:cNvPr id="2" name="Header Placeholder"/>
-          <p:cNvSpPr/>
-          <p:nvPr>
-            <p:ph type="hdr" sz="quarter"/>
-          </p:nvPr>
-        </p:nvSpPr>
-        <p:spPr>
-          <a:prstGeom xmlns:a="http://schemas.openxmlformats.org/drawingml/2006/main" prst="rect">
-            <a:avLst/>
-          </a:prstGeom>
-        </p:spPr>
-        <p:txBody>
-          <a:bodyPr xmlns:a="http://schemas.openxmlformats.org/drawingml/2006/main"/>
-          <a:lstStyle xmlns:a="http://schemas.openxmlformats.org/drawingml/2006/main"/>
-          <a:p xmlns:a="http://schemas.openxmlformats.org/drawingml/2006/main"/>
-        </p:txBody>
-      </p:sp>
-      <p:sp>
-        <p:nvSpPr>
-          <p:cNvPr id="3" name="Date Placeholder"/>
-          <p:cNvSpPr/>
-          <p:nvPr>
-            <p:ph type="dt" sz="quarter" idx="1"/>
-          </p:nvPr>
-        </p:nvSpPr>
-        <p:spPr>
-          <a:prstGeom xmlns:a="http://schemas.openxmlformats.org/drawingml/2006/main" prst="rect">
-            <a:avLst/>
-          </a:prstGeom>
-        </p:spPr>
-        <p:txBody>
-          <a:bodyPr xmlns:a="http://schemas.openxmlformats.org/drawingml/2006/main"/>
-          <a:lstStyle xmlns:a="http://schemas.openxmlformats.org/drawingml/2006/main"/>
-          <a:p xmlns:a="http://schemas.openxmlformats.org/drawingml/2006/main"/>
-        </p:txBody>
-      </p:sp>
-      <p:sp>
-        <p:nvSpPr>
-          <p:cNvPr id="4" name="Slide Image Placeholder"/>
-          <p:cNvSpPr/>
-          <p:nvPr>
-            <p:ph type="sldImg" idx="2"/>
-          </p:nvPr>
-        </p:nvSpPr>
-        <p:spPr>
-          <a:prstGeom xmlns:a="http://schemas.openxmlformats.org/drawingml/2006/main" prst="rect">
-            <a:avLst/>
-          </a:prstGeom>
-        </p:spPr>
-        <p:txBody>
-          <a:bodyPr xmlns:a="http://schemas.openxmlformats.org/drawingml/2006/main"/>
-          <a:lstStyle xmlns:a="http://schemas.openxmlformats.org/drawingml/2006/main"/>
-          <a:p xmlns:a="http://schemas.openxmlformats.org/drawingml/2006/main"/>
-        </p:txBody>
-      </p:sp>
-      <p:sp>
-        <p:nvSpPr>
-          <p:cNvPr id="5" name="Notes Placeholder"/>
-          <p:cNvSpPr/>
-          <p:nvPr>
-            <p:ph type="body" sz="quarter" idx="3"/>
-          </p:nvPr>
-        </p:nvSpPr>
-        <p:spPr>
-          <a:prstGeom xmlns:a="http://schemas.openxmlformats.org/drawingml/2006/main" prst="rect">
-            <a:avLst/>
-          </a:prstGeom>
-        </p:spPr>
-        <p:txBody>
-          <a:bodyPr xmlns:a="http://schemas.openxmlformats.org/drawingml/2006/main"/>
-          <a:lstStyle xmlns:a="http://schemas.openxmlformats.org/drawingml/2006/main"/>
-          <a:p xmlns:a="http://schemas.openxmlformats.org/drawingml/2006/main"/>
-        </p:txBody>
-      </p:sp>
-      <p:sp>
-        <p:nvSpPr>
-          <p:cNvPr id="6" name="Footer Placeholder"/>
-          <p:cNvSpPr/>
-          <p:nvPr>
-            <p:ph type="ftr" sz="quarter" idx="4"/>
-          </p:nvPr>
-        </p:nvSpPr>
-        <p:spPr>
-          <a:prstGeom xmlns:a="http://schemas.openxmlformats.org/drawingml/2006/main" prst="rect">
-            <a:avLst/>
-          </a:prstGeom>
-        </p:spPr>
-        <p:txBody>
-          <a:bodyPr xmlns:a="http://schemas.openxmlformats.org/drawingml/2006/main"/>
-          <a:lstStyle xmlns:a="http://schemas.openxmlformats.org/drawingml/2006/main"/>
-          <a:p xmlns:a="http://schemas.openxmlformats.org/drawingml/2006/main"/>
-        </p:txBody>
-      </p:sp>
-      <p:sp>
-        <p:nvSpPr>
-          <p:cNvPr id="7" name="Slide Number Placeholder"/>
-          <p:cNvSpPr/>
-          <p:nvPr>
-            <p:ph type="sldNum" sz="quarter" idx="5"/>
-          </p:nvPr>
-        </p:nvSpPr>
-        <p:spPr>
-          <a:prstGeom xmlns:a="http://schemas.openxmlformats.org/drawingml/2006/main" prst="rect">
-            <a:avLst/>
-          </a:prstGeom>
-        </p:spPr>
-        <p:txBody>
-          <a:bodyPr xmlns:a="http://schemas.openxmlformats.org/drawingml/2006/main"/>
-          <a:lstStyle xmlns:a="http://schemas.openxmlformats.org/drawingml/2006/main"/>
-          <a:p xmlns:a="http://schemas.openxmlformats.org/drawingml/2006/main"/>
-        </p:txBody>
-      </p:sp>
-    </p:spTree>
-  </p:cSld>
-  <p:clrMap bg1="lt1" tx1="dk1" bg2="lt2" tx2="dk2" accent1="accent1" accent2="accent2" accent3="accent3" accent4="accent4" accent5="accent5" accent6="accent6" hlink="hlink" folHlink="folHlink"/>
-  <p:notesStyle>
-    <a:lvl1pPr xmlns:a="http://schemas.openxmlformats.org/drawingml/2006/main" marL="0" algn="l" defTabSz="914400" rtl="0" eaLnBrk="1" latinLnBrk="0" hangingPunct="1">
-      <a:defRPr sz="1200" kern="1200"/>
-    </a:lvl1pPr>
-  </p:notesStyle>
-</p:notesMaster>
-</file>
-
-<file path=ppt/notesMasters/theme/theme3.xml><?xml version="1.0" encoding="utf-8"?>
-<a:theme xmlns:a="http://schemas.openxmlformats.org/drawingml/2006/main" name="ChatGPT">
-  <a:themeElements>
-    <a:clrScheme name="ChatGPT">
-      <a:dk1>
-        <a:srgbClr val="000000"/>
-      </a:dk1>
-      <a:lt1>
-        <a:srgbClr val="FFFFFF"/>
-      </a:lt1>
-      <a:dk2>
-        <a:srgbClr val="0E2841"/>
-      </a:dk2>
-      <a:lt2>
-        <a:srgbClr val="E8E8E8"/>
-      </a:lt2>
-      <a:accent1>
-        <a:srgbClr val="156082"/>
-      </a:accent1>
-      <a:accent2>
-        <a:srgbClr val="E97132"/>
-      </a:accent2>
-      <a:accent3>
-        <a:srgbClr val="196B24"/>
-      </a:accent3>
-      <a:accent4>
-        <a:srgbClr val="0F9ED5"/>
-      </a:accent4>
-      <a:accent5>
-        <a:srgbClr val="A02B93"/>
-      </a:accent5>
-      <a:accent6>
-        <a:srgbClr val="4EA72E"/>
-      </a:accent6>
-      <a:hlink>
-        <a:srgbClr val="467886"/>
-      </a:hlink>
-      <a:folHlink>
-        <a:srgbClr val="96607D"/>
-      </a:folHlink>
-    </a:clrScheme>
-    <a:fontScheme name="Office">
-      <a:majorFont>
-        <a:latin typeface="Calibri Light"/>
-        <a:ea typeface="Calibri Light"/>
-        <a:cs typeface="Calibri Light"/>
-      </a:majorFont>
-      <a:minorFont>
-        <a:latin typeface="Calibri"/>
-        <a:ea typeface="Calibri"/>
-        <a:cs typeface="Calibri"/>
-      </a:minorFont>
-    </a:fontScheme>
-    <a:fmtScheme name="ChatGPT">
-      <a:fillStyleLst>
-        <a:solidFill>
-          <a:schemeClr val="phClr"/>
-        </a:solidFill>
-        <a:gradFill>
-          <a:gsLst>
-            <a:gs pos="0">
-              <a:schemeClr val="phClr">
-                <a:tint val="67000"/>
-                <a:lumMod val="110000"/>
-                <a:satMod val="105000"/>
-              </a:schemeClr>
-            </a:gs>
-            <a:gs pos="50000">
-              <a:schemeClr val="phClr">
-                <a:tint val="73000"/>
-                <a:lumMod val="105000"/>
-                <a:satMod val="103000"/>
-              </a:schemeClr>
-            </a:gs>
-            <a:gs pos="100000">
-              <a:schemeClr val="phClr">
-                <a:tint val="81000"/>
-                <a:lumMod val="105000"/>
-                <a:satMod val="109000"/>
-              </a:schemeClr>
-            </a:gs>
-          </a:gsLst>
-          <a:lin ang="5400000" scaled="0"/>
-        </a:gradFill>
-        <a:gradFill>
-          <a:gsLst>
-            <a:gs pos="0">
-              <a:schemeClr val="phClr">
-                <a:tint val="94000"/>
-                <a:lumMod val="102000"/>
-                <a:satMod val="103000"/>
-              </a:schemeClr>
-            </a:gs>
-            <a:gs pos="50000">
-              <a:schemeClr val="phClr">
-                <a:shade val="100000"/>
-                <a:lumMod val="100000"/>
-                <a:satMod val="110000"/>
-              </a:schemeClr>
-            </a:gs>
-            <a:gs pos="100000">
-              <a:schemeClr val="phClr">
-                <a:shade val="78000"/>
-                <a:lumMod val="99000"/>
-                <a:satMod val="120000"/>
-              </a:schemeClr>
-            </a:gs>
-          </a:gsLst>
-          <a:lin ang="5400000" scaled="0"/>
-        </a:gradFill>
-      </a:fillStyleLst>
-      <a:lnStyleLst>
-        <a:ln w="12700">
-          <a:solidFill>
-            <a:schemeClr val="phClr"/>
-          </a:solidFill>
-          <a:prstDash val="solid"/>
-        </a:ln>
-        <a:ln w="19050">
-          <a:solidFill>
-            <a:schemeClr val="phClr"/>
-          </a:solidFill>
-          <a:prstDash val="solid"/>
-        </a:ln>
-        <a:ln w="25400">
-          <a:solidFill>
-            <a:schemeClr val="phClr"/>
-          </a:solidFill>
-          <a:prstDash val="solid"/>
-        </a:ln>
-      </a:lnStyleLst>
-      <a:effectStyleLst>
-        <a:effectStyle>
-          <a:effectLst/>
-        </a:effectStyle>
-        <a:effectStyle>
-          <a:effectLst/>
-        </a:effectStyle>
-        <a:effectStyle>
-          <a:effectLst>
-            <a:outerShdw blurRad="57150" dist="19050" dir="5400000">
-              <a:srgbClr val="000000">
-                <a:alpha val="16000"/>
-              </a:srgbClr>
-            </a:outerShdw>
-          </a:effectLst>
-        </a:effectStyle>
-        <a:effectStyle>
-          <a:effectLst>
-            <a:outerShdw blurRad="19050" dist="9525" dir="5400000">
-              <a:srgbClr val="000000">
-                <a:alpha val="6000"/>
-              </a:srgbClr>
-            </a:outerShdw>
-          </a:effectLst>
-        </a:effectStyle>
-        <a:effectStyle>
-          <a:effectLst>
-            <a:outerShdw blurRad="28575" dist="9525" dir="5400000">
-              <a:srgbClr val="000000">
-                <a:alpha val="8000"/>
-              </a:srgbClr>
-            </a:outerShdw>
-          </a:effectLst>
-        </a:effectStyle>
-        <a:effectStyle>
-          <a:effectLst>
-            <a:outerShdw blurRad="57150" dist="19050" dir="5400000">
-              <a:srgbClr val="000000">
-                <a:alpha val="10000"/>
-              </a:srgbClr>
-            </a:outerShdw>
-          </a:effectLst>
-        </a:effectStyle>
-        <a:effectStyle>
-          <a:effectLst>
-            <a:outerShdw blurRad="114300" dist="38100" dir="5400000">
-              <a:srgbClr val="000000">
-                <a:alpha val="12000"/>
-              </a:srgbClr>
-            </a:outerShdw>
-          </a:effectLst>
-        </a:effectStyle>
-        <a:effectStyle>
-          <a:effectLst>
-            <a:outerShdw blurRad="171450" dist="57150" dir="5400000">
-              <a:srgbClr val="000000">
-                <a:alpha val="16000"/>
-              </a:srgbClr>
-            </a:outerShdw>
-          </a:effectLst>
-        </a:effectStyle>
-        <a:effectStyle>
-          <a:effectLst>
-            <a:outerShdw blurRad="266700" dist="95250" dir="5400000">
-              <a:srgbClr val="000000">
-                <a:alpha val="24000"/>
-              </a:srgbClr>
-            </a:outerShdw>
-          </a:effectLst>
-        </a:effectStyle>
-      </a:effectStyleLst>
-      <a:bgFillStyleLst>
-        <a:solidFill>
-          <a:schemeClr val="phClr"/>
-        </a:solidFill>
-        <a:solidFill>
-          <a:schemeClr val="phClr">
-            <a:tint val="95000"/>
-            <a:satMod val="170000"/>
-          </a:schemeClr>
-        </a:solidFill>
-        <a:gradFill>
-          <a:gsLst>
-            <a:gs pos="0">
-              <a:schemeClr val="phClr">
-                <a:tint val="93000"/>
-                <a:shade val="98000"/>
-                <a:lumMod val="102000"/>
-                <a:satMod val="150000"/>
-              </a:schemeClr>
-            </a:gs>
-            <a:gs pos="50000">
-              <a:schemeClr val="phClr">
-                <a:tint val="98000"/>
-                <a:shade val="90000"/>
-                <a:lumMod val="103000"/>
-                <a:satMod val="130000"/>
-              </a:schemeClr>
-            </a:gs>
-            <a:gs pos="100000">
-              <a:schemeClr val="phClr">
-                <a:shade val="63000"/>
-                <a:satMod val="120000"/>
-              </a:schemeClr>
-            </a:gs>
-          </a:gsLst>
-          <a:lin ang="5400000" scaled="0"/>
-        </a:gradFill>
-      </a:bgFillStyleLst>
-    </a:fmtScheme>
-  </a:themeElements>
-</a:theme>
-</file>
-
-<file path=ppt/notesSlides/notesSlide1.xml><?xml version="1.0" encoding="utf-8"?>
-<p:notes xmlns:p="http://schemas.openxmlformats.org/presentationml/2006/main">
-  <p:cSld>
-    <p:spTree>
-      <p:nvGrpSpPr>
-        <p:cNvPr id="1" name=""/>
-        <p:cNvGrpSpPr/>
-        <p:nvPr/>
-      </p:nvGrpSpPr>
-      <p:grpSpPr>
-        <a:xfrm xmlns:a="http://schemas.openxmlformats.org/drawingml/2006/main"/>
-      </p:grpSpPr>
-      <p:sp>
-        <p:nvSpPr>
-          <p:cNvPr id="2" name="Slide Image Placeholder 1"/>
-          <p:cNvSpPr>
-            <a:spLocks xmlns:a="http://schemas.openxmlformats.org/drawingml/2006/main" noGrp="1"/>
-          </p:cNvSpPr>
-          <p:nvPr>
-            <p:ph type="sldImg" idx="0"/>
-          </p:nvPr>
-        </p:nvSpPr>
-        <p:spPr/>
-      </p:sp>
-      <p:sp>
-        <p:nvSpPr>
-          <p:cNvPr id="3" name="Notes Placeholder 2"/>
-          <p:cNvSpPr>
-            <a:spLocks xmlns:a="http://schemas.openxmlformats.org/drawingml/2006/main" noGrp="1"/>
-          </p:cNvSpPr>
-          <p:nvPr>
-            <p:ph type="body" idx="1"/>
-          </p:nvPr>
-        </p:nvSpPr>
-        <p:spPr/>
-        <p:txBody>
-          <a:bodyPr xmlns:a="http://schemas.openxmlformats.org/drawingml/2006/main"/>
-          <a:lstStyle xmlns:a="http://schemas.openxmlformats.org/drawingml/2006/main"/>
-          <a:p xmlns:a="http://schemas.openxmlformats.org/drawingml/2006/main">
-            <a:r>
-              <a:t>Opening pitch: "Before we dive in, here's the live link so you can follow along: wolf-day-damage.vercel.app/dashboard. I'll walk you through what we built, then we'll review the dashboard together — it's designed for the workshop mechanic."</a:t>
-            </a:r>
-          </a:p>
-        </p:txBody>
-      </p:sp>
-      <p:sp>
-        <p:nvSpPr>
-          <p:cNvPr id="4" name="Slide Number Placeholder 3"/>
-          <p:cNvSpPr>
-            <a:spLocks xmlns:a="http://schemas.openxmlformats.org/drawingml/2006/main" noGrp="1"/>
-          </p:cNvSpPr>
-          <p:nvPr>
-            <p:ph type="sldNum" idx="5"/>
-          </p:nvPr>
-        </p:nvSpPr>
-        <p:spPr/>
-        <p:txBody>
-          <a:bodyPr xmlns:a="http://schemas.openxmlformats.org/drawingml/2006/main"/>
-          <a:lstStyle xmlns:a="http://schemas.openxmlformats.org/drawingml/2006/main"/>
-          <a:p xmlns:a="http://schemas.openxmlformats.org/drawingml/2006/main"/>
-        </p:txBody>
-      </p:sp>
-    </p:spTree>
-  </p:cSld>
-  <p:clrMapOvr>
-    <a:masterClrMapping xmlns:a="http://schemas.openxmlformats.org/drawingml/2006/main"/>
-  </p:clrMapOvr>
-</p:notes>
-</file>
-
-<file path=ppt/notesSlides/notesSlide2.xml><?xml version="1.0" encoding="utf-8"?>
-<p:notes xmlns:p="http://schemas.openxmlformats.org/presentationml/2006/main">
-  <p:cSld>
-    <p:spTree>
-      <p:nvGrpSpPr>
-        <p:cNvPr id="1" name=""/>
-        <p:cNvGrpSpPr/>
-        <p:nvPr/>
-      </p:nvGrpSpPr>
-      <p:grpSpPr>
-        <a:xfrm xmlns:a="http://schemas.openxmlformats.org/drawingml/2006/main"/>
-      </p:grpSpPr>
-      <p:sp>
-        <p:nvSpPr>
-          <p:cNvPr id="2" name="Slide Image Placeholder 1"/>
-          <p:cNvSpPr>
-            <a:spLocks xmlns:a="http://schemas.openxmlformats.org/drawingml/2006/main" noGrp="1"/>
-          </p:cNvSpPr>
-          <p:nvPr>
-            <p:ph type="sldImg" idx="0"/>
-          </p:nvPr>
-        </p:nvSpPr>
-        <p:spPr/>
-      </p:sp>
-      <p:sp>
-        <p:nvSpPr>
-          <p:cNvPr id="3" name="Notes Placeholder 2"/>
-          <p:cNvSpPr>
-            <a:spLocks xmlns:a="http://schemas.openxmlformats.org/drawingml/2006/main" noGrp="1"/>
-          </p:cNvSpPr>
-          <p:nvPr>
-            <p:ph type="body" idx="1"/>
-          </p:nvPr>
-        </p:nvSpPr>
-        <p:spPr/>
-        <p:txBody>
-          <a:bodyPr xmlns:a="http://schemas.openxmlformats.org/drawingml/2006/main"/>
-          <a:lstStyle xmlns:a="http://schemas.openxmlformats.org/drawingml/2006/main"/>
-          <a:p xmlns:a="http://schemas.openxmlformats.org/drawingml/2006/main">
-            <a:r>
-              <a:t>Durée : 50 secondes. L’IA remplit un schéma strict et doit conserver un extrait allemand justifiant chaque dommage. Le vocabulaire fermé permet de relier une pièce et son côté à la visualisation. Les statuts proviennent des données structurées. Une action explicite dans la note est prioritaire. Sinon, des règles proposent les opérations. La dépose et repose (R&amp;I) utilise une table de dépendances. Elle distingue une pièce endommagée d’une pièce voisine à démonter. Le cache par identifiant évite de refaire les appels déjà réussis. Les invalidités sont signalées, les appels utilisent des reprises avec délai croissant. La validation du format ne prouve pas l’exactitude du sens.</a:t>
-            </a:r>
-          </a:p>
-          <a:p xmlns:a="http://schemas.openxmlformats.org/drawingml/2006/main">
-            <a:r>
-              <a:t/>
-            </a:r>
-          </a:p>
-          <a:p xmlns:a="http://schemas.openxmlformats.org/drawingml/2006/main">
-            <a:r>
-              <a:t>Sources locales :</a:t>
-            </a:r>
-          </a:p>
-          <a:p xmlns:a="http://schemas.openxmlformats.org/drawingml/2006/main">
-            <a:r>
-              <a:t>C:/Users/benda/Desktop/Hackathon/Work/pipeline/extract.py</a:t>
-            </a:r>
-          </a:p>
-          <a:p xmlns:a="http://schemas.openxmlformats.org/drawingml/2006/main">
-            <a:r>
-              <a:t>C:/Users/benda/Desktop/Hackathon/Work/pipeline/schema.py</a:t>
-            </a:r>
-          </a:p>
-          <a:p xmlns:a="http://schemas.openxmlformats.org/drawingml/2006/main">
-            <a:r>
-              <a:t>C:/Users/benda/Desktop/Hackathon/Work/pipeline/repair_logic.py</a:t>
-            </a:r>
-          </a:p>
-          <a:p xmlns:a="http://schemas.openxmlformats.org/drawingml/2006/main">
-            <a:r>
-              <a:t>C:/Users/benda/Desktop/Hackathon/Work/pipeline/build_dataset.py</a:t>
-            </a:r>
-          </a:p>
-        </p:txBody>
-      </p:sp>
-      <p:sp>
-        <p:nvSpPr>
-          <p:cNvPr id="4" name="Slide Number Placeholder 3"/>
-          <p:cNvSpPr>
-            <a:spLocks xmlns:a="http://schemas.openxmlformats.org/drawingml/2006/main" noGrp="1"/>
-          </p:cNvSpPr>
-          <p:nvPr>
-            <p:ph type="sldNum" idx="5"/>
-          </p:nvPr>
-        </p:nvSpPr>
-        <p:spPr/>
-        <p:txBody>
-          <a:bodyPr xmlns:a="http://schemas.openxmlformats.org/drawingml/2006/main"/>
-          <a:lstStyle xmlns:a="http://schemas.openxmlformats.org/drawingml/2006/main"/>
-          <a:p xmlns:a="http://schemas.openxmlformats.org/drawingml/2006/main"/>
-        </p:txBody>
-      </p:sp>
-    </p:spTree>
-  </p:cSld>
-  <p:clrMapOvr>
-    <a:masterClrMapping xmlns:a="http://schemas.openxmlformats.org/drawingml/2006/main"/>
-  </p:clrMapOvr>
-</p:notes>
-</file>
-
-<file path=ppt/notesSlides/notesSlide3.xml><?xml version="1.0" encoding="utf-8"?>
-<p:notes xmlns:p="http://schemas.openxmlformats.org/presentationml/2006/main">
-  <p:cSld>
-    <p:spTree>
-      <p:nvGrpSpPr>
-        <p:cNvPr id="1" name=""/>
-        <p:cNvGrpSpPr/>
-        <p:nvPr/>
-      </p:nvGrpSpPr>
-      <p:grpSpPr>
-        <a:xfrm xmlns:a="http://schemas.openxmlformats.org/drawingml/2006/main"/>
-      </p:grpSpPr>
-      <p:sp>
-        <p:nvSpPr>
-          <p:cNvPr id="2" name="Slide Image Placeholder 1"/>
-          <p:cNvSpPr>
-            <a:spLocks xmlns:a="http://schemas.openxmlformats.org/drawingml/2006/main" noGrp="1"/>
-          </p:cNvSpPr>
-          <p:nvPr>
-            <p:ph type="sldImg" idx="0"/>
-          </p:nvPr>
-        </p:nvSpPr>
-        <p:spPr/>
-      </p:sp>
-      <p:sp>
-        <p:nvSpPr>
-          <p:cNvPr id="3" name="Notes Placeholder 2"/>
-          <p:cNvSpPr>
-            <a:spLocks xmlns:a="http://schemas.openxmlformats.org/drawingml/2006/main" noGrp="1"/>
-          </p:cNvSpPr>
-          <p:nvPr>
-            <p:ph type="body" idx="1"/>
-          </p:nvPr>
-        </p:nvSpPr>
-        <p:spPr/>
-        <p:txBody>
-          <a:bodyPr xmlns:a="http://schemas.openxmlformats.org/drawingml/2006/main"/>
-          <a:lstStyle xmlns:a="http://schemas.openxmlformats.org/drawingml/2006/main"/>
-          <a:p xmlns:a="http://schemas.openxmlformats.org/drawingml/2006/main">
-            <a:r>
-              <a:t>Durée : 45 secondes. Montrer la phrase allemande avant les couleurs. La note précise que la réparation du pare-brise est impossible et demande un remplacement. Le pare-brise apparaît en orange, qui correspond ici à la gravité moyenne extraite. Le bleu désigne une garniture à déposer et reposer selon la règle métier, pas un second dommage. Cet exemple appartient au pilote de développement : il illustre le fonctionnement, pas une preuve de généralisation. Le prototype comporte aussi une vue 3D, mais la capture utilise la vue 2D, plus lisible pour expliquer le lien données / zones. Démo locale : http://localhost:8083/dashboard/cases/820002/.</a:t>
-            </a:r>
-          </a:p>
-          <a:p xmlns:a="http://schemas.openxmlformats.org/drawingml/2006/main">
-            <a:r>
-              <a:t/>
-            </a:r>
-          </a:p>
-          <a:p xmlns:a="http://schemas.openxmlformats.org/drawingml/2006/main">
-            <a:r>
-              <a:t>Sources locales :</a:t>
-            </a:r>
-          </a:p>
-          <a:p xmlns:a="http://schemas.openxmlformats.org/drawingml/2006/main">
-            <a:r>
-              <a:t>C:/Users/benda/Desktop/Hackathon/Data/frontend/public/data/cases.json</a:t>
-            </a:r>
-          </a:p>
-          <a:p xmlns:a="http://schemas.openxmlformats.org/drawingml/2006/main">
-            <a:r>
-              <a:t>C:/Users/benda/Desktop/Hackathon/Data/frontend/src/sections/damage/car-diagram.tsx</a:t>
-            </a:r>
-          </a:p>
-          <a:p xmlns:a="http://schemas.openxmlformats.org/drawingml/2006/main">
-            <a:r>
-              <a:t>C:/Users/benda/Desktop/Hackathon/Work/pipeline/repair_logic.py</a:t>
-            </a:r>
-          </a:p>
-          <a:p xmlns:a="http://schemas.openxmlformats.org/drawingml/2006/main">
-            <a:r>
-              <a:t>C:/Users/benda/Desktop/Hackathon/Work/pipeline/ml_common.py</a:t>
-            </a:r>
-          </a:p>
-        </p:txBody>
-      </p:sp>
-      <p:sp>
-        <p:nvSpPr>
-          <p:cNvPr id="4" name="Slide Number Placeholder 3"/>
-          <p:cNvSpPr>
-            <a:spLocks xmlns:a="http://schemas.openxmlformats.org/drawingml/2006/main" noGrp="1"/>
-          </p:cNvSpPr>
-          <p:nvPr>
-            <p:ph type="sldNum" idx="5"/>
-          </p:nvPr>
-        </p:nvSpPr>
-        <p:spPr/>
-        <p:txBody>
-          <a:bodyPr xmlns:a="http://schemas.openxmlformats.org/drawingml/2006/main"/>
-          <a:lstStyle xmlns:a="http://schemas.openxmlformats.org/drawingml/2006/main"/>
-          <a:p xmlns:a="http://schemas.openxmlformats.org/drawingml/2006/main"/>
-        </p:txBody>
-      </p:sp>
-    </p:spTree>
-  </p:cSld>
-  <p:clrMapOvr>
-    <a:masterClrMapping xmlns:a="http://schemas.openxmlformats.org/drawingml/2006/main"/>
-  </p:clrMapOvr>
-</p:notes>
-</file>
-
-<file path=ppt/notesSlides/notesSlide4.xml><?xml version="1.0" encoding="utf-8"?>
-<p:notes xmlns:p="http://schemas.openxmlformats.org/presentationml/2006/main">
-  <p:cSld>
-    <p:spTree>
-      <p:nvGrpSpPr>
-        <p:cNvPr id="1" name=""/>
-        <p:cNvGrpSpPr/>
-        <p:nvPr/>
-      </p:nvGrpSpPr>
-      <p:grpSpPr>
-        <a:xfrm xmlns:a="http://schemas.openxmlformats.org/drawingml/2006/main"/>
-      </p:grpSpPr>
-      <p:sp>
-        <p:nvSpPr>
-          <p:cNvPr id="2" name="Slide Image Placeholder 1"/>
-          <p:cNvSpPr>
-            <a:spLocks xmlns:a="http://schemas.openxmlformats.org/drawingml/2006/main" noGrp="1"/>
-          </p:cNvSpPr>
-          <p:nvPr>
-            <p:ph type="sldImg" idx="0"/>
-          </p:nvPr>
-        </p:nvSpPr>
-        <p:spPr/>
-      </p:sp>
-      <p:sp>
-        <p:nvSpPr>
-          <p:cNvPr id="3" name="Notes Placeholder 2"/>
-          <p:cNvSpPr>
-            <a:spLocks xmlns:a="http://schemas.openxmlformats.org/drawingml/2006/main" noGrp="1"/>
-          </p:cNvSpPr>
-          <p:nvPr>
-            <p:ph type="body" idx="1"/>
-          </p:nvPr>
-        </p:nvSpPr>
-        <p:spPr/>
-        <p:txBody>
-          <a:bodyPr xmlns:a="http://schemas.openxmlformats.org/drawingml/2006/main"/>
-          <a:lstStyle xmlns:a="http://schemas.openxmlformats.org/drawingml/2006/main"/>
-          <a:p xmlns:a="http://schemas.openxmlformats.org/drawingml/2006/main">
-            <a:r>
-              <a:t>Durée : 40 secondes. Le corpus comprend 550 dossiers de service et 450 de dommages. Parmi ces derniers, 110 concernent le stationnement et 76 une manœuvre, soit 186/450 = 41,3 %. Une piste métier serait de regarder leur charge de carrosserie, mais nous ne mesurons pas ici un gain opérationnel. Les 668 dossiers présents dans la liste ouverte ont une ancienneté médiane de 150 jours au 18 septembre 2026. C’est une durée depuis la création, pas une durée de réparation, et certains statuts peuvent nécessiter une vérification. Les observations décrivent ce jeu synthétique, sans extrapolation au marché. Les libellés du graphique sont en français pour l’oral, les notes sources restent en allemand.</a:t>
-            </a:r>
-          </a:p>
-          <a:p xmlns:a="http://schemas.openxmlformats.org/drawingml/2006/main">
-            <a:r>
-              <a:t/>
-            </a:r>
-          </a:p>
-          <a:p xmlns:a="http://schemas.openxmlformats.org/drawingml/2006/main">
-            <a:r>
-              <a:t>Sources locales :</a:t>
-            </a:r>
-          </a:p>
-          <a:p xmlns:a="http://schemas.openxmlformats.org/drawingml/2006/main">
-            <a:r>
-              <a:t>C:/Users/benda/Desktop/Hackathon/Data/frontend/public/data/aggregates.json</a:t>
-            </a:r>
-          </a:p>
-          <a:p xmlns:a="http://schemas.openxmlformats.org/drawingml/2006/main">
-            <a:r>
-              <a:t>C:/Users/benda/Desktop/Hackathon/Work/pipeline/build_dataset.py</a:t>
-            </a:r>
-          </a:p>
-          <a:p xmlns:a="http://schemas.openxmlformats.org/drawingml/2006/main">
-            <a:r>
-              <a:t>C:/Users/benda/Desktop/Hackathon/Dataset/DATASET.md</a:t>
-            </a:r>
-          </a:p>
-        </p:txBody>
-      </p:sp>
-      <p:sp>
-        <p:nvSpPr>
-          <p:cNvPr id="4" name="Slide Number Placeholder 3"/>
-          <p:cNvSpPr>
-            <a:spLocks xmlns:a="http://schemas.openxmlformats.org/drawingml/2006/main" noGrp="1"/>
-          </p:cNvSpPr>
-          <p:nvPr>
-            <p:ph type="sldNum" idx="5"/>
-          </p:nvPr>
-        </p:nvSpPr>
-        <p:spPr/>
-        <p:txBody>
-          <a:bodyPr xmlns:a="http://schemas.openxmlformats.org/drawingml/2006/main"/>
-          <a:lstStyle xmlns:a="http://schemas.openxmlformats.org/drawingml/2006/main"/>
-          <a:p xmlns:a="http://schemas.openxmlformats.org/drawingml/2006/main"/>
-        </p:txBody>
-      </p:sp>
-    </p:spTree>
-  </p:cSld>
-  <p:clrMapOvr>
-    <a:masterClrMapping xmlns:a="http://schemas.openxmlformats.org/drawingml/2006/main"/>
-  </p:clrMapOvr>
-</p:notes>
-</file>
-
-<file path=ppt/notesSlides/notesSlide5.xml><?xml version="1.0" encoding="utf-8"?>
-<p:notes xmlns:p="http://schemas.openxmlformats.org/presentationml/2006/main">
-  <p:cSld>
-    <p:spTree>
-      <p:nvGrpSpPr>
-        <p:cNvPr id="1" name=""/>
-        <p:cNvGrpSpPr/>
-        <p:nvPr/>
-      </p:nvGrpSpPr>
-      <p:grpSpPr>
-        <a:xfrm xmlns:a="http://schemas.openxmlformats.org/drawingml/2006/main"/>
-      </p:grpSpPr>
-      <p:sp>
-        <p:nvSpPr>
-          <p:cNvPr id="2" name="Slide Image Placeholder 1"/>
-          <p:cNvSpPr>
-            <a:spLocks xmlns:a="http://schemas.openxmlformats.org/drawingml/2006/main" noGrp="1"/>
-          </p:cNvSpPr>
-          <p:nvPr>
-            <p:ph type="sldImg" idx="0"/>
-          </p:nvPr>
-        </p:nvSpPr>
-        <p:spPr/>
-      </p:sp>
-      <p:sp>
-        <p:nvSpPr>
-          <p:cNvPr id="3" name="Notes Placeholder 2"/>
-          <p:cNvSpPr>
-            <a:spLocks xmlns:a="http://schemas.openxmlformats.org/drawingml/2006/main" noGrp="1"/>
-          </p:cNvSpPr>
-          <p:nvPr>
-            <p:ph type="body" idx="1"/>
-          </p:nvPr>
-        </p:nvSpPr>
-        <p:spPr/>
-        <p:txBody>
-          <a:bodyPr xmlns:a="http://schemas.openxmlformats.org/drawingml/2006/main"/>
-          <a:lstStyle xmlns:a="http://schemas.openxmlformats.org/drawingml/2006/main"/>
-          <a:p xmlns:a="http://schemas.openxmlformats.org/drawingml/2006/main">
-            <a:r>
-              <a:t>Durée : 60 secondes. Deux protocoles apparaissent ici. À gauche, l’extraction DeepSeek est évaluée sur 977 dossiers exclus des 3 exemples du prompt et des 20 cas pilotes. Les zones donnent 751 vrais positifs, zéro faux positif et un faux négatif, soit un F1 de 99,93 %. Le type de cas atteint 100 %. L’assurance atteint 100 % sur les 434 cas de dommages de ce test. La gravité DeepSeek sur ces 434 cas vaut 68,7 %, à ne pas comparer directement au tableau de droite. À droite, chaque modèle utilise exactement les mêmes 150 identifiants réservés pour la gravité. Les modèles supervisés ont 284 exemples d’entraînement. Les comptes vérifiés sont XGBoost 123/150, GBERT 118/150, régression logistique 110/150, DeepSeek 109/150, LightGBM 98/150. Ces résultats décrivent un seul découpage du corpus synthétique. Les phrases récurrentes limitent leur portée. La baseline lexicale atteint également 100 % de F1 sur les zones de ce corpus. Les scores ne prouvent donc pas une supériorité universelle du LLM.</a:t>
-            </a:r>
-          </a:p>
-          <a:p xmlns:a="http://schemas.openxmlformats.org/drawingml/2006/main">
-            <a:r>
-              <a:t/>
-            </a:r>
-          </a:p>
-          <a:p xmlns:a="http://schemas.openxmlformats.org/drawingml/2006/main">
-            <a:r>
-              <a:t>Sources locales :</a:t>
-            </a:r>
-          </a:p>
-          <a:p xmlns:a="http://schemas.openxmlformats.org/drawingml/2006/main">
-            <a:r>
-              <a:t>C:/Users/benda/Desktop/Hackathon/Work/pipeline/eval_report.json</a:t>
-            </a:r>
-          </a:p>
-          <a:p xmlns:a="http://schemas.openxmlformats.org/drawingml/2006/main">
-            <a:r>
-              <a:t>C:/Users/benda/Desktop/Hackathon/Work/pipeline/ml_split.json</a:t>
-            </a:r>
-          </a:p>
-          <a:p xmlns:a="http://schemas.openxmlformats.org/drawingml/2006/main">
-            <a:r>
-              <a:t>C:/Users/benda/Desktop/Hackathon/Work/pipeline/gbert_result.json</a:t>
-            </a:r>
-          </a:p>
-          <a:p xmlns:a="http://schemas.openxmlformats.org/drawingml/2006/main">
-            <a:r>
-              <a:t>C:/Users/benda/Desktop/Hackathon/Data/frontend/public/data/model_comparison.json</a:t>
-            </a:r>
-          </a:p>
-          <a:p xmlns:a="http://schemas.openxmlformats.org/drawingml/2006/main">
-            <a:r>
-              <a:t>C:/Users/benda/Desktop/Hackathon/Work/pipeline/train_cpu_models.py</a:t>
-            </a:r>
-          </a:p>
-        </p:txBody>
-      </p:sp>
-      <p:sp>
-        <p:nvSpPr>
-          <p:cNvPr id="4" name="Slide Number Placeholder 3"/>
-          <p:cNvSpPr>
-            <a:spLocks xmlns:a="http://schemas.openxmlformats.org/drawingml/2006/main" noGrp="1"/>
-          </p:cNvSpPr>
-          <p:nvPr>
-            <p:ph type="sldNum" idx="5"/>
-          </p:nvPr>
-        </p:nvSpPr>
-        <p:spPr/>
-        <p:txBody>
-          <a:bodyPr xmlns:a="http://schemas.openxmlformats.org/drawingml/2006/main"/>
-          <a:lstStyle xmlns:a="http://schemas.openxmlformats.org/drawingml/2006/main"/>
-          <a:p xmlns:a="http://schemas.openxmlformats.org/drawingml/2006/main"/>
-        </p:txBody>
-      </p:sp>
-    </p:spTree>
-  </p:cSld>
-  <p:clrMapOvr>
-    <a:masterClrMapping xmlns:a="http://schemas.openxmlformats.org/drawingml/2006/main"/>
-  </p:clrMapOvr>
-</p:notes>
-</file>
-
-<file path=ppt/notesSlides/notesSlide6.xml><?xml version="1.0" encoding="utf-8"?>
-<p:notes xmlns:p="http://schemas.openxmlformats.org/presentationml/2006/main">
-  <p:cSld>
-    <p:spTree>
-      <p:nvGrpSpPr>
-        <p:cNvPr id="1" name=""/>
-        <p:cNvGrpSpPr/>
-        <p:nvPr/>
-      </p:nvGrpSpPr>
-      <p:grpSpPr>
-        <a:xfrm xmlns:a="http://schemas.openxmlformats.org/drawingml/2006/main"/>
-      </p:grpSpPr>
-      <p:sp>
-        <p:nvSpPr>
-          <p:cNvPr id="2" name="Slide Image Placeholder 1"/>
-          <p:cNvSpPr>
-            <a:spLocks xmlns:a="http://schemas.openxmlformats.org/drawingml/2006/main" noGrp="1"/>
-          </p:cNvSpPr>
-          <p:nvPr>
-            <p:ph type="sldImg" idx="0"/>
-          </p:nvPr>
-        </p:nvSpPr>
-        <p:spPr/>
-      </p:sp>
-      <p:sp>
-        <p:nvSpPr>
-          <p:cNvPr id="3" name="Notes Placeholder 2"/>
-          <p:cNvSpPr>
-            <a:spLocks xmlns:a="http://schemas.openxmlformats.org/drawingml/2006/main" noGrp="1"/>
-          </p:cNvSpPr>
-          <p:nvPr>
-            <p:ph type="body" idx="1"/>
-          </p:nvPr>
-        </p:nvSpPr>
-        <p:spPr/>
-        <p:txBody>
-          <a:bodyPr xmlns:a="http://schemas.openxmlformats.org/drawingml/2006/main"/>
-          <a:lstStyle xmlns:a="http://schemas.openxmlformats.org/drawingml/2006/main"/>
-          <a:p xmlns:a="http://schemas.openxmlformats.org/drawingml/2006/main">
-            <a:r>
-              <a:t>Durée : 45 secondes. Être explicite sur les limites : le corpus est synthétique et réutilise des formulations. Les identifiants de test sont séparés, mais des formulations proches peuvent apparaître des deux côtés du découpage. Une validation par famille de formulation puis sur des notes réelles serait plus probante. Le rapport montre que la même phrase de bris de glace peut recevoir plusieurs gravités. Il estime un score de 79,5 % pour une correspondance par empreintes textuelles : cette estimation est propre à sa méthode et à son périmètre, pas une borne universelle pour le test des 150 dossiers. Nous ne l’affichons pas comme plafond face aux 82 % de XGBoost. Les citations verbatim et Pydantic permettent l’audit, mais ne garantissent pas l’exactitude sémantique. Les règles R&amp;I et de remplacement ne disposent pas de labels de vérité terrain dans ce jeu. Les champs vides sont volontaires : compléter les mesures de latence et coût réel ainsi que la validation externe quand elles seront disponibles. Aucun gain financier n’est revendiqué.</a:t>
-            </a:r>
-          </a:p>
-          <a:p xmlns:a="http://schemas.openxmlformats.org/drawingml/2006/main">
-            <a:r>
-              <a:t/>
-            </a:r>
-          </a:p>
-          <a:p xmlns:a="http://schemas.openxmlformats.org/drawingml/2006/main">
-            <a:r>
-              <a:t>Sources locales :</a:t>
-            </a:r>
-          </a:p>
-          <a:p xmlns:a="http://schemas.openxmlformats.org/drawingml/2006/main">
-            <a:r>
-              <a:t>C:/Users/benda/Desktop/Hackathon/docs/jury-reliability-report.md</a:t>
-            </a:r>
-          </a:p>
-          <a:p xmlns:a="http://schemas.openxmlformats.org/drawingml/2006/main">
-            <a:r>
-              <a:t>C:/Users/benda/Desktop/Hackathon/Work/pipeline/repair_logic.py</a:t>
-            </a:r>
-          </a:p>
-          <a:p xmlns:a="http://schemas.openxmlformats.org/drawingml/2006/main">
-            <a:r>
-              <a:t>C:/Users/benda/Desktop/Hackathon/Dataset/DATASET.md</a:t>
-            </a:r>
-          </a:p>
-          <a:p xmlns:a="http://schemas.openxmlformats.org/drawingml/2006/main">
-            <a:r>
-              <a:t>C:/Users/benda/Desktop/Hackathon/Work/pipeline/eval_report.json</a:t>
-            </a:r>
-          </a:p>
-        </p:txBody>
-      </p:sp>
-      <p:sp>
-        <p:nvSpPr>
-          <p:cNvPr id="4" name="Slide Number Placeholder 3"/>
-          <p:cNvSpPr>
-            <a:spLocks xmlns:a="http://schemas.openxmlformats.org/drawingml/2006/main" noGrp="1"/>
-          </p:cNvSpPr>
-          <p:nvPr>
-            <p:ph type="sldNum" idx="5"/>
-          </p:nvPr>
-        </p:nvSpPr>
-        <p:spPr/>
-        <p:txBody>
-          <a:bodyPr xmlns:a="http://schemas.openxmlformats.org/drawingml/2006/main"/>
-          <a:lstStyle xmlns:a="http://schemas.openxmlformats.org/drawingml/2006/main"/>
-          <a:p xmlns:a="http://schemas.openxmlformats.org/drawingml/2006/main"/>
-        </p:txBody>
-      </p:sp>
-    </p:spTree>
-  </p:cSld>
-  <p:clrMapOvr>
-    <a:masterClrMapping xmlns:a="http://schemas.openxmlformats.org/drawingml/2006/main"/>
-  </p:clrMapOvr>
-</p:notes>
-</file>
-
-<file path=ppt/slideLayouts/slideLayout1.xml><?xml version="1.0" encoding="utf-8"?>
-<p:sldLayout xmlns:p="http://schemas.openxmlformats.org/presentationml/2006/main" type="title">
-  <p:cSld name="Title Slide">
-    <p:spTree>
-      <p:nvGrpSpPr>
-        <p:cNvPr id="1" name=""/>
-        <p:cNvGrpSpPr/>
-        <p:nvPr/>
-      </p:nvGrpSpPr>
-      <p:grpSpPr>
-        <a:xfrm xmlns:a="http://schemas.openxmlformats.org/drawingml/2006/main"/>
-      </p:grpSpPr>
-    </p:spTree>
-  </p:cSld>
-</p:sldLayout>
-</file>
-
-<file path=ppt/slideMasters/slideMaster1.xml><?xml version="1.0" encoding="utf-8"?>
-<p:sldMaster xmlns:p="http://schemas.openxmlformats.org/presentationml/2006/main">
-  <p:cSld name="Master">
-    <p:bg>
-      <p:bgRef idx="1001">
-        <a:schemeClr xmlns:a="http://schemas.openxmlformats.org/drawingml/2006/main" val="bg1"/>
-      </p:bgRef>
-    </p:bg>
-    <p:spTree>
-      <p:nvGrpSpPr>
-        <p:cNvPr id="1" name=""/>
-        <p:cNvGrpSpPr/>
-        <p:nvPr/>
-      </p:nvGrpSpPr>
-      <p:grpSpPr>
-        <a:xfrm xmlns:a="http://schemas.openxmlformats.org/drawingml/2006/main"/>
-      </p:grpSpPr>
-    </p:spTree>
-  </p:cSld>
-  <p:clrMap bg1="lt1" tx1="dk1" bg2="lt2" tx2="dk2" accent1="accent1" accent2="accent2" accent3="accent3" accent4="accent4" accent5="accent5" accent6="accent6" hlink="hlink" folHlink="folHlink"/>
-  <p:sldLayoutIdLst>
-    <p:sldLayoutId xmlns:r="http://schemas.openxmlformats.org/officeDocument/2006/relationships" id="2147483649" r:id="R8bcca461c649411c"/>
-  </p:sldLayoutIdLst>
-  <p:txStyles>
-    <p:titleStyle>
-      <a:lvl1pPr xmlns:a="http://schemas.openxmlformats.org/drawingml/2006/main" algn="l">
-        <a:lnSpc>
-          <a:spcPct val="90000"/>
-        </a:lnSpc>
-        <a:spcBef>
-          <a:spcPts val="0"/>
-        </a:spcBef>
-        <a:buNone/>
-        <a:defRPr sz="4400">
-          <a:solidFill>
-            <a:schemeClr val="tx1"/>
-          </a:solidFill>
-          <a:latin typeface="+mj-lt"/>
-          <a:ea typeface="+mj-lt"/>
-          <a:cs typeface="+mj-lt"/>
-        </a:defRPr>
-      </a:lvl1pPr>
-    </p:titleStyle>
-    <p:bodyStyle>
-      <a:lvl1pPr xmlns:a="http://schemas.openxmlformats.org/drawingml/2006/main" marL="228600" indent="-228600" algn="l">
-        <a:lnSpc>
-          <a:spcPct val="90000"/>
-        </a:lnSpc>
-        <a:spcBef>
-          <a:spcPts val="1000"/>
-        </a:spcBef>
-        <a:buChar char="•"/>
-        <a:defRPr sz="2800">
-          <a:solidFill>
-            <a:schemeClr val="tx1"/>
-          </a:solidFill>
-          <a:latin typeface="+mn-lt"/>
-          <a:ea typeface="+mn-lt"/>
-          <a:cs typeface="+mn-lt"/>
-        </a:defRPr>
-      </a:lvl1pPr>
-      <a:lvl2pPr xmlns:a="http://schemas.openxmlformats.org/drawingml/2006/main" marL="685800" indent="-228600" algn="l">
-        <a:lnSpc>
-          <a:spcPct val="90000"/>
-        </a:lnSpc>
-        <a:spcBef>
-          <a:spcPts val="500"/>
-        </a:spcBef>
-        <a:buChar char="•"/>
-        <a:defRPr sz="2400">
-          <a:solidFill>
-            <a:schemeClr val="tx1"/>
-          </a:solidFill>
-          <a:latin typeface="+mn-lt"/>
-          <a:ea typeface="+mn-lt"/>
-          <a:cs typeface="+mn-lt"/>
-        </a:defRPr>
-      </a:lvl2pPr>
-      <a:lvl3pPr xmlns:a="http://schemas.openxmlformats.org/drawingml/2006/main" marL="1143000" indent="-228600" algn="l">
-        <a:lnSpc>
-          <a:spcPct val="90000"/>
-        </a:lnSpc>
-        <a:spcBef>
-          <a:spcPts val="500"/>
-        </a:spcBef>
-        <a:buChar char="•"/>
-        <a:defRPr sz="2000">
-          <a:solidFill>
-            <a:schemeClr val="tx1"/>
-          </a:solidFill>
-          <a:latin typeface="+mn-lt"/>
-          <a:ea typeface="+mn-lt"/>
-          <a:cs typeface="+mn-lt"/>
-        </a:defRPr>
-      </a:lvl3pPr>
-      <a:lvl4pPr xmlns:a="http://schemas.openxmlformats.org/drawingml/2006/main" marL="1600200" indent="-228600" algn="l">
-        <a:lnSpc>
-          <a:spcPct val="90000"/>
-        </a:lnSpc>
-        <a:spcBef>
-          <a:spcPts val="500"/>
-        </a:spcBef>
-        <a:buChar char="•"/>
-        <a:defRPr sz="1800">
-          <a:solidFill>
-            <a:schemeClr val="tx1"/>
-          </a:solidFill>
-          <a:latin typeface="+mn-lt"/>
-          <a:ea typeface="+mn-lt"/>
-          <a:cs typeface="+mn-lt"/>
-        </a:defRPr>
-      </a:lvl4pPr>
-      <a:lvl5pPr xmlns:a="http://schemas.openxmlformats.org/drawingml/2006/main" marL="2057400" indent="-228600" algn="l">
-        <a:lnSpc>
-          <a:spcPct val="90000"/>
-        </a:lnSpc>
-        <a:spcBef>
-          <a:spcPts val="500"/>
-        </a:spcBef>
-        <a:buChar char="•"/>
-        <a:defRPr sz="1800">
-          <a:solidFill>
-            <a:schemeClr val="tx1"/>
-          </a:solidFill>
-          <a:latin typeface="+mn-lt"/>
-          <a:ea typeface="+mn-lt"/>
-          <a:cs typeface="+mn-lt"/>
-        </a:defRPr>
-      </a:lvl5pPr>
-      <a:lvl6pPr xmlns:a="http://schemas.openxmlformats.org/drawingml/2006/main" marL="2514600" indent="-228600" algn="l">
-        <a:lnSpc>
-          <a:spcPct val="90000"/>
-        </a:lnSpc>
-        <a:spcBef>
-          <a:spcPts val="500"/>
-        </a:spcBef>
-        <a:buChar char="•"/>
-        <a:defRPr sz="1800">
-          <a:solidFill>
-            <a:schemeClr val="tx1"/>
-          </a:solidFill>
-          <a:latin typeface="+mn-lt"/>
-          <a:ea typeface="+mn-lt"/>
-          <a:cs typeface="+mn-lt"/>
-        </a:defRPr>
-      </a:lvl6pPr>
-      <a:lvl7pPr xmlns:a="http://schemas.openxmlformats.org/drawingml/2006/main" marL="2971800" indent="-228600" algn="l">
-        <a:lnSpc>
-          <a:spcPct val="90000"/>
-        </a:lnSpc>
-        <a:spcBef>
-          <a:spcPts val="500"/>
-        </a:spcBef>
-        <a:buChar char="•"/>
-        <a:defRPr sz="1800">
-          <a:solidFill>
-            <a:schemeClr val="tx1"/>
-          </a:solidFill>
-          <a:latin typeface="+mn-lt"/>
-          <a:ea typeface="+mn-lt"/>
-          <a:cs typeface="+mn-lt"/>
-        </a:defRPr>
-      </a:lvl7pPr>
-      <a:lvl8pPr xmlns:a="http://schemas.openxmlformats.org/drawingml/2006/main" marL="3429000" indent="-228600" algn="l">
-        <a:lnSpc>
-          <a:spcPct val="90000"/>
-        </a:lnSpc>
-        <a:spcBef>
-          <a:spcPts val="500"/>
-        </a:spcBef>
-        <a:buChar char="•"/>
-        <a:defRPr sz="1800">
-          <a:solidFill>
-            <a:schemeClr val="tx1"/>
-          </a:solidFill>
-          <a:latin typeface="+mn-lt"/>
-          <a:ea typeface="+mn-lt"/>
-          <a:cs typeface="+mn-lt"/>
-        </a:defRPr>
-      </a:lvl8pPr>
-      <a:lvl9pPr xmlns:a="http://schemas.openxmlformats.org/drawingml/2006/main" marL="3886200" indent="-228600" algn="l">
-        <a:lnSpc>
-          <a:spcPct val="90000"/>
-        </a:lnSpc>
-        <a:spcBef>
-          <a:spcPts val="500"/>
-        </a:spcBef>
-        <a:buChar char="•"/>
-        <a:defRPr sz="1800">
-          <a:solidFill>
-            <a:schemeClr val="tx1"/>
-          </a:solidFill>
-          <a:latin typeface="+mn-lt"/>
-          <a:ea typeface="+mn-lt"/>
-          <a:cs typeface="+mn-lt"/>
-        </a:defRPr>
-      </a:lvl9pPr>
-    </p:bodyStyle>
-    <p:otherStyle>
-      <a:lvl1pPr xmlns:a="http://schemas.openxmlformats.org/drawingml/2006/main" marL="0" algn="l">
-        <a:buNone/>
-        <a:defRPr sz="1800">
-          <a:solidFill>
-            <a:schemeClr val="tx1"/>
-          </a:solidFill>
-          <a:latin typeface="+mn-lt"/>
-          <a:ea typeface="+mn-lt"/>
-          <a:cs typeface="+mn-lt"/>
-        </a:defRPr>
-      </a:lvl1pPr>
-      <a:lvl2pPr xmlns:a="http://schemas.openxmlformats.org/drawingml/2006/main" marL="457200" algn="l">
-        <a:buNone/>
-        <a:defRPr sz="1800">
-          <a:solidFill>
-            <a:schemeClr val="tx1"/>
-          </a:solidFill>
-          <a:latin typeface="+mn-lt"/>
-          <a:ea typeface="+mn-lt"/>
-          <a:cs typeface="+mn-lt"/>
-        </a:defRPr>
-      </a:lvl2pPr>
-      <a:lvl3pPr xmlns:a="http://schemas.openxmlformats.org/drawingml/2006/main" marL="914400" algn="l">
-        <a:buNone/>
-        <a:defRPr sz="1800">
-          <a:solidFill>
-            <a:schemeClr val="tx1"/>
-          </a:solidFill>
-          <a:latin typeface="+mn-lt"/>
-          <a:ea typeface="+mn-lt"/>
-          <a:cs typeface="+mn-lt"/>
-        </a:defRPr>
-      </a:lvl3pPr>
-      <a:lvl4pPr xmlns:a="http://schemas.openxmlformats.org/drawingml/2006/main" marL="1371600" algn="l">
-        <a:buNone/>
-        <a:defRPr sz="1800">
-          <a:solidFill>
-            <a:schemeClr val="tx1"/>
-          </a:solidFill>
-          <a:latin typeface="+mn-lt"/>
-          <a:ea typeface="+mn-lt"/>
-          <a:cs typeface="+mn-lt"/>
-        </a:defRPr>
-      </a:lvl4pPr>
-      <a:lvl5pPr xmlns:a="http://schemas.openxmlformats.org/drawingml/2006/main" marL="1828800" algn="l">
-        <a:buNone/>
-        <a:defRPr sz="1800">
-          <a:solidFill>
-            <a:schemeClr val="tx1"/>
-          </a:solidFill>
-          <a:latin typeface="+mn-lt"/>
-          <a:ea typeface="+mn-lt"/>
-          <a:cs typeface="+mn-lt"/>
-        </a:defRPr>
-      </a:lvl5pPr>
-      <a:lvl6pPr xmlns:a="http://schemas.openxmlformats.org/drawingml/2006/main" marL="2286000" algn="l">
-        <a:buNone/>
-        <a:defRPr sz="1800">
-          <a:solidFill>
-            <a:schemeClr val="tx1"/>
-          </a:solidFill>
-          <a:latin typeface="+mn-lt"/>
-          <a:ea typeface="+mn-lt"/>
-          <a:cs typeface="+mn-lt"/>
-        </a:defRPr>
-      </a:lvl6pPr>
-      <a:lvl7pPr xmlns:a="http://schemas.openxmlformats.org/drawingml/2006/main" marL="2743200" algn="l">
-        <a:buNone/>
-        <a:defRPr sz="1800">
-          <a:solidFill>
-            <a:schemeClr val="tx1"/>
-          </a:solidFill>
-          <a:latin typeface="+mn-lt"/>
-          <a:ea typeface="+mn-lt"/>
-          <a:cs typeface="+mn-lt"/>
-        </a:defRPr>
-      </a:lvl7pPr>
-      <a:lvl8pPr xmlns:a="http://schemas.openxmlformats.org/drawingml/2006/main" marL="3200400" algn="l">
-        <a:buNone/>
-        <a:defRPr sz="1800">
-          <a:solidFill>
-            <a:schemeClr val="tx1"/>
-          </a:solidFill>
-          <a:latin typeface="+mn-lt"/>
-          <a:ea typeface="+mn-lt"/>
-          <a:cs typeface="+mn-lt"/>
-        </a:defRPr>
-      </a:lvl8pPr>
-      <a:lvl9pPr xmlns:a="http://schemas.openxmlformats.org/drawingml/2006/main" marL="3657600" algn="l">
-        <a:buNone/>
-        <a:defRPr sz="1800">
-          <a:solidFill>
-            <a:schemeClr val="tx1"/>
-          </a:solidFill>
-          <a:latin typeface="+mn-lt"/>
-          <a:ea typeface="+mn-lt"/>
-          <a:cs typeface="+mn-lt"/>
-        </a:defRPr>
-      </a:lvl9pPr>
-    </p:otherStyle>
-  </p:txStyles>
-</p:sldMaster>
-</file>
-
-<file path=ppt/slideMasters/theme/theme2.xml><?xml version="1.0" encoding="utf-8"?>
-<a:theme xmlns:a="http://schemas.openxmlformats.org/drawingml/2006/main" name="ChatGPT">
-  <a:themeElements>
-    <a:clrScheme name="ChatGPT">
-      <a:dk1>
-        <a:srgbClr val="000000"/>
-      </a:dk1>
-      <a:lt1>
-        <a:srgbClr val="FFFFFF"/>
-      </a:lt1>
-      <a:dk2>
-        <a:srgbClr val="0E2841"/>
-      </a:dk2>
-      <a:lt2>
-        <a:srgbClr val="E8E8E8"/>
-      </a:lt2>
-      <a:accent1>
-        <a:srgbClr val="156082"/>
-      </a:accent1>
-      <a:accent2>
-        <a:srgbClr val="E97132"/>
-      </a:accent2>
-      <a:accent3>
-        <a:srgbClr val="196B24"/>
-      </a:accent3>
-      <a:accent4>
-        <a:srgbClr val="0F9ED5"/>
-      </a:accent4>
-      <a:accent5>
-        <a:srgbClr val="A02B93"/>
-      </a:accent5>
-      <a:accent6>
-        <a:srgbClr val="4EA72E"/>
-      </a:accent6>
-      <a:hlink>
-        <a:srgbClr val="467886"/>
-      </a:hlink>
-      <a:folHlink>
-        <a:srgbClr val="96607D"/>
-      </a:folHlink>
-    </a:clrScheme>
-    <a:fontScheme name="Office">
-      <a:majorFont>
-        <a:latin typeface="Calibri Light"/>
-        <a:ea typeface="Calibri Light"/>
-        <a:cs typeface="Calibri Light"/>
-      </a:majorFont>
-      <a:minorFont>
-        <a:latin typeface="Calibri"/>
-        <a:ea typeface="Calibri"/>
-        <a:cs typeface="Calibri"/>
-      </a:minorFont>
-    </a:fontScheme>
-    <a:fmtScheme name="ChatGPT">
-      <a:fillStyleLst>
-        <a:solidFill>
-          <a:schemeClr val="phClr"/>
-        </a:solidFill>
-        <a:gradFill>
-          <a:gsLst>
-            <a:gs pos="0">
-              <a:schemeClr val="phClr">
-                <a:tint val="67000"/>
-                <a:lumMod val="110000"/>
-                <a:satMod val="105000"/>
-              </a:schemeClr>
-            </a:gs>
-            <a:gs pos="50000">
-              <a:schemeClr val="phClr">
-                <a:tint val="73000"/>
-                <a:lumMod val="105000"/>
-                <a:satMod val="103000"/>
-              </a:schemeClr>
-            </a:gs>
-            <a:gs pos="100000">
-              <a:schemeClr val="phClr">
-                <a:tint val="81000"/>
-                <a:lumMod val="105000"/>
-                <a:satMod val="109000"/>
-              </a:schemeClr>
-            </a:gs>
-          </a:gsLst>
-          <a:lin ang="5400000" scaled="0"/>
-        </a:gradFill>
-        <a:gradFill>
-          <a:gsLst>
-            <a:gs pos="0">
-              <a:schemeClr val="phClr">
-                <a:tint val="94000"/>
-                <a:lumMod val="102000"/>
-                <a:satMod val="103000"/>
-              </a:schemeClr>
-            </a:gs>
-            <a:gs pos="50000">
-              <a:schemeClr val="phClr">
-                <a:shade val="100000"/>
-                <a:lumMod val="100000"/>
-                <a:satMod val="110000"/>
-              </a:schemeClr>
-            </a:gs>
-            <a:gs pos="100000">
-              <a:schemeClr val="phClr">
-                <a:shade val="78000"/>
-                <a:lumMod val="99000"/>
-                <a:satMod val="120000"/>
-              </a:schemeClr>
-            </a:gs>
-          </a:gsLst>
-          <a:lin ang="5400000" scaled="0"/>
-        </a:gradFill>
-      </a:fillStyleLst>
-      <a:lnStyleLst>
-        <a:ln w="12700">
-          <a:solidFill>
-            <a:schemeClr val="phClr"/>
-          </a:solidFill>
-          <a:prstDash val="solid"/>
-        </a:ln>
-        <a:ln w="19050">
-          <a:solidFill>
-            <a:schemeClr val="phClr"/>
-          </a:solidFill>
-          <a:prstDash val="solid"/>
-        </a:ln>
-        <a:ln w="25400">
-          <a:solidFill>
-            <a:schemeClr val="phClr"/>
-          </a:solidFill>
-          <a:prstDash val="solid"/>
-        </a:ln>
-      </a:lnStyleLst>
-      <a:effectStyleLst>
-        <a:effectStyle>
-          <a:effectLst/>
-        </a:effectStyle>
-        <a:effectStyle>
-          <a:effectLst/>
-        </a:effectStyle>
-        <a:effectStyle>
-          <a:effectLst>
-            <a:outerShdw blurRad="57150" dist="19050" dir="5400000">
-              <a:srgbClr val="000000">
-                <a:alpha val="16000"/>
-              </a:srgbClr>
-            </a:outerShdw>
-          </a:effectLst>
-        </a:effectStyle>
-        <a:effectStyle>
-          <a:effectLst>
-            <a:outerShdw blurRad="19050" dist="9525" dir="5400000">
-              <a:srgbClr val="000000">
-                <a:alpha val="6000"/>
-              </a:srgbClr>
-            </a:outerShdw>
-          </a:effectLst>
-        </a:effectStyle>
-        <a:effectStyle>
-          <a:effectLst>
-            <a:outerShdw blurRad="28575" dist="9525" dir="5400000">
-              <a:srgbClr val="000000">
-                <a:alpha val="8000"/>
-              </a:srgbClr>
-            </a:outerShdw>
-          </a:effectLst>
-        </a:effectStyle>
-        <a:effectStyle>
-          <a:effectLst>
-            <a:outerShdw blurRad="57150" dist="19050" dir="5400000">
-              <a:srgbClr val="000000">
-                <a:alpha val="10000"/>
-              </a:srgbClr>
-            </a:outerShdw>
-          </a:effectLst>
-        </a:effectStyle>
-        <a:effectStyle>
-          <a:effectLst>
-            <a:outerShdw blurRad="114300" dist="38100" dir="5400000">
-              <a:srgbClr val="000000">
-                <a:alpha val="12000"/>
-              </a:srgbClr>
-            </a:outerShdw>
-          </a:effectLst>
-        </a:effectStyle>
-        <a:effectStyle>
-          <a:effectLst>
-            <a:outerShdw blurRad="171450" dist="57150" dir="5400000">
-              <a:srgbClr val="000000">
-                <a:alpha val="16000"/>
-              </a:srgbClr>
-            </a:outerShdw>
-          </a:effectLst>
-        </a:effectStyle>
-        <a:effectStyle>
-          <a:effectLst>
-            <a:outerShdw blurRad="266700" dist="95250" dir="5400000">
-              <a:srgbClr val="000000">
-                <a:alpha val="24000"/>
-              </a:srgbClr>
-            </a:outerShdw>
-          </a:effectLst>
-        </a:effectStyle>
-      </a:effectStyleLst>
-      <a:bgFillStyleLst>
-        <a:solidFill>
-          <a:schemeClr val="phClr"/>
-        </a:solidFill>
-        <a:solidFill>
-          <a:schemeClr val="phClr">
-            <a:tint val="95000"/>
-            <a:satMod val="170000"/>
-          </a:schemeClr>
-        </a:solidFill>
-        <a:gradFill>
-          <a:gsLst>
-            <a:gs pos="0">
-              <a:schemeClr val="phClr">
-                <a:tint val="93000"/>
-                <a:shade val="98000"/>
-                <a:lumMod val="102000"/>
-                <a:satMod val="150000"/>
-              </a:schemeClr>
-            </a:gs>
-            <a:gs pos="50000">
-              <a:schemeClr val="phClr">
-                <a:tint val="98000"/>
-                <a:shade val="90000"/>
-                <a:lumMod val="103000"/>
-                <a:satMod val="130000"/>
-              </a:schemeClr>
-            </a:gs>
-            <a:gs pos="100000">
-              <a:schemeClr val="phClr">
-                <a:shade val="63000"/>
-                <a:satMod val="120000"/>
-              </a:schemeClr>
-            </a:gs>
-          </a:gsLst>
-          <a:lin ang="5400000" scaled="0"/>
-        </a:gradFill>
-      </a:bgFillStyleLst>
-    </a:fmtScheme>
-  </a:themeElements>
-</a:theme>
-</file>
-
-<file path=ppt/slides/charts/chart1.xml><?xml version="1.0" encoding="utf-8"?>
-<c:chartSpace xmlns:c="http://schemas.openxmlformats.org/drawingml/2006/chart" xmlns:r="http://schemas.openxmlformats.org/officeDocument/2006/relationships">
-  <c:lang val="en-US"/>
+<file path=ppt/charts/chart1.xml><?xml version="1.0" encoding="utf-8"?>
+<c:chartSpace xmlns:c="http://schemas.openxmlformats.org/drawingml/2006/chart" xmlns:a="http://schemas.openxmlformats.org/drawingml/2006/main" xmlns:r="http://schemas.openxmlformats.org/officeDocument/2006/relationships" xmlns:c16r2="http://schemas.microsoft.com/office/drawing/2015/06/chart">
+  <c:date1904 val="1"/>
+  <c:lang val="fr-FR"/>
+  <c:roundedCorners val="1"/>
+  <c:style val="2"/>
   <c:chart>
+    <c:autoTitleDeleted val="1"/>
     <c:plotArea>
+      <c:layout/>
       <c:barChart>
         <c:barDir val="bar"/>
         <c:grouping val="clustered"/>
@@ -1559,17 +137,54 @@
               <c:f>Sheet1!$B$1</c:f>
               <c:strCache>
                 <c:ptCount val="1"/>
-                <c:pt idx="0">
-                  <c:v/>
-                </c:pt>
               </c:strCache>
             </c:strRef>
           </c:tx>
           <c:spPr>
-            <a:solidFill xmlns:a="http://schemas.openxmlformats.org/drawingml/2006/main">
+            <a:solidFill>
               <a:srgbClr val="007F75"/>
             </a:solidFill>
           </c:spPr>
+          <c:invertIfNegative val="1"/>
+          <c:dLbls>
+            <c:spPr>
+              <a:noFill/>
+              <a:ln>
+                <a:noFill/>
+              </a:ln>
+              <a:effectLst/>
+            </c:spPr>
+            <c:txPr>
+              <a:bodyPr anchorCtr="1"/>
+              <a:lstStyle/>
+              <a:p>
+                <a:pPr>
+                  <a:defRPr sz="1650">
+                    <a:solidFill>
+                      <a:srgbClr val="102C36"/>
+                    </a:solidFill>
+                    <a:latin typeface="Arial"/>
+                    <a:ea typeface="Arial"/>
+                    <a:cs typeface="Arial"/>
+                  </a:defRPr>
+                </a:pPr>
+                <a:endParaRPr lang="en-US"/>
+              </a:p>
+            </c:txPr>
+            <c:dLblPos val="outEnd"/>
+            <c:showLegendKey val="0"/>
+            <c:showVal val="1"/>
+            <c:showCatName val="0"/>
+            <c:showSerName val="0"/>
+            <c:showPercent val="0"/>
+            <c:showBubbleSize val="0"/>
+            <c:showLeaderLines val="0"/>
+            <c:extLst>
+              <c:ext xmlns:c15="http://schemas.microsoft.com/office/drawing/2012/chart" uri="{CE6537A1-D6FC-4f65-9D91-7224C49458BB}">
+                <c15:showLeaderLines val="0"/>
+              </c:ext>
+            </c:extLst>
+          </c:dLbls>
           <c:cat>
             <c:strRef>
               <c:f>Sheet1!$A$2:$A$8</c:f>
@@ -1629,24 +244,22 @@
               </c:numCache>
             </c:numRef>
           </c:val>
+          <c:extLst>
+            <c:ext xmlns:c14="http://schemas.microsoft.com/office/drawing/2007/8/2/chart" uri="{6F2FDCE9-48DA-4B69-8628-5D25D57E5C99}">
+              <c14:invertSolidFillFmt>
+                <c14:spPr xmlns:c14="http://schemas.microsoft.com/office/drawing/2007/8/2/chart">
+                  <a:solidFill>
+                    <a:srgbClr val="FFFFFF"/>
+                  </a:solidFill>
+                </c14:spPr>
+              </c14:invertSolidFillFmt>
+            </c:ext>
+            <c:ext xmlns:c16="http://schemas.microsoft.com/office/drawing/2014/chart" uri="{C3380CC4-5D6E-409C-BE32-E72D297353CC}">
+              <c16:uniqueId val="{00000000-AC88-4146-AD7C-B0408F29189D}"/>
+            </c:ext>
+          </c:extLst>
         </c:ser>
         <c:dLbls>
-          <c:txPr>
-            <a:bodyPr xmlns:a="http://schemas.openxmlformats.org/drawingml/2006/main" anchorCtr="1"/>
-            <a:lstStyle xmlns:a="http://schemas.openxmlformats.org/drawingml/2006/main"/>
-            <a:p xmlns:a="http://schemas.openxmlformats.org/drawingml/2006/main">
-              <a:pPr>
-                <a:defRPr sz="1650">
-                  <a:solidFill>
-                    <a:srgbClr val="102C36"/>
-                  </a:solidFill>
-                  <a:latin typeface="Arial"/>
-                  <a:ea typeface="Arial"/>
-                  <a:cs typeface="Arial"/>
-                </a:defRPr>
-              </a:pPr>
-            </a:p>
-          </c:txPr>
           <c:dLblPos val="outEnd"/>
           <c:showLegendKey val="0"/>
           <c:showVal val="1"/>
@@ -1654,7 +267,6 @@
           <c:showSerName val="0"/>
           <c:showPercent val="0"/>
           <c:showBubbleSize val="0"/>
-          <c:showLeaderLines val="0"/>
         </c:dLbls>
         <c:gapWidth val="65"/>
         <c:axId val="48650112"/>
@@ -1667,11 +279,12 @@
         </c:scaling>
         <c:delete val="0"/>
         <c:axPos val="l"/>
-        <c:numFmt formatCode="General"/>
+        <c:numFmt formatCode="General" sourceLinked="1"/>
         <c:majorTickMark val="none"/>
         <c:minorTickMark val="none"/>
+        <c:tickLblPos val="nextTo"/>
         <c:spPr>
-          <a:ln xmlns:a="http://schemas.openxmlformats.org/drawingml/2006/main" w="9525">
+          <a:ln w="9525">
             <a:solidFill>
               <a:srgbClr val="D4D4D4"/>
             </a:solidFill>
@@ -1679,9 +292,9 @@
           </a:ln>
         </c:spPr>
         <c:txPr>
-          <a:bodyPr xmlns:a="http://schemas.openxmlformats.org/drawingml/2006/main" anchorCtr="1"/>
-          <a:lstStyle xmlns:a="http://schemas.openxmlformats.org/drawingml/2006/main"/>
-          <a:p xmlns:a="http://schemas.openxmlformats.org/drawingml/2006/main">
+          <a:bodyPr anchorCtr="1"/>
+          <a:lstStyle/>
+          <a:p>
             <a:pPr>
               <a:defRPr sz="1650">
                 <a:solidFill>
@@ -1692,9 +305,15 @@
                 <a:cs typeface="Arial"/>
               </a:defRPr>
             </a:pPr>
+            <a:endParaRPr lang="en-US"/>
           </a:p>
         </c:txPr>
         <c:crossAx val="48672768"/>
+        <c:crosses val="autoZero"/>
+        <c:auto val="1"/>
+        <c:lblAlgn val="ctr"/>
+        <c:lblOffset val="100"/>
+        <c:noMultiLvlLbl val="1"/>
       </c:catAx>
       <c:valAx>
         <c:axId val="48672768"/>
@@ -1707,18 +326,19 @@
         <c:axPos val="b"/>
         <c:majorGridlines>
           <c:spPr>
-            <a:ln xmlns:a="http://schemas.openxmlformats.org/drawingml/2006/main" w="9525">
+            <a:ln w="9525">
               <a:solidFill>
                 <a:srgbClr val="DEE6E2"/>
               </a:solidFill>
             </a:ln>
           </c:spPr>
         </c:majorGridlines>
-        <c:numFmt formatCode="0"/>
+        <c:numFmt formatCode="General" sourceLinked="1"/>
         <c:majorTickMark val="none"/>
         <c:minorTickMark val="none"/>
+        <c:tickLblPos val="nextTo"/>
         <c:spPr>
-          <a:ln xmlns:a="http://schemas.openxmlformats.org/drawingml/2006/main" w="9525">
+          <a:ln w="9525">
             <a:solidFill>
               <a:srgbClr val="D4D4D4"/>
             </a:solidFill>
@@ -1726,9 +346,9 @@
           </a:ln>
         </c:spPr>
         <c:txPr>
-          <a:bodyPr xmlns:a="http://schemas.openxmlformats.org/drawingml/2006/main" anchorCtr="1"/>
-          <a:lstStyle xmlns:a="http://schemas.openxmlformats.org/drawingml/2006/main"/>
-          <a:p xmlns:a="http://schemas.openxmlformats.org/drawingml/2006/main">
+          <a:bodyPr anchorCtr="1"/>
+          <a:lstStyle/>
+          <a:p>
             <a:pPr>
               <a:defRPr sz="1350">
                 <a:solidFill>
@@ -1739,39 +359,1140 @@
                 <a:cs typeface="Arial"/>
               </a:defRPr>
             </a:pPr>
+            <a:endParaRPr lang="en-US"/>
           </a:p>
         </c:txPr>
         <c:crossAx val="48650112"/>
+        <c:crosses val="autoZero"/>
         <c:crossBetween val="between"/>
         <c:majorUnit val="40"/>
       </c:valAx>
       <c:spPr>
-        <a:solidFill xmlns:a="http://schemas.openxmlformats.org/drawingml/2006/main">
+        <a:solidFill>
           <a:srgbClr val="F5F4EF"/>
         </a:solidFill>
       </c:spPr>
     </c:plotArea>
     <c:plotVisOnly val="1"/>
+    <c:dispBlanksAs val="zero"/>
+    <c:showDLblsOverMax val="1"/>
   </c:chart>
   <c:spPr>
-    <a:solidFill xmlns:a="http://schemas.openxmlformats.org/drawingml/2006/main">
+    <a:solidFill>
       <a:srgbClr val="F5F4EF"/>
     </a:solidFill>
   </c:spPr>
-  <c:externalData r:id="rIdChartSnapshot1">
+  <c:externalData r:id="rId1">
     <c:autoUpdate val="0"/>
   </c:externalData>
 </c:chartSpace>
 </file>
 
+<file path=ppt/notesMasters/notesMaster1.xml><?xml version="1.0" encoding="utf-8"?>
+<p:notesMaster xmlns:a="http://schemas.openxmlformats.org/drawingml/2006/main" xmlns:r="http://schemas.openxmlformats.org/officeDocument/2006/relationships" xmlns:p="http://schemas.openxmlformats.org/presentationml/2006/main">
+  <p:cSld>
+    <p:bg>
+      <p:bgRef idx="1001">
+        <a:schemeClr val="bg1"/>
+      </p:bgRef>
+    </p:bg>
+    <p:spTree>
+      <p:nvGrpSpPr>
+        <p:cNvPr id="1" name=""/>
+        <p:cNvGrpSpPr/>
+        <p:nvPr/>
+      </p:nvGrpSpPr>
+      <p:grpSpPr>
+        <a:xfrm>
+          <a:off x="0" y="0"/>
+          <a:ext cx="0" cy="0"/>
+          <a:chOff x="0" y="0"/>
+          <a:chExt cx="0" cy="0"/>
+        </a:xfrm>
+      </p:grpSpPr>
+      <p:sp>
+        <p:nvSpPr>
+          <p:cNvPr id="2" name="Header Placeholder"/>
+          <p:cNvSpPr>
+            <a:spLocks noGrp="1"/>
+          </p:cNvSpPr>
+          <p:nvPr>
+            <p:ph type="hdr" sz="quarter"/>
+          </p:nvPr>
+        </p:nvSpPr>
+        <p:spPr>
+          <a:prstGeom prst="rect">
+            <a:avLst/>
+          </a:prstGeom>
+        </p:spPr>
+        <p:txBody>
+          <a:bodyPr/>
+          <a:lstStyle/>
+          <a:p>
+            <a:endParaRPr/>
+          </a:p>
+        </p:txBody>
+      </p:sp>
+      <p:sp>
+        <p:nvSpPr>
+          <p:cNvPr id="3" name="Date Placeholder"/>
+          <p:cNvSpPr>
+            <a:spLocks noGrp="1"/>
+          </p:cNvSpPr>
+          <p:nvPr>
+            <p:ph type="dt" sz="quarter" idx="1"/>
+          </p:nvPr>
+        </p:nvSpPr>
+        <p:spPr>
+          <a:prstGeom prst="rect">
+            <a:avLst/>
+          </a:prstGeom>
+        </p:spPr>
+        <p:txBody>
+          <a:bodyPr/>
+          <a:lstStyle/>
+          <a:p>
+            <a:endParaRPr/>
+          </a:p>
+        </p:txBody>
+      </p:sp>
+      <p:sp>
+        <p:nvSpPr>
+          <p:cNvPr id="4" name="Slide Image Placeholder"/>
+          <p:cNvSpPr>
+            <a:spLocks noGrp="1" noRot="1" noChangeAspect="1"/>
+          </p:cNvSpPr>
+          <p:nvPr>
+            <p:ph type="sldImg" idx="2"/>
+          </p:nvPr>
+        </p:nvSpPr>
+        <p:spPr>
+          <a:prstGeom prst="rect">
+            <a:avLst/>
+          </a:prstGeom>
+        </p:spPr>
+        <p:txBody>
+          <a:bodyPr/>
+          <a:lstStyle/>
+          <a:p>
+            <a:endParaRPr/>
+          </a:p>
+        </p:txBody>
+      </p:sp>
+      <p:sp>
+        <p:nvSpPr>
+          <p:cNvPr id="5" name="Notes Placeholder"/>
+          <p:cNvSpPr>
+            <a:spLocks noGrp="1"/>
+          </p:cNvSpPr>
+          <p:nvPr>
+            <p:ph type="body" sz="quarter" idx="3"/>
+          </p:nvPr>
+        </p:nvSpPr>
+        <p:spPr>
+          <a:prstGeom prst="rect">
+            <a:avLst/>
+          </a:prstGeom>
+        </p:spPr>
+        <p:txBody>
+          <a:bodyPr/>
+          <a:lstStyle/>
+          <a:p>
+            <a:endParaRPr/>
+          </a:p>
+        </p:txBody>
+      </p:sp>
+      <p:sp>
+        <p:nvSpPr>
+          <p:cNvPr id="6" name="Footer Placeholder"/>
+          <p:cNvSpPr>
+            <a:spLocks noGrp="1"/>
+          </p:cNvSpPr>
+          <p:nvPr>
+            <p:ph type="ftr" sz="quarter" idx="4"/>
+          </p:nvPr>
+        </p:nvSpPr>
+        <p:spPr>
+          <a:prstGeom prst="rect">
+            <a:avLst/>
+          </a:prstGeom>
+        </p:spPr>
+        <p:txBody>
+          <a:bodyPr/>
+          <a:lstStyle/>
+          <a:p>
+            <a:endParaRPr/>
+          </a:p>
+        </p:txBody>
+      </p:sp>
+      <p:sp>
+        <p:nvSpPr>
+          <p:cNvPr id="7" name="Slide Number Placeholder"/>
+          <p:cNvSpPr>
+            <a:spLocks noGrp="1"/>
+          </p:cNvSpPr>
+          <p:nvPr>
+            <p:ph type="sldNum" sz="quarter" idx="5"/>
+          </p:nvPr>
+        </p:nvSpPr>
+        <p:spPr>
+          <a:prstGeom prst="rect">
+            <a:avLst/>
+          </a:prstGeom>
+        </p:spPr>
+        <p:txBody>
+          <a:bodyPr/>
+          <a:lstStyle/>
+          <a:p>
+            <a:endParaRPr/>
+          </a:p>
+        </p:txBody>
+      </p:sp>
+    </p:spTree>
+  </p:cSld>
+  <p:clrMap bg1="lt1" tx1="dk1" bg2="lt2" tx2="dk2" accent1="accent1" accent2="accent2" accent3="accent3" accent4="accent4" accent5="accent5" accent6="accent6" hlink="hlink" folHlink="folHlink"/>
+  <p:notesStyle>
+    <a:lvl1pPr marL="0" algn="l" defTabSz="914400" rtl="0" eaLnBrk="1" latinLnBrk="0" hangingPunct="1">
+      <a:defRPr sz="1200" kern="1200"/>
+    </a:lvl1pPr>
+  </p:notesStyle>
+</p:notesMaster>
+</file>
+
+<file path=ppt/notesSlides/notesSlide1.xml><?xml version="1.0" encoding="utf-8"?>
+<p:notes xmlns:a="http://schemas.openxmlformats.org/drawingml/2006/main" xmlns:r="http://schemas.openxmlformats.org/officeDocument/2006/relationships" xmlns:p="http://schemas.openxmlformats.org/presentationml/2006/main">
+  <p:cSld>
+    <p:spTree>
+      <p:nvGrpSpPr>
+        <p:cNvPr id="1" name=""/>
+        <p:cNvGrpSpPr/>
+        <p:nvPr/>
+      </p:nvGrpSpPr>
+      <p:grpSpPr>
+        <a:xfrm>
+          <a:off x="0" y="0"/>
+          <a:ext cx="0" cy="0"/>
+          <a:chOff x="0" y="0"/>
+          <a:chExt cx="0" cy="0"/>
+        </a:xfrm>
+      </p:grpSpPr>
+      <p:sp>
+        <p:nvSpPr>
+          <p:cNvPr id="2" name="Slide Image Placeholder 1"/>
+          <p:cNvSpPr>
+            <a:spLocks noGrp="1" noRot="1" noChangeAspect="1"/>
+          </p:cNvSpPr>
+          <p:nvPr>
+            <p:ph type="sldImg"/>
+          </p:nvPr>
+        </p:nvSpPr>
+        <p:spPr/>
+      </p:sp>
+      <p:sp>
+        <p:nvSpPr>
+          <p:cNvPr id="3" name="Notes Placeholder 2"/>
+          <p:cNvSpPr>
+            <a:spLocks noGrp="1"/>
+          </p:cNvSpPr>
+          <p:nvPr>
+            <p:ph type="body" idx="1"/>
+          </p:nvPr>
+        </p:nvSpPr>
+        <p:spPr/>
+        <p:txBody>
+          <a:bodyPr/>
+          <a:lstStyle/>
+          <a:p>
+            <a:r>
+              <a:t>Opening pitch: "Before we dive in, here's the live link so you can follow along: wolf-day-damage.vercel.app/dashboard. I'll walk you through what we built, then we'll review the dashboard together — it's designed for the workshop mechanic."</a:t>
+            </a:r>
+          </a:p>
+        </p:txBody>
+      </p:sp>
+      <p:sp>
+        <p:nvSpPr>
+          <p:cNvPr id="4" name="Slide Number Placeholder 3"/>
+          <p:cNvSpPr>
+            <a:spLocks noGrp="1"/>
+          </p:cNvSpPr>
+          <p:nvPr>
+            <p:ph type="sldNum" idx="5"/>
+          </p:nvPr>
+        </p:nvSpPr>
+        <p:spPr/>
+        <p:txBody>
+          <a:bodyPr/>
+          <a:lstStyle/>
+          <a:p>
+            <a:endParaRPr/>
+          </a:p>
+        </p:txBody>
+      </p:sp>
+    </p:spTree>
+  </p:cSld>
+  <p:clrMapOvr>
+    <a:masterClrMapping/>
+  </p:clrMapOvr>
+</p:notes>
+</file>
+
+<file path=ppt/notesSlides/notesSlide2.xml><?xml version="1.0" encoding="utf-8"?>
+<p:notes xmlns:a="http://schemas.openxmlformats.org/drawingml/2006/main" xmlns:r="http://schemas.openxmlformats.org/officeDocument/2006/relationships" xmlns:p="http://schemas.openxmlformats.org/presentationml/2006/main">
+  <p:cSld>
+    <p:spTree>
+      <p:nvGrpSpPr>
+        <p:cNvPr id="1" name=""/>
+        <p:cNvGrpSpPr/>
+        <p:nvPr/>
+      </p:nvGrpSpPr>
+      <p:grpSpPr>
+        <a:xfrm>
+          <a:off x="0" y="0"/>
+          <a:ext cx="0" cy="0"/>
+          <a:chOff x="0" y="0"/>
+          <a:chExt cx="0" cy="0"/>
+        </a:xfrm>
+      </p:grpSpPr>
+      <p:sp>
+        <p:nvSpPr>
+          <p:cNvPr id="2" name="Slide Image Placeholder 1"/>
+          <p:cNvSpPr>
+            <a:spLocks noGrp="1" noRot="1" noChangeAspect="1"/>
+          </p:cNvSpPr>
+          <p:nvPr>
+            <p:ph type="sldImg"/>
+          </p:nvPr>
+        </p:nvSpPr>
+        <p:spPr/>
+      </p:sp>
+      <p:sp>
+        <p:nvSpPr>
+          <p:cNvPr id="3" name="Notes Placeholder 2"/>
+          <p:cNvSpPr>
+            <a:spLocks noGrp="1"/>
+          </p:cNvSpPr>
+          <p:nvPr>
+            <p:ph type="body" idx="1"/>
+          </p:nvPr>
+        </p:nvSpPr>
+        <p:spPr/>
+        <p:txBody>
+          <a:bodyPr/>
+          <a:lstStyle/>
+          <a:p>
+            <a:r>
+              <a:t>50 seconds. The AI fills a strict schema and must keep a German excerpt justifying each damage. The closed vocabulary links a part and its side to the visualisation. Statuses come from structured data. An explicit action in the note takes priority; otherwise, rules propose the operations. Remove-and-install (R&amp;I) uses a dependency table — it separates a damaged part from a neighbouring part that must be taken off. The per-case cache avoids redoing successful calls. Failures are flagged; calls retry with increasing back-off. Passing format validation does not prove the meaning is correct.</a:t>
+            </a:r>
+          </a:p>
+          <a:p/>
+          <a:p>
+            <a:r>
+              <a:t>Local sources:</a:t>
+            </a:r>
+          </a:p>
+          <a:p>
+            <a:r>
+              <a:t>Work/pipeline/extract.py</a:t>
+            </a:r>
+          </a:p>
+          <a:p>
+            <a:r>
+              <a:t>Work/pipeline/schema.py</a:t>
+            </a:r>
+          </a:p>
+          <a:p>
+            <a:r>
+              <a:t>Work/pipeline/repair_logic.py</a:t>
+            </a:r>
+          </a:p>
+          <a:p>
+            <a:r>
+              <a:t>Work/pipeline/build_dataset.py</a:t>
+            </a:r>
+          </a:p>
+        </p:txBody>
+      </p:sp>
+      <p:sp>
+        <p:nvSpPr>
+          <p:cNvPr id="4" name="Slide Number Placeholder 3"/>
+          <p:cNvSpPr>
+            <a:spLocks noGrp="1"/>
+          </p:cNvSpPr>
+          <p:nvPr>
+            <p:ph type="sldNum" idx="5"/>
+          </p:nvPr>
+        </p:nvSpPr>
+        <p:spPr/>
+        <p:txBody>
+          <a:bodyPr/>
+          <a:lstStyle/>
+          <a:p>
+            <a:endParaRPr/>
+          </a:p>
+        </p:txBody>
+      </p:sp>
+    </p:spTree>
+  </p:cSld>
+  <p:clrMapOvr>
+    <a:masterClrMapping/>
+  </p:clrMapOvr>
+</p:notes>
+</file>
+
+<file path=ppt/notesSlides/notesSlide3.xml><?xml version="1.0" encoding="utf-8"?>
+<p:notes xmlns:a="http://schemas.openxmlformats.org/drawingml/2006/main" xmlns:r="http://schemas.openxmlformats.org/officeDocument/2006/relationships" xmlns:p="http://schemas.openxmlformats.org/presentationml/2006/main">
+  <p:cSld>
+    <p:spTree>
+      <p:nvGrpSpPr>
+        <p:cNvPr id="1" name=""/>
+        <p:cNvGrpSpPr/>
+        <p:nvPr/>
+      </p:nvGrpSpPr>
+      <p:grpSpPr>
+        <a:xfrm>
+          <a:off x="0" y="0"/>
+          <a:ext cx="0" cy="0"/>
+          <a:chOff x="0" y="0"/>
+          <a:chExt cx="0" cy="0"/>
+        </a:xfrm>
+      </p:grpSpPr>
+      <p:sp>
+        <p:nvSpPr>
+          <p:cNvPr id="2" name="Slide Image Placeholder 1"/>
+          <p:cNvSpPr>
+            <a:spLocks noGrp="1" noRot="1" noChangeAspect="1"/>
+          </p:cNvSpPr>
+          <p:nvPr>
+            <p:ph type="sldImg"/>
+          </p:nvPr>
+        </p:nvSpPr>
+        <p:spPr/>
+      </p:sp>
+      <p:sp>
+        <p:nvSpPr>
+          <p:cNvPr id="3" name="Notes Placeholder 2"/>
+          <p:cNvSpPr>
+            <a:spLocks noGrp="1"/>
+          </p:cNvSpPr>
+          <p:nvPr>
+            <p:ph type="body" idx="1"/>
+          </p:nvPr>
+        </p:nvSpPr>
+        <p:spPr/>
+        <p:txBody>
+          <a:bodyPr/>
+          <a:lstStyle/>
+          <a:p>
+            <a:r>
+              <a:t>45 seconds. Show the German sentence before the colours. The note says the windscreen cannot be repaired and needs replacing. The windscreen shows orange, which here matches the extracted medium severity. Blue marks a trim piece to remove and reinstall per the business rule, not a second damage. This example is from the development pilot: it illustrates how it works, not proof of generalisation. The prototype also has a 3D view, but the capture uses the 2D view, clearer for explaining the data-to-zone link. Local demo: /dashboard/cases/820002/.</a:t>
+            </a:r>
+          </a:p>
+          <a:p/>
+          <a:p>
+            <a:r>
+              <a:t>Local sources:</a:t>
+            </a:r>
+          </a:p>
+          <a:p>
+            <a:r>
+              <a:t>Data/frontend/public/data/cases.json</a:t>
+            </a:r>
+          </a:p>
+          <a:p>
+            <a:r>
+              <a:t>Data/frontend/src/sections/damage/car-diagram.tsx</a:t>
+            </a:r>
+          </a:p>
+          <a:p>
+            <a:r>
+              <a:t>Work/pipeline/repair_logic.py</a:t>
+            </a:r>
+          </a:p>
+          <a:p>
+            <a:r>
+              <a:t>Work/pipeline/ml_common.py</a:t>
+            </a:r>
+          </a:p>
+        </p:txBody>
+      </p:sp>
+      <p:sp>
+        <p:nvSpPr>
+          <p:cNvPr id="4" name="Slide Number Placeholder 3"/>
+          <p:cNvSpPr>
+            <a:spLocks noGrp="1"/>
+          </p:cNvSpPr>
+          <p:nvPr>
+            <p:ph type="sldNum" idx="5"/>
+          </p:nvPr>
+        </p:nvSpPr>
+        <p:spPr/>
+        <p:txBody>
+          <a:bodyPr/>
+          <a:lstStyle/>
+          <a:p>
+            <a:endParaRPr/>
+          </a:p>
+        </p:txBody>
+      </p:sp>
+    </p:spTree>
+  </p:cSld>
+  <p:clrMapOvr>
+    <a:masterClrMapping/>
+  </p:clrMapOvr>
+</p:notes>
+</file>
+
+<file path=ppt/notesSlides/notesSlide4.xml><?xml version="1.0" encoding="utf-8"?>
+<p:notes xmlns:a="http://schemas.openxmlformats.org/drawingml/2006/main" xmlns:r="http://schemas.openxmlformats.org/officeDocument/2006/relationships" xmlns:p="http://schemas.openxmlformats.org/presentationml/2006/main">
+  <p:cSld>
+    <p:spTree>
+      <p:nvGrpSpPr>
+        <p:cNvPr id="1" name=""/>
+        <p:cNvGrpSpPr/>
+        <p:nvPr/>
+      </p:nvGrpSpPr>
+      <p:grpSpPr>
+        <a:xfrm>
+          <a:off x="0" y="0"/>
+          <a:ext cx="0" cy="0"/>
+          <a:chOff x="0" y="0"/>
+          <a:chExt cx="0" cy="0"/>
+        </a:xfrm>
+      </p:grpSpPr>
+      <p:sp>
+        <p:nvSpPr>
+          <p:cNvPr id="2" name="Slide Image Placeholder 1"/>
+          <p:cNvSpPr>
+            <a:spLocks noGrp="1" noRot="1" noChangeAspect="1"/>
+          </p:cNvSpPr>
+          <p:nvPr>
+            <p:ph type="sldImg"/>
+          </p:nvPr>
+        </p:nvSpPr>
+        <p:spPr/>
+      </p:sp>
+      <p:sp>
+        <p:nvSpPr>
+          <p:cNvPr id="3" name="Notes Placeholder 2"/>
+          <p:cNvSpPr>
+            <a:spLocks noGrp="1"/>
+          </p:cNvSpPr>
+          <p:nvPr>
+            <p:ph type="body" idx="1"/>
+          </p:nvPr>
+        </p:nvSpPr>
+        <p:spPr/>
+        <p:txBody>
+          <a:bodyPr/>
+          <a:lstStyle/>
+          <a:p>
+            <a:r>
+              <a:t>40 seconds. The corpus has 550 service cases and 450 damage cases. Among the latter, 110 are parking and 76 are manoeuvring, i.e. 186/450 = 41.3%. A business angle would be to look at their bodywork load, but we do not measure an operational gain here. The 668 cases on the open worklist have a median age of 150 days as of 18 September 2026. That is time since creation, not repair time, and some statuses may need checking. The observations describe this synthetic set, with no extrapolation to the market. The source notes stay in German.</a:t>
+            </a:r>
+          </a:p>
+          <a:p/>
+          <a:p>
+            <a:r>
+              <a:t>Local sources:</a:t>
+            </a:r>
+          </a:p>
+          <a:p>
+            <a:r>
+              <a:t>Data/frontend/public/data/aggregates.json</a:t>
+            </a:r>
+          </a:p>
+          <a:p>
+            <a:r>
+              <a:t>Work/pipeline/build_dataset.py</a:t>
+            </a:r>
+          </a:p>
+          <a:p>
+            <a:r>
+              <a:t>Dataset/DATASET.md</a:t>
+            </a:r>
+          </a:p>
+        </p:txBody>
+      </p:sp>
+      <p:sp>
+        <p:nvSpPr>
+          <p:cNvPr id="4" name="Slide Number Placeholder 3"/>
+          <p:cNvSpPr>
+            <a:spLocks noGrp="1"/>
+          </p:cNvSpPr>
+          <p:nvPr>
+            <p:ph type="sldNum" idx="5"/>
+          </p:nvPr>
+        </p:nvSpPr>
+        <p:spPr/>
+        <p:txBody>
+          <a:bodyPr/>
+          <a:lstStyle/>
+          <a:p>
+            <a:endParaRPr/>
+          </a:p>
+        </p:txBody>
+      </p:sp>
+    </p:spTree>
+  </p:cSld>
+  <p:clrMapOvr>
+    <a:masterClrMapping/>
+  </p:clrMapOvr>
+</p:notes>
+</file>
+
+<file path=ppt/notesSlides/notesSlide5.xml><?xml version="1.0" encoding="utf-8"?>
+<p:notes xmlns:a="http://schemas.openxmlformats.org/drawingml/2006/main" xmlns:r="http://schemas.openxmlformats.org/officeDocument/2006/relationships" xmlns:p="http://schemas.openxmlformats.org/presentationml/2006/main">
+  <p:cSld>
+    <p:spTree>
+      <p:nvGrpSpPr>
+        <p:cNvPr id="1" name=""/>
+        <p:cNvGrpSpPr/>
+        <p:nvPr/>
+      </p:nvGrpSpPr>
+      <p:grpSpPr>
+        <a:xfrm>
+          <a:off x="0" y="0"/>
+          <a:ext cx="0" cy="0"/>
+          <a:chOff x="0" y="0"/>
+          <a:chExt cx="0" cy="0"/>
+        </a:xfrm>
+      </p:grpSpPr>
+      <p:sp>
+        <p:nvSpPr>
+          <p:cNvPr id="2" name="Slide Image Placeholder 1"/>
+          <p:cNvSpPr>
+            <a:spLocks noGrp="1" noRot="1" noChangeAspect="1"/>
+          </p:cNvSpPr>
+          <p:nvPr>
+            <p:ph type="sldImg"/>
+          </p:nvPr>
+        </p:nvSpPr>
+        <p:spPr/>
+      </p:sp>
+      <p:sp>
+        <p:nvSpPr>
+          <p:cNvPr id="3" name="Notes Placeholder 2"/>
+          <p:cNvSpPr>
+            <a:spLocks noGrp="1"/>
+          </p:cNvSpPr>
+          <p:nvPr>
+            <p:ph type="body" idx="1"/>
+          </p:nvPr>
+        </p:nvSpPr>
+        <p:spPr/>
+        <p:txBody>
+          <a:bodyPr/>
+          <a:lstStyle/>
+          <a:p>
+            <a:r>
+              <a:t>60 seconds. Two protocols appear here. On the left, the DeepSeek extraction is evaluated on 977 cases, excluding the 3 prompt examples and the 20 pilot cases. Zones give 751 true positives, zero false positives and one false negative — an F1 of 99.93%. Case kind reaches 100%. Insurance reaches 100% on the 434 damage cases of this test. DeepSeek severity on those 434 cases is 68.7%, not to be compared directly with the table on the right. On the right, every model uses exactly the same 150 held-out ids for severity. The supervised models have 284 training examples. Verified counts: XGBoost 123/150, gbert 118/150, logistic regression 110/150, DeepSeek 109/150, LightGBM 98/150. These results describe a single split of the synthetic corpus. Recurring phrasings limit their reach. The lexical baseline also reaches 100% F1 on the zones of this corpus — so the scores do not prove a universal superiority of the LLM.</a:t>
+            </a:r>
+          </a:p>
+          <a:p/>
+          <a:p>
+            <a:r>
+              <a:t>Local sources:</a:t>
+            </a:r>
+          </a:p>
+          <a:p>
+            <a:r>
+              <a:t>Work/pipeline/eval_report.json</a:t>
+            </a:r>
+          </a:p>
+          <a:p>
+            <a:r>
+              <a:t>Work/pipeline/ml_split.json</a:t>
+            </a:r>
+          </a:p>
+          <a:p>
+            <a:r>
+              <a:t>Work/pipeline/gbert_result.json</a:t>
+            </a:r>
+          </a:p>
+          <a:p>
+            <a:r>
+              <a:t>Data/frontend/public/data/model_comparison.json</a:t>
+            </a:r>
+          </a:p>
+          <a:p>
+            <a:r>
+              <a:t>Work/pipeline/train_cpu_models.py</a:t>
+            </a:r>
+          </a:p>
+        </p:txBody>
+      </p:sp>
+      <p:sp>
+        <p:nvSpPr>
+          <p:cNvPr id="4" name="Slide Number Placeholder 3"/>
+          <p:cNvSpPr>
+            <a:spLocks noGrp="1"/>
+          </p:cNvSpPr>
+          <p:nvPr>
+            <p:ph type="sldNum" idx="5"/>
+          </p:nvPr>
+        </p:nvSpPr>
+        <p:spPr/>
+        <p:txBody>
+          <a:bodyPr/>
+          <a:lstStyle/>
+          <a:p>
+            <a:endParaRPr/>
+          </a:p>
+        </p:txBody>
+      </p:sp>
+    </p:spTree>
+  </p:cSld>
+  <p:clrMapOvr>
+    <a:masterClrMapping/>
+  </p:clrMapOvr>
+</p:notes>
+</file>
+
+<file path=ppt/notesSlides/notesSlide6.xml><?xml version="1.0" encoding="utf-8"?>
+<p:notes xmlns:a="http://schemas.openxmlformats.org/drawingml/2006/main" xmlns:r="http://schemas.openxmlformats.org/officeDocument/2006/relationships" xmlns:p="http://schemas.openxmlformats.org/presentationml/2006/main">
+  <p:cSld>
+    <p:spTree>
+      <p:nvGrpSpPr>
+        <p:cNvPr id="1" name=""/>
+        <p:cNvGrpSpPr/>
+        <p:nvPr/>
+      </p:nvGrpSpPr>
+      <p:grpSpPr>
+        <a:xfrm>
+          <a:off x="0" y="0"/>
+          <a:ext cx="0" cy="0"/>
+          <a:chOff x="0" y="0"/>
+          <a:chExt cx="0" cy="0"/>
+        </a:xfrm>
+      </p:grpSpPr>
+      <p:sp>
+        <p:nvSpPr>
+          <p:cNvPr id="2" name="Slide Image Placeholder 1"/>
+          <p:cNvSpPr>
+            <a:spLocks noGrp="1" noRot="1" noChangeAspect="1"/>
+          </p:cNvSpPr>
+          <p:nvPr>
+            <p:ph type="sldImg"/>
+          </p:nvPr>
+        </p:nvSpPr>
+        <p:spPr/>
+      </p:sp>
+      <p:sp>
+        <p:nvSpPr>
+          <p:cNvPr id="3" name="Notes Placeholder 2"/>
+          <p:cNvSpPr>
+            <a:spLocks noGrp="1"/>
+          </p:cNvSpPr>
+          <p:nvPr>
+            <p:ph type="body" idx="1"/>
+          </p:nvPr>
+        </p:nvSpPr>
+        <p:spPr/>
+        <p:txBody>
+          <a:bodyPr/>
+          <a:lstStyle/>
+          <a:p>
+            <a:r>
+              <a:t>45 seconds. Be explicit about the limits: the corpus is synthetic and reuses phrasings. Test ids are separate, but close phrasings can appear on both sides of the split. Validation by phrasing family, then on real notes, would be more convincing. The report shows the same stone-chip sentence can carry several severities. It estimates a 79.5% score for a text-fingerprint match on the full damage set: that estimate is specific to its method and scope, not a universal bound for the 150-case test (where the same method gives ~88.7%). We do not oppose it to XGBoost's 82%. Verbatim quotes and Pydantic enable auditing but do not guarantee semantic correctness. The R&amp;I and replacement rules have no ground-truth labels in this set. Next steps: measure latency and real cost, plus external validation on real notes. No financial figure is claimed.</a:t>
+            </a:r>
+          </a:p>
+          <a:p/>
+          <a:p>
+            <a:r>
+              <a:t>Local sources:</a:t>
+            </a:r>
+          </a:p>
+          <a:p>
+            <a:r>
+              <a:t>docs/jury-reliability-report.md</a:t>
+            </a:r>
+          </a:p>
+          <a:p>
+            <a:r>
+              <a:t>Work/pipeline/repair_logic.py</a:t>
+            </a:r>
+          </a:p>
+          <a:p>
+            <a:r>
+              <a:t>Dataset/DATASET.md</a:t>
+            </a:r>
+          </a:p>
+          <a:p>
+            <a:r>
+              <a:t>Work/pipeline/eval_report.json</a:t>
+            </a:r>
+          </a:p>
+        </p:txBody>
+      </p:sp>
+      <p:sp>
+        <p:nvSpPr>
+          <p:cNvPr id="4" name="Slide Number Placeholder 3"/>
+          <p:cNvSpPr>
+            <a:spLocks noGrp="1"/>
+          </p:cNvSpPr>
+          <p:nvPr>
+            <p:ph type="sldNum" idx="5"/>
+          </p:nvPr>
+        </p:nvSpPr>
+        <p:spPr/>
+        <p:txBody>
+          <a:bodyPr/>
+          <a:lstStyle/>
+          <a:p>
+            <a:endParaRPr/>
+          </a:p>
+        </p:txBody>
+      </p:sp>
+    </p:spTree>
+  </p:cSld>
+  <p:clrMapOvr>
+    <a:masterClrMapping/>
+  </p:clrMapOvr>
+</p:notes>
+</file>
+
+<file path=ppt/slideLayouts/slideLayout1.xml><?xml version="1.0" encoding="utf-8"?>
+<p:sldLayout xmlns:a="http://schemas.openxmlformats.org/drawingml/2006/main" xmlns:r="http://schemas.openxmlformats.org/officeDocument/2006/relationships" xmlns:p="http://schemas.openxmlformats.org/presentationml/2006/main" type="title">
+  <p:cSld name="Title Slide">
+    <p:spTree>
+      <p:nvGrpSpPr>
+        <p:cNvPr id="1" name=""/>
+        <p:cNvGrpSpPr/>
+        <p:nvPr/>
+      </p:nvGrpSpPr>
+      <p:grpSpPr>
+        <a:xfrm>
+          <a:off x="0" y="0"/>
+          <a:ext cx="0" cy="0"/>
+          <a:chOff x="0" y="0"/>
+          <a:chExt cx="0" cy="0"/>
+        </a:xfrm>
+      </p:grpSpPr>
+    </p:spTree>
+  </p:cSld>
+  <p:clrMapOvr>
+    <a:masterClrMapping/>
+  </p:clrMapOvr>
+</p:sldLayout>
+</file>
+
+<file path=ppt/slideMasters/slideMaster1.xml><?xml version="1.0" encoding="utf-8"?>
+<p:sldMaster xmlns:a="http://schemas.openxmlformats.org/drawingml/2006/main" xmlns:r="http://schemas.openxmlformats.org/officeDocument/2006/relationships" xmlns:p="http://schemas.openxmlformats.org/presentationml/2006/main">
+  <p:cSld name="Master">
+    <p:bg>
+      <p:bgRef idx="1001">
+        <a:schemeClr val="bg1"/>
+      </p:bgRef>
+    </p:bg>
+    <p:spTree>
+      <p:nvGrpSpPr>
+        <p:cNvPr id="1" name=""/>
+        <p:cNvGrpSpPr/>
+        <p:nvPr/>
+      </p:nvGrpSpPr>
+      <p:grpSpPr>
+        <a:xfrm>
+          <a:off x="0" y="0"/>
+          <a:ext cx="0" cy="0"/>
+          <a:chOff x="0" y="0"/>
+          <a:chExt cx="0" cy="0"/>
+        </a:xfrm>
+      </p:grpSpPr>
+    </p:spTree>
+  </p:cSld>
+  <p:clrMap bg1="lt1" tx1="dk1" bg2="lt2" tx2="dk2" accent1="accent1" accent2="accent2" accent3="accent3" accent4="accent4" accent5="accent5" accent6="accent6" hlink="hlink" folHlink="folHlink"/>
+  <p:sldLayoutIdLst>
+    <p:sldLayoutId id="2147483649" r:id="rId1"/>
+  </p:sldLayoutIdLst>
+  <p:txStyles>
+    <p:titleStyle>
+      <a:lvl1pPr algn="l">
+        <a:lnSpc>
+          <a:spcPct val="90000"/>
+        </a:lnSpc>
+        <a:spcBef>
+          <a:spcPts val="0"/>
+        </a:spcBef>
+        <a:buNone/>
+        <a:defRPr sz="4400">
+          <a:solidFill>
+            <a:schemeClr val="tx1"/>
+          </a:solidFill>
+          <a:latin typeface="+mj-lt"/>
+          <a:ea typeface="+mj-lt"/>
+          <a:cs typeface="+mj-lt"/>
+        </a:defRPr>
+      </a:lvl1pPr>
+    </p:titleStyle>
+    <p:bodyStyle>
+      <a:lvl1pPr marL="228600" indent="-228600" algn="l">
+        <a:lnSpc>
+          <a:spcPct val="90000"/>
+        </a:lnSpc>
+        <a:spcBef>
+          <a:spcPts val="1000"/>
+        </a:spcBef>
+        <a:buChar char="•"/>
+        <a:defRPr sz="2800">
+          <a:solidFill>
+            <a:schemeClr val="tx1"/>
+          </a:solidFill>
+          <a:latin typeface="+mn-lt"/>
+          <a:ea typeface="+mn-lt"/>
+          <a:cs typeface="+mn-lt"/>
+        </a:defRPr>
+      </a:lvl1pPr>
+      <a:lvl2pPr marL="685800" indent="-228600" algn="l">
+        <a:lnSpc>
+          <a:spcPct val="90000"/>
+        </a:lnSpc>
+        <a:spcBef>
+          <a:spcPts val="500"/>
+        </a:spcBef>
+        <a:buChar char="•"/>
+        <a:defRPr sz="2400">
+          <a:solidFill>
+            <a:schemeClr val="tx1"/>
+          </a:solidFill>
+          <a:latin typeface="+mn-lt"/>
+          <a:ea typeface="+mn-lt"/>
+          <a:cs typeface="+mn-lt"/>
+        </a:defRPr>
+      </a:lvl2pPr>
+      <a:lvl3pPr marL="1143000" indent="-228600" algn="l">
+        <a:lnSpc>
+          <a:spcPct val="90000"/>
+        </a:lnSpc>
+        <a:spcBef>
+          <a:spcPts val="500"/>
+        </a:spcBef>
+        <a:buChar char="•"/>
+        <a:defRPr sz="2000">
+          <a:solidFill>
+            <a:schemeClr val="tx1"/>
+          </a:solidFill>
+          <a:latin typeface="+mn-lt"/>
+          <a:ea typeface="+mn-lt"/>
+          <a:cs typeface="+mn-lt"/>
+        </a:defRPr>
+      </a:lvl3pPr>
+      <a:lvl4pPr marL="1600200" indent="-228600" algn="l">
+        <a:lnSpc>
+          <a:spcPct val="90000"/>
+        </a:lnSpc>
+        <a:spcBef>
+          <a:spcPts val="500"/>
+        </a:spcBef>
+        <a:buChar char="•"/>
+        <a:defRPr sz="1800">
+          <a:solidFill>
+            <a:schemeClr val="tx1"/>
+          </a:solidFill>
+          <a:latin typeface="+mn-lt"/>
+          <a:ea typeface="+mn-lt"/>
+          <a:cs typeface="+mn-lt"/>
+        </a:defRPr>
+      </a:lvl4pPr>
+      <a:lvl5pPr marL="2057400" indent="-228600" algn="l">
+        <a:lnSpc>
+          <a:spcPct val="90000"/>
+        </a:lnSpc>
+        <a:spcBef>
+          <a:spcPts val="500"/>
+        </a:spcBef>
+        <a:buChar char="•"/>
+        <a:defRPr sz="1800">
+          <a:solidFill>
+            <a:schemeClr val="tx1"/>
+          </a:solidFill>
+          <a:latin typeface="+mn-lt"/>
+          <a:ea typeface="+mn-lt"/>
+          <a:cs typeface="+mn-lt"/>
+        </a:defRPr>
+      </a:lvl5pPr>
+      <a:lvl6pPr marL="2514600" indent="-228600" algn="l">
+        <a:lnSpc>
+          <a:spcPct val="90000"/>
+        </a:lnSpc>
+        <a:spcBef>
+          <a:spcPts val="500"/>
+        </a:spcBef>
+        <a:buChar char="•"/>
+        <a:defRPr sz="1800">
+          <a:solidFill>
+            <a:schemeClr val="tx1"/>
+          </a:solidFill>
+          <a:latin typeface="+mn-lt"/>
+          <a:ea typeface="+mn-lt"/>
+          <a:cs typeface="+mn-lt"/>
+        </a:defRPr>
+      </a:lvl6pPr>
+      <a:lvl7pPr marL="2971800" indent="-228600" algn="l">
+        <a:lnSpc>
+          <a:spcPct val="90000"/>
+        </a:lnSpc>
+        <a:spcBef>
+          <a:spcPts val="500"/>
+        </a:spcBef>
+        <a:buChar char="•"/>
+        <a:defRPr sz="1800">
+          <a:solidFill>
+            <a:schemeClr val="tx1"/>
+          </a:solidFill>
+          <a:latin typeface="+mn-lt"/>
+          <a:ea typeface="+mn-lt"/>
+          <a:cs typeface="+mn-lt"/>
+        </a:defRPr>
+      </a:lvl7pPr>
+      <a:lvl8pPr marL="3429000" indent="-228600" algn="l">
+        <a:lnSpc>
+          <a:spcPct val="90000"/>
+        </a:lnSpc>
+        <a:spcBef>
+          <a:spcPts val="500"/>
+        </a:spcBef>
+        <a:buChar char="•"/>
+        <a:defRPr sz="1800">
+          <a:solidFill>
+            <a:schemeClr val="tx1"/>
+          </a:solidFill>
+          <a:latin typeface="+mn-lt"/>
+          <a:ea typeface="+mn-lt"/>
+          <a:cs typeface="+mn-lt"/>
+        </a:defRPr>
+      </a:lvl8pPr>
+      <a:lvl9pPr marL="3886200" indent="-228600" algn="l">
+        <a:lnSpc>
+          <a:spcPct val="90000"/>
+        </a:lnSpc>
+        <a:spcBef>
+          <a:spcPts val="500"/>
+        </a:spcBef>
+        <a:buChar char="•"/>
+        <a:defRPr sz="1800">
+          <a:solidFill>
+            <a:schemeClr val="tx1"/>
+          </a:solidFill>
+          <a:latin typeface="+mn-lt"/>
+          <a:ea typeface="+mn-lt"/>
+          <a:cs typeface="+mn-lt"/>
+        </a:defRPr>
+      </a:lvl9pPr>
+    </p:bodyStyle>
+    <p:otherStyle>
+      <a:lvl1pPr marL="0" algn="l">
+        <a:buNone/>
+        <a:defRPr sz="1800">
+          <a:solidFill>
+            <a:schemeClr val="tx1"/>
+          </a:solidFill>
+          <a:latin typeface="+mn-lt"/>
+          <a:ea typeface="+mn-lt"/>
+          <a:cs typeface="+mn-lt"/>
+        </a:defRPr>
+      </a:lvl1pPr>
+      <a:lvl2pPr marL="457200" algn="l">
+        <a:buNone/>
+        <a:defRPr sz="1800">
+          <a:solidFill>
+            <a:schemeClr val="tx1"/>
+          </a:solidFill>
+          <a:latin typeface="+mn-lt"/>
+          <a:ea typeface="+mn-lt"/>
+          <a:cs typeface="+mn-lt"/>
+        </a:defRPr>
+      </a:lvl2pPr>
+      <a:lvl3pPr marL="914400" algn="l">
+        <a:buNone/>
+        <a:defRPr sz="1800">
+          <a:solidFill>
+            <a:schemeClr val="tx1"/>
+          </a:solidFill>
+          <a:latin typeface="+mn-lt"/>
+          <a:ea typeface="+mn-lt"/>
+          <a:cs typeface="+mn-lt"/>
+        </a:defRPr>
+      </a:lvl3pPr>
+      <a:lvl4pPr marL="1371600" algn="l">
+        <a:buNone/>
+        <a:defRPr sz="1800">
+          <a:solidFill>
+            <a:schemeClr val="tx1"/>
+          </a:solidFill>
+          <a:latin typeface="+mn-lt"/>
+          <a:ea typeface="+mn-lt"/>
+          <a:cs typeface="+mn-lt"/>
+        </a:defRPr>
+      </a:lvl4pPr>
+      <a:lvl5pPr marL="1828800" algn="l">
+        <a:buNone/>
+        <a:defRPr sz="1800">
+          <a:solidFill>
+            <a:schemeClr val="tx1"/>
+          </a:solidFill>
+          <a:latin typeface="+mn-lt"/>
+          <a:ea typeface="+mn-lt"/>
+          <a:cs typeface="+mn-lt"/>
+        </a:defRPr>
+      </a:lvl5pPr>
+      <a:lvl6pPr marL="2286000" algn="l">
+        <a:buNone/>
+        <a:defRPr sz="1800">
+          <a:solidFill>
+            <a:schemeClr val="tx1"/>
+          </a:solidFill>
+          <a:latin typeface="+mn-lt"/>
+          <a:ea typeface="+mn-lt"/>
+          <a:cs typeface="+mn-lt"/>
+        </a:defRPr>
+      </a:lvl6pPr>
+      <a:lvl7pPr marL="2743200" algn="l">
+        <a:buNone/>
+        <a:defRPr sz="1800">
+          <a:solidFill>
+            <a:schemeClr val="tx1"/>
+          </a:solidFill>
+          <a:latin typeface="+mn-lt"/>
+          <a:ea typeface="+mn-lt"/>
+          <a:cs typeface="+mn-lt"/>
+        </a:defRPr>
+      </a:lvl7pPr>
+      <a:lvl8pPr marL="3200400" algn="l">
+        <a:buNone/>
+        <a:defRPr sz="1800">
+          <a:solidFill>
+            <a:schemeClr val="tx1"/>
+          </a:solidFill>
+          <a:latin typeface="+mn-lt"/>
+          <a:ea typeface="+mn-lt"/>
+          <a:cs typeface="+mn-lt"/>
+        </a:defRPr>
+      </a:lvl8pPr>
+      <a:lvl9pPr marL="3657600" algn="l">
+        <a:buNone/>
+        <a:defRPr sz="1800">
+          <a:solidFill>
+            <a:schemeClr val="tx1"/>
+          </a:solidFill>
+          <a:latin typeface="+mn-lt"/>
+          <a:ea typeface="+mn-lt"/>
+          <a:cs typeface="+mn-lt"/>
+        </a:defRPr>
+      </a:lvl9pPr>
+    </p:otherStyle>
+  </p:txStyles>
+</p:sldMaster>
+</file>
+
 <file path=ppt/slides/slide1.xml><?xml version="1.0" encoding="utf-8"?>
-<p:sld xmlns:p="http://schemas.openxmlformats.org/presentationml/2006/main">
+<p:sld xmlns:a="http://schemas.openxmlformats.org/drawingml/2006/main" xmlns:r="http://schemas.openxmlformats.org/officeDocument/2006/relationships" xmlns:p="http://schemas.openxmlformats.org/presentationml/2006/main">
   <p:cSld>
     <p:bg>
       <p:bgPr>
-        <a:solidFill xmlns:a="http://schemas.openxmlformats.org/drawingml/2006/main">
+        <a:solidFill>
           <a:srgbClr val="102C36"/>
         </a:solidFill>
+        <a:effectLst/>
       </p:bgPr>
     </p:bg>
     <p:spTree>
@@ -1781,41 +1502,46 @@
         <p:nvPr/>
       </p:nvGrpSpPr>
       <p:grpSpPr>
-        <a:xfrm xmlns:a="http://schemas.openxmlformats.org/drawingml/2006/main"/>
+        <a:xfrm>
+          <a:off x="0" y="0"/>
+          <a:ext cx="0" cy="0"/>
+          <a:chOff x="0" y="0"/>
+          <a:chExt cx="0" cy="0"/>
+        </a:xfrm>
       </p:grpSpPr>
       <p:sp>
         <p:nvSpPr>
-          <p:cNvPr id="7" name="">
-            <a:extLst xmlns:a="http://schemas.openxmlformats.org/drawingml/2006/main">
+          <p:cNvPr id="7" name="Rectangle 6">
+            <a:extLst>
               <a:ext uri="{FF2B5EF4-FFF2-40B4-BE49-F238E27FC236}">
                 <a16:creationId xmlns:a16="http://schemas.microsoft.com/office/drawing/2014/main" id="{DB672F4F-FC53-4090-86C4-98E4434BC7BD}"/>
               </a:ext>
             </a:extLst>
           </p:cNvPr>
           <p:cNvSpPr>
-            <a:spLocks xmlns:a="http://schemas.openxmlformats.org/drawingml/2006/main" noGrp="1"/>
-          </p:cNvSpPr>
-          <p:nvPr/>
-        </p:nvSpPr>
-        <p:spPr>
-          <a:xfrm xmlns:a="http://schemas.openxmlformats.org/drawingml/2006/main">
+            <a:spLocks noGrp="1"/>
+          </p:cNvSpPr>
+          <p:nvPr/>
+        </p:nvSpPr>
+        <p:spPr>
+          <a:xfrm>
             <a:off x="609600" y="409575"/>
             <a:ext cx="10953750" cy="714375"/>
           </a:xfrm>
-          <a:prstGeom xmlns:a="http://schemas.openxmlformats.org/drawingml/2006/main" prst="rect">
-            <a:avLst/>
-          </a:prstGeom>
-          <a:noFill xmlns:a="http://schemas.openxmlformats.org/drawingml/2006/main"/>
-          <a:ln xmlns:a="http://schemas.openxmlformats.org/drawingml/2006/main" w="0">
+          <a:prstGeom prst="rect">
+            <a:avLst/>
+          </a:prstGeom>
+          <a:noFill/>
+          <a:ln w="0">
             <a:noFill/>
           </a:ln>
         </p:spPr>
         <p:txBody>
-          <a:bodyPr xmlns:a="http://schemas.openxmlformats.org/drawingml/2006/main">
+          <a:bodyPr>
             <a:noAutofit/>
           </a:bodyPr>
-          <a:lstStyle xmlns:a="http://schemas.openxmlformats.org/drawingml/2006/main"/>
-          <a:p xmlns:a="http://schemas.openxmlformats.org/drawingml/2006/main">
+          <a:lstStyle/>
+          <a:p>
             <a:pPr>
               <a:defRPr sz="4800" b="1">
                 <a:solidFill>
@@ -1842,37 +1568,37 @@
       </p:sp>
       <p:sp>
         <p:nvSpPr>
-          <p:cNvPr id="2" name="">
-            <a:extLst xmlns:a="http://schemas.openxmlformats.org/drawingml/2006/main">
+          <p:cNvPr id="2" name="Rectangle 1">
+            <a:extLst>
               <a:ext uri="{FF2B5EF4-FFF2-40B4-BE49-F238E27FC236}">
                 <a16:creationId xmlns:a16="http://schemas.microsoft.com/office/drawing/2014/main" id="{E90DD583-8423-4710-BBD5-3C5879F001DD}"/>
               </a:ext>
             </a:extLst>
           </p:cNvPr>
           <p:cNvSpPr>
-            <a:spLocks xmlns:a="http://schemas.openxmlformats.org/drawingml/2006/main" noGrp="1"/>
-          </p:cNvSpPr>
-          <p:nvPr/>
-        </p:nvSpPr>
-        <p:spPr>
-          <a:xfrm xmlns:a="http://schemas.openxmlformats.org/drawingml/2006/main">
+            <a:spLocks noGrp="1"/>
+          </p:cNvSpPr>
+          <p:nvPr/>
+        </p:nvSpPr>
+        <p:spPr>
+          <a:xfrm>
             <a:off x="11144250" y="6324600"/>
             <a:ext cx="476250" cy="285750"/>
           </a:xfrm>
-          <a:prstGeom xmlns:a="http://schemas.openxmlformats.org/drawingml/2006/main" prst="rect">
-            <a:avLst/>
-          </a:prstGeom>
-          <a:noFill xmlns:a="http://schemas.openxmlformats.org/drawingml/2006/main"/>
-          <a:ln xmlns:a="http://schemas.openxmlformats.org/drawingml/2006/main" w="0">
+          <a:prstGeom prst="rect">
+            <a:avLst/>
+          </a:prstGeom>
+          <a:noFill/>
+          <a:ln w="0">
             <a:noFill/>
           </a:ln>
         </p:spPr>
         <p:txBody>
-          <a:bodyPr xmlns:a="http://schemas.openxmlformats.org/drawingml/2006/main">
+          <a:bodyPr>
             <a:noAutofit/>
           </a:bodyPr>
-          <a:lstStyle xmlns:a="http://schemas.openxmlformats.org/drawingml/2006/main"/>
-          <a:p xmlns:a="http://schemas.openxmlformats.org/drawingml/2006/main">
+          <a:lstStyle/>
+          <a:p>
             <a:pPr>
               <a:defRPr sz="1350" b="0">
                 <a:solidFill>
@@ -1899,37 +1625,37 @@
       </p:sp>
       <p:sp>
         <p:nvSpPr>
-          <p:cNvPr id="3" name="">
-            <a:extLst xmlns:a="http://schemas.openxmlformats.org/drawingml/2006/main">
+          <p:cNvPr id="3" name="Rectangle 2">
+            <a:extLst>
               <a:ext uri="{FF2B5EF4-FFF2-40B4-BE49-F238E27FC236}">
                 <a16:creationId xmlns:a16="http://schemas.microsoft.com/office/drawing/2014/main" id="{EC670042-1743-4526-83E4-614F385CA364}"/>
               </a:ext>
             </a:extLst>
           </p:cNvPr>
           <p:cNvSpPr>
-            <a:spLocks xmlns:a="http://schemas.openxmlformats.org/drawingml/2006/main" noGrp="1"/>
-          </p:cNvSpPr>
-          <p:nvPr/>
-        </p:nvSpPr>
-        <p:spPr>
-          <a:xfrm xmlns:a="http://schemas.openxmlformats.org/drawingml/2006/main">
+            <a:spLocks noGrp="1"/>
+          </p:cNvSpPr>
+          <p:nvPr/>
+        </p:nvSpPr>
+        <p:spPr>
+          <a:xfrm>
             <a:off x="609600" y="1885950"/>
-            <a:ext cx="10477500" cy="1485900"/>
+            <a:ext cx="5857875" cy="1485900"/>
           </a:xfrm>
-          <a:prstGeom xmlns:a="http://schemas.openxmlformats.org/drawingml/2006/main" prst="rect">
-            <a:avLst/>
-          </a:prstGeom>
-          <a:noFill xmlns:a="http://schemas.openxmlformats.org/drawingml/2006/main"/>
-          <a:ln xmlns:a="http://schemas.openxmlformats.org/drawingml/2006/main" w="0">
+          <a:prstGeom prst="rect">
+            <a:avLst/>
+          </a:prstGeom>
+          <a:noFill/>
+          <a:ln w="0">
             <a:noFill/>
           </a:ln>
         </p:spPr>
         <p:txBody>
-          <a:bodyPr xmlns:a="http://schemas.openxmlformats.org/drawingml/2006/main">
+          <a:bodyPr>
             <a:noAutofit/>
           </a:bodyPr>
-          <a:lstStyle xmlns:a="http://schemas.openxmlformats.org/drawingml/2006/main"/>
-          <a:p xmlns:a="http://schemas.openxmlformats.org/drawingml/2006/main">
+          <a:lstStyle/>
+          <a:p>
             <a:pPr>
               <a:defRPr sz="3600" b="1">
                 <a:solidFill>
@@ -1941,7 +1667,7 @@
               </a:defRPr>
             </a:pPr>
             <a:r>
-              <a:rPr sz="3600" b="1">
+              <a:rPr sz="3600" b="1" dirty="0">
                 <a:solidFill>
                   <a:srgbClr val="FFFFFF"/>
                 </a:solidFill>
@@ -1952,7 +1678,7 @@
               <a:t>Reading messy German workshop notes,</a:t>
             </a:r>
           </a:p>
-          <a:p xmlns:a="http://schemas.openxmlformats.org/drawingml/2006/main">
+          <a:p>
             <a:pPr>
               <a:defRPr sz="3600" b="1">
                 <a:solidFill>
@@ -1964,7 +1690,7 @@
               </a:defRPr>
             </a:pPr>
             <a:r>
-              <a:rPr sz="3600" b="1">
+              <a:rPr sz="3600" b="1" dirty="0">
                 <a:solidFill>
                   <a:srgbClr val="FFFFFF"/>
                 </a:solidFill>
@@ -1979,37 +1705,37 @@
       </p:sp>
       <p:sp>
         <p:nvSpPr>
-          <p:cNvPr id="4" name="">
-            <a:extLst xmlns:a="http://schemas.openxmlformats.org/drawingml/2006/main">
+          <p:cNvPr id="4" name="Rectangle 3">
+            <a:extLst>
               <a:ext uri="{FF2B5EF4-FFF2-40B4-BE49-F238E27FC236}">
                 <a16:creationId xmlns:a16="http://schemas.microsoft.com/office/drawing/2014/main" id="{C7BEB761-EA07-4F19-8B4C-76BCE8485B99}"/>
               </a:ext>
             </a:extLst>
           </p:cNvPr>
           <p:cNvSpPr>
-            <a:spLocks xmlns:a="http://schemas.openxmlformats.org/drawingml/2006/main" noGrp="1"/>
-          </p:cNvSpPr>
-          <p:nvPr/>
-        </p:nvSpPr>
-        <p:spPr>
-          <a:xfrm xmlns:a="http://schemas.openxmlformats.org/drawingml/2006/main">
-            <a:off x="609600" y="3705225"/>
+            <a:spLocks noGrp="1"/>
+          </p:cNvSpPr>
+          <p:nvPr/>
+        </p:nvSpPr>
+        <p:spPr>
+          <a:xfrm>
+            <a:off x="504825" y="4057650"/>
             <a:ext cx="10001250" cy="952500"/>
           </a:xfrm>
-          <a:prstGeom xmlns:a="http://schemas.openxmlformats.org/drawingml/2006/main" prst="rect">
-            <a:avLst/>
-          </a:prstGeom>
-          <a:noFill xmlns:a="http://schemas.openxmlformats.org/drawingml/2006/main"/>
-          <a:ln xmlns:a="http://schemas.openxmlformats.org/drawingml/2006/main" w="0">
+          <a:prstGeom prst="rect">
+            <a:avLst/>
+          </a:prstGeom>
+          <a:noFill/>
+          <a:ln w="0">
             <a:noFill/>
           </a:ln>
         </p:spPr>
         <p:txBody>
-          <a:bodyPr xmlns:a="http://schemas.openxmlformats.org/drawingml/2006/main">
+          <a:bodyPr>
             <a:noAutofit/>
           </a:bodyPr>
-          <a:lstStyle xmlns:a="http://schemas.openxmlformats.org/drawingml/2006/main"/>
-          <a:p xmlns:a="http://schemas.openxmlformats.org/drawingml/2006/main">
+          <a:lstStyle/>
+          <a:p>
             <a:pPr>
               <a:defRPr sz="2325" b="0">
                 <a:solidFill>
@@ -2021,7 +1747,7 @@
               </a:defRPr>
             </a:pPr>
             <a:r>
-              <a:rPr sz="2325" b="0">
+              <a:rPr lang="en-US" sz="2325" b="0" dirty="0">
                 <a:solidFill>
                   <a:srgbClr val="B9D7D4"/>
                 </a:solidFill>
@@ -2032,7 +1758,7 @@
               <a:t>A visual damage sheet per vehicle,</a:t>
             </a:r>
           </a:p>
-          <a:p xmlns:a="http://schemas.openxmlformats.org/drawingml/2006/main">
+          <a:p>
             <a:pPr>
               <a:defRPr sz="2325" b="0">
                 <a:solidFill>
@@ -2044,7 +1770,7 @@
               </a:defRPr>
             </a:pPr>
             <a:r>
-              <a:rPr sz="2325" b="0">
+              <a:rPr lang="en-US" sz="2325" b="0" dirty="0">
                 <a:solidFill>
                   <a:srgbClr val="B9D7D4"/>
                 </a:solidFill>
@@ -2059,37 +1785,37 @@
       </p:sp>
       <p:sp>
         <p:nvSpPr>
-          <p:cNvPr id="5" name="">
-            <a:extLst xmlns:a="http://schemas.openxmlformats.org/drawingml/2006/main">
+          <p:cNvPr id="5" name="Rectangle 4">
+            <a:extLst>
               <a:ext uri="{FF2B5EF4-FFF2-40B4-BE49-F238E27FC236}">
                 <a16:creationId xmlns:a16="http://schemas.microsoft.com/office/drawing/2014/main" id="{A559B5E8-9CB7-41EA-AFE7-B2B2EEE9E7E2}"/>
               </a:ext>
             </a:extLst>
           </p:cNvPr>
           <p:cNvSpPr>
-            <a:spLocks xmlns:a="http://schemas.openxmlformats.org/drawingml/2006/main" noGrp="1"/>
-          </p:cNvSpPr>
-          <p:nvPr/>
-        </p:nvSpPr>
-        <p:spPr>
-          <a:xfrm xmlns:a="http://schemas.openxmlformats.org/drawingml/2006/main">
+            <a:spLocks noGrp="1"/>
+          </p:cNvSpPr>
+          <p:nvPr/>
+        </p:nvSpPr>
+        <p:spPr>
+          <a:xfrm>
             <a:off x="609600" y="5267325"/>
             <a:ext cx="8572500" cy="457200"/>
           </a:xfrm>
-          <a:prstGeom xmlns:a="http://schemas.openxmlformats.org/drawingml/2006/main" prst="rect">
-            <a:avLst/>
-          </a:prstGeom>
-          <a:noFill xmlns:a="http://schemas.openxmlformats.org/drawingml/2006/main"/>
-          <a:ln xmlns:a="http://schemas.openxmlformats.org/drawingml/2006/main" w="0">
+          <a:prstGeom prst="rect">
+            <a:avLst/>
+          </a:prstGeom>
+          <a:noFill/>
+          <a:ln w="0">
             <a:noFill/>
           </a:ln>
         </p:spPr>
         <p:txBody>
-          <a:bodyPr xmlns:a="http://schemas.openxmlformats.org/drawingml/2006/main">
+          <a:bodyPr>
             <a:noAutofit/>
           </a:bodyPr>
-          <a:lstStyle xmlns:a="http://schemas.openxmlformats.org/drawingml/2006/main"/>
-          <a:p xmlns:a="http://schemas.openxmlformats.org/drawingml/2006/main">
+          <a:lstStyle/>
+          <a:p>
             <a:pPr>
               <a:defRPr sz="2550" b="1">
                 <a:solidFill>
@@ -2101,7 +1827,7 @@
               </a:defRPr>
             </a:pPr>
             <a:r>
-              <a:rPr sz="2550" b="1">
+              <a:rPr sz="2550" b="1" dirty="0">
                 <a:solidFill>
                   <a:srgbClr val="64D4BF"/>
                 </a:solidFill>
@@ -2116,37 +1842,37 @@
       </p:sp>
       <p:sp>
         <p:nvSpPr>
-          <p:cNvPr id="6" name="">
-            <a:extLst xmlns:a="http://schemas.openxmlformats.org/drawingml/2006/main">
+          <p:cNvPr id="6" name="Rectangle 5">
+            <a:extLst>
               <a:ext uri="{FF2B5EF4-FFF2-40B4-BE49-F238E27FC236}">
                 <a16:creationId xmlns:a16="http://schemas.microsoft.com/office/drawing/2014/main" id="{48B40988-B505-4F64-8226-EBD18CC71F5E}"/>
               </a:ext>
             </a:extLst>
           </p:cNvPr>
           <p:cNvSpPr>
-            <a:spLocks xmlns:a="http://schemas.openxmlformats.org/drawingml/2006/main" noGrp="1"/>
-          </p:cNvSpPr>
-          <p:nvPr/>
-        </p:nvSpPr>
-        <p:spPr>
-          <a:xfrm xmlns:a="http://schemas.openxmlformats.org/drawingml/2006/main">
+            <a:spLocks noGrp="1"/>
+          </p:cNvSpPr>
+          <p:nvPr/>
+        </p:nvSpPr>
+        <p:spPr>
+          <a:xfrm>
             <a:off x="609600" y="5981700"/>
             <a:ext cx="10001250" cy="333375"/>
           </a:xfrm>
-          <a:prstGeom xmlns:a="http://schemas.openxmlformats.org/drawingml/2006/main" prst="rect">
-            <a:avLst/>
-          </a:prstGeom>
-          <a:noFill xmlns:a="http://schemas.openxmlformats.org/drawingml/2006/main"/>
-          <a:ln xmlns:a="http://schemas.openxmlformats.org/drawingml/2006/main" w="0">
+          <a:prstGeom prst="rect">
+            <a:avLst/>
+          </a:prstGeom>
+          <a:noFill/>
+          <a:ln w="0">
             <a:noFill/>
           </a:ln>
         </p:spPr>
         <p:txBody>
-          <a:bodyPr xmlns:a="http://schemas.openxmlformats.org/drawingml/2006/main">
+          <a:bodyPr>
             <a:noAutofit/>
           </a:bodyPr>
-          <a:lstStyle xmlns:a="http://schemas.openxmlformats.org/drawingml/2006/main"/>
-          <a:p xmlns:a="http://schemas.openxmlformats.org/drawingml/2006/main">
+          <a:lstStyle/>
+          <a:p>
             <a:pPr>
               <a:defRPr sz="1650" b="0">
                 <a:solidFill>
@@ -2158,7 +1884,7 @@
               </a:defRPr>
             </a:pPr>
             <a:r>
-              <a:rPr sz="1650" b="0">
+              <a:rPr sz="1650" b="0" dirty="0">
                 <a:solidFill>
                   <a:srgbClr val="B9D7D4"/>
                 </a:solidFill>
@@ -2166,11 +1892,69 @@
                 <a:ea typeface="Arial"/>
                 <a:cs typeface="Arial"/>
               </a:rPr>
-              <a:t>Wolf Day · DaiL · Track B</a:t>
-            </a:r>
-          </a:p>
-        </p:txBody>
-      </p:sp>
+              <a:t>Wolf Day · </a:t>
+            </a:r>
+            <a:r>
+              <a:rPr sz="1650" b="0" dirty="0" err="1">
+                <a:solidFill>
+                  <a:srgbClr val="B9D7D4"/>
+                </a:solidFill>
+                <a:latin typeface="Arial"/>
+                <a:ea typeface="Arial"/>
+                <a:cs typeface="Arial"/>
+              </a:rPr>
+              <a:t>DaiL</a:t>
+            </a:r>
+            <a:r>
+              <a:rPr sz="1650" b="0" dirty="0">
+                <a:solidFill>
+                  <a:srgbClr val="B9D7D4"/>
+                </a:solidFill>
+                <a:latin typeface="Arial"/>
+                <a:ea typeface="Arial"/>
+                <a:cs typeface="Arial"/>
+              </a:rPr>
+              <a:t> · Track B</a:t>
+            </a:r>
+          </a:p>
+        </p:txBody>
+      </p:sp>
+      <p:pic>
+        <p:nvPicPr>
+          <p:cNvPr id="8" name="Image 7">
+            <a:extLst>
+              <a:ext uri="{FF2B5EF4-FFF2-40B4-BE49-F238E27FC236}">
+                <a16:creationId xmlns:a16="http://schemas.microsoft.com/office/drawing/2014/main" id="{49A1DE2D-ECFD-4694-BD6D-316D7186F755}"/>
+              </a:ext>
+            </a:extLst>
+          </p:cNvPr>
+          <p:cNvPicPr>
+            <a:picLocks noChangeAspect="1"/>
+          </p:cNvPicPr>
+          <p:nvPr/>
+        </p:nvPicPr>
+        <p:blipFill>
+          <a:blip r:embed="rId3">
+            <a:extLst>
+              <a:ext uri="{28A0092B-C50C-407E-A947-70E740481C1C}">
+                <a14:useLocalDpi xmlns:a14="http://schemas.microsoft.com/office/drawing/2010/main" val="0"/>
+              </a:ext>
+            </a:extLst>
+          </a:blip>
+          <a:stretch>
+            <a:fillRect/>
+          </a:stretch>
+        </p:blipFill>
+        <p:spPr>
+          <a:xfrm>
+            <a:off x="7700962" y="1123950"/>
+            <a:ext cx="3862388" cy="3862388"/>
+          </a:xfrm>
+          <a:prstGeom prst="rect">
+            <a:avLst/>
+          </a:prstGeom>
+        </p:spPr>
+      </p:pic>
     </p:spTree>
     <p:extLst>
       <p:ext uri="{BB962C8B-B14F-4D97-AF65-F5344CB8AC3E}">
@@ -2178,17 +1962,21 @@
       </p:ext>
     </p:extLst>
   </p:cSld>
+  <p:clrMapOvr>
+    <a:masterClrMapping/>
+  </p:clrMapOvr>
 </p:sld>
 </file>
 
 <file path=ppt/slides/slide2.xml><?xml version="1.0" encoding="utf-8"?>
-<p:sld xmlns:p="http://schemas.openxmlformats.org/presentationml/2006/main">
+<p:sld xmlns:a="http://schemas.openxmlformats.org/drawingml/2006/main" xmlns:r="http://schemas.openxmlformats.org/officeDocument/2006/relationships" xmlns:p="http://schemas.openxmlformats.org/presentationml/2006/main">
   <p:cSld>
     <p:bg>
       <p:bgPr>
-        <a:solidFill xmlns:a="http://schemas.openxmlformats.org/drawingml/2006/main">
+        <a:solidFill>
           <a:srgbClr val="F5F4EF"/>
         </a:solidFill>
+        <a:effectLst/>
       </p:bgPr>
     </p:bg>
     <p:spTree>
@@ -2198,41 +1986,46 @@
         <p:nvPr/>
       </p:nvGrpSpPr>
       <p:grpSpPr>
-        <a:xfrm xmlns:a="http://schemas.openxmlformats.org/drawingml/2006/main"/>
+        <a:xfrm>
+          <a:off x="0" y="0"/>
+          <a:ext cx="0" cy="0"/>
+          <a:chOff x="0" y="0"/>
+          <a:chExt cx="0" cy="0"/>
+        </a:xfrm>
       </p:grpSpPr>
       <p:sp>
         <p:nvSpPr>
-          <p:cNvPr id="16" name="">
-            <a:extLst xmlns:a="http://schemas.openxmlformats.org/drawingml/2006/main">
+          <p:cNvPr id="16" name="Rectangle 15">
+            <a:extLst>
               <a:ext uri="{FF2B5EF4-FFF2-40B4-BE49-F238E27FC236}">
                 <a16:creationId xmlns:a16="http://schemas.microsoft.com/office/drawing/2014/main" id="{7BDACD64-46C6-49A3-A770-9769CE4D17FE}"/>
               </a:ext>
             </a:extLst>
           </p:cNvPr>
           <p:cNvSpPr>
-            <a:spLocks xmlns:a="http://schemas.openxmlformats.org/drawingml/2006/main" noGrp="1"/>
-          </p:cNvSpPr>
-          <p:nvPr/>
-        </p:nvSpPr>
-        <p:spPr>
-          <a:xfrm xmlns:a="http://schemas.openxmlformats.org/drawingml/2006/main">
+            <a:spLocks noGrp="1"/>
+          </p:cNvSpPr>
+          <p:nvPr/>
+        </p:nvSpPr>
+        <p:spPr>
+          <a:xfrm>
             <a:off x="609600" y="409575"/>
             <a:ext cx="10953750" cy="714375"/>
           </a:xfrm>
-          <a:prstGeom xmlns:a="http://schemas.openxmlformats.org/drawingml/2006/main" prst="rect">
-            <a:avLst/>
-          </a:prstGeom>
-          <a:noFill xmlns:a="http://schemas.openxmlformats.org/drawingml/2006/main"/>
-          <a:ln xmlns:a="http://schemas.openxmlformats.org/drawingml/2006/main" w="0">
+          <a:prstGeom prst="rect">
+            <a:avLst/>
+          </a:prstGeom>
+          <a:noFill/>
+          <a:ln w="0">
             <a:noFill/>
           </a:ln>
         </p:spPr>
         <p:txBody>
-          <a:bodyPr xmlns:a="http://schemas.openxmlformats.org/drawingml/2006/main">
+          <a:bodyPr>
             <a:noAutofit/>
           </a:bodyPr>
-          <a:lstStyle xmlns:a="http://schemas.openxmlformats.org/drawingml/2006/main"/>
-          <a:p xmlns:a="http://schemas.openxmlformats.org/drawingml/2006/main">
+          <a:lstStyle/>
+          <a:p>
             <a:pPr>
               <a:defRPr sz="3225" b="1">
                 <a:solidFill>
@@ -2259,37 +2052,37 @@
       </p:sp>
       <p:sp>
         <p:nvSpPr>
-          <p:cNvPr id="2" name="">
-            <a:extLst xmlns:a="http://schemas.openxmlformats.org/drawingml/2006/main">
+          <p:cNvPr id="2" name="Rectangle 1">
+            <a:extLst>
               <a:ext uri="{FF2B5EF4-FFF2-40B4-BE49-F238E27FC236}">
                 <a16:creationId xmlns:a16="http://schemas.microsoft.com/office/drawing/2014/main" id="{3EA85EF9-7674-495A-ACED-C3C810E7EB39}"/>
               </a:ext>
             </a:extLst>
           </p:cNvPr>
           <p:cNvSpPr>
-            <a:spLocks xmlns:a="http://schemas.openxmlformats.org/drawingml/2006/main" noGrp="1"/>
-          </p:cNvSpPr>
-          <p:nvPr/>
-        </p:nvSpPr>
-        <p:spPr>
-          <a:xfrm xmlns:a="http://schemas.openxmlformats.org/drawingml/2006/main">
+            <a:spLocks noGrp="1"/>
+          </p:cNvSpPr>
+          <p:nvPr/>
+        </p:nvSpPr>
+        <p:spPr>
+          <a:xfrm>
             <a:off x="11144250" y="6324600"/>
             <a:ext cx="476250" cy="285750"/>
           </a:xfrm>
-          <a:prstGeom xmlns:a="http://schemas.openxmlformats.org/drawingml/2006/main" prst="rect">
-            <a:avLst/>
-          </a:prstGeom>
-          <a:noFill xmlns:a="http://schemas.openxmlformats.org/drawingml/2006/main"/>
-          <a:ln xmlns:a="http://schemas.openxmlformats.org/drawingml/2006/main" w="0">
+          <a:prstGeom prst="rect">
+            <a:avLst/>
+          </a:prstGeom>
+          <a:noFill/>
+          <a:ln w="0">
             <a:noFill/>
           </a:ln>
         </p:spPr>
         <p:txBody>
-          <a:bodyPr xmlns:a="http://schemas.openxmlformats.org/drawingml/2006/main">
+          <a:bodyPr>
             <a:noAutofit/>
           </a:bodyPr>
-          <a:lstStyle xmlns:a="http://schemas.openxmlformats.org/drawingml/2006/main"/>
-          <a:p xmlns:a="http://schemas.openxmlformats.org/drawingml/2006/main">
+          <a:lstStyle/>
+          <a:p>
             <a:pPr>
               <a:defRPr sz="1350" b="0">
                 <a:solidFill>
@@ -2316,37 +2109,37 @@
       </p:sp>
       <p:sp>
         <p:nvSpPr>
-          <p:cNvPr id="3" name="">
-            <a:extLst xmlns:a="http://schemas.openxmlformats.org/drawingml/2006/main">
+          <p:cNvPr id="3" name="Rectangle 2">
+            <a:extLst>
               <a:ext uri="{FF2B5EF4-FFF2-40B4-BE49-F238E27FC236}">
                 <a16:creationId xmlns:a16="http://schemas.microsoft.com/office/drawing/2014/main" id="{AFE3D03B-DF02-4B5C-A3F5-4CC846EE9AD8}"/>
               </a:ext>
             </a:extLst>
           </p:cNvPr>
           <p:cNvSpPr>
-            <a:spLocks xmlns:a="http://schemas.openxmlformats.org/drawingml/2006/main" noGrp="1"/>
-          </p:cNvSpPr>
-          <p:nvPr/>
-        </p:nvSpPr>
-        <p:spPr>
-          <a:xfrm xmlns:a="http://schemas.openxmlformats.org/drawingml/2006/main">
+            <a:spLocks noGrp="1"/>
+          </p:cNvSpPr>
+          <p:nvPr/>
+        </p:nvSpPr>
+        <p:spPr>
+          <a:xfrm>
             <a:off x="609600" y="1524000"/>
             <a:ext cx="666750" cy="523875"/>
           </a:xfrm>
-          <a:prstGeom xmlns:a="http://schemas.openxmlformats.org/drawingml/2006/main" prst="rect">
-            <a:avLst/>
-          </a:prstGeom>
-          <a:noFill xmlns:a="http://schemas.openxmlformats.org/drawingml/2006/main"/>
-          <a:ln xmlns:a="http://schemas.openxmlformats.org/drawingml/2006/main" w="0">
+          <a:prstGeom prst="rect">
+            <a:avLst/>
+          </a:prstGeom>
+          <a:noFill/>
+          <a:ln w="0">
             <a:noFill/>
           </a:ln>
         </p:spPr>
         <p:txBody>
-          <a:bodyPr xmlns:a="http://schemas.openxmlformats.org/drawingml/2006/main">
+          <a:bodyPr>
             <a:noAutofit/>
           </a:bodyPr>
-          <a:lstStyle xmlns:a="http://schemas.openxmlformats.org/drawingml/2006/main"/>
-          <a:p xmlns:a="http://schemas.openxmlformats.org/drawingml/2006/main">
+          <a:lstStyle/>
+          <a:p>
             <a:pPr>
               <a:defRPr sz="2925" b="1">
                 <a:solidFill>
@@ -2373,37 +2166,37 @@
       </p:sp>
       <p:sp>
         <p:nvSpPr>
-          <p:cNvPr id="4" name="">
-            <a:extLst xmlns:a="http://schemas.openxmlformats.org/drawingml/2006/main">
+          <p:cNvPr id="4" name="Rectangle 3">
+            <a:extLst>
               <a:ext uri="{FF2B5EF4-FFF2-40B4-BE49-F238E27FC236}">
                 <a16:creationId xmlns:a16="http://schemas.microsoft.com/office/drawing/2014/main" id="{8014000B-D2D6-4796-A1E6-1E618D136650}"/>
               </a:ext>
             </a:extLst>
           </p:cNvPr>
           <p:cNvSpPr>
-            <a:spLocks xmlns:a="http://schemas.openxmlformats.org/drawingml/2006/main" noGrp="1"/>
-          </p:cNvSpPr>
-          <p:nvPr/>
-        </p:nvSpPr>
-        <p:spPr>
-          <a:xfrm xmlns:a="http://schemas.openxmlformats.org/drawingml/2006/main">
+            <a:spLocks noGrp="1"/>
+          </p:cNvSpPr>
+          <p:nvPr/>
+        </p:nvSpPr>
+        <p:spPr>
+          <a:xfrm>
             <a:off x="1466850" y="1524000"/>
             <a:ext cx="4286250" cy="457200"/>
           </a:xfrm>
-          <a:prstGeom xmlns:a="http://schemas.openxmlformats.org/drawingml/2006/main" prst="rect">
-            <a:avLst/>
-          </a:prstGeom>
-          <a:noFill xmlns:a="http://schemas.openxmlformats.org/drawingml/2006/main"/>
-          <a:ln xmlns:a="http://schemas.openxmlformats.org/drawingml/2006/main" w="0">
+          <a:prstGeom prst="rect">
+            <a:avLst/>
+          </a:prstGeom>
+          <a:noFill/>
+          <a:ln w="0">
             <a:noFill/>
           </a:ln>
         </p:spPr>
         <p:txBody>
-          <a:bodyPr xmlns:a="http://schemas.openxmlformats.org/drawingml/2006/main">
+          <a:bodyPr>
             <a:noAutofit/>
           </a:bodyPr>
-          <a:lstStyle xmlns:a="http://schemas.openxmlformats.org/drawingml/2006/main"/>
-          <a:p xmlns:a="http://schemas.openxmlformats.org/drawingml/2006/main">
+          <a:lstStyle/>
+          <a:p>
             <a:pPr>
               <a:defRPr sz="2175" b="1">
                 <a:solidFill>
@@ -2430,37 +2223,37 @@
       </p:sp>
       <p:sp>
         <p:nvSpPr>
-          <p:cNvPr id="5" name="">
-            <a:extLst xmlns:a="http://schemas.openxmlformats.org/drawingml/2006/main">
+          <p:cNvPr id="5" name="Rectangle 4">
+            <a:extLst>
               <a:ext uri="{FF2B5EF4-FFF2-40B4-BE49-F238E27FC236}">
                 <a16:creationId xmlns:a16="http://schemas.microsoft.com/office/drawing/2014/main" id="{F586B2EF-AE83-4759-A5FD-D7F0B078C278}"/>
               </a:ext>
             </a:extLst>
           </p:cNvPr>
           <p:cNvSpPr>
-            <a:spLocks xmlns:a="http://schemas.openxmlformats.org/drawingml/2006/main" noGrp="1"/>
-          </p:cNvSpPr>
-          <p:nvPr/>
-        </p:nvSpPr>
-        <p:spPr>
-          <a:xfrm xmlns:a="http://schemas.openxmlformats.org/drawingml/2006/main">
+            <a:spLocks noGrp="1"/>
+          </p:cNvSpPr>
+          <p:nvPr/>
+        </p:nvSpPr>
+        <p:spPr>
+          <a:xfrm>
             <a:off x="1466850" y="1981200"/>
             <a:ext cx="9620250" cy="457200"/>
           </a:xfrm>
-          <a:prstGeom xmlns:a="http://schemas.openxmlformats.org/drawingml/2006/main" prst="rect">
-            <a:avLst/>
-          </a:prstGeom>
-          <a:noFill xmlns:a="http://schemas.openxmlformats.org/drawingml/2006/main"/>
-          <a:ln xmlns:a="http://schemas.openxmlformats.org/drawingml/2006/main" w="0">
+          <a:prstGeom prst="rect">
+            <a:avLst/>
+          </a:prstGeom>
+          <a:noFill/>
+          <a:ln w="0">
             <a:noFill/>
           </a:ln>
         </p:spPr>
         <p:txBody>
-          <a:bodyPr xmlns:a="http://schemas.openxmlformats.org/drawingml/2006/main">
+          <a:bodyPr>
             <a:noAutofit/>
           </a:bodyPr>
-          <a:lstStyle xmlns:a="http://schemas.openxmlformats.org/drawingml/2006/main"/>
-          <a:p xmlns:a="http://schemas.openxmlformats.org/drawingml/2006/main">
+          <a:lstStyle/>
+          <a:p>
             <a:pPr>
               <a:defRPr sz="1875" b="0">
                 <a:solidFill>
@@ -2487,37 +2280,37 @@
       </p:sp>
       <p:sp>
         <p:nvSpPr>
-          <p:cNvPr id="6" name="">
-            <a:extLst xmlns:a="http://schemas.openxmlformats.org/drawingml/2006/main">
+          <p:cNvPr id="6" name="Rectangle 5">
+            <a:extLst>
               <a:ext uri="{FF2B5EF4-FFF2-40B4-BE49-F238E27FC236}">
                 <a16:creationId xmlns:a16="http://schemas.microsoft.com/office/drawing/2014/main" id="{9D4244CA-27DC-40D6-8AFA-08C4F3B00560}"/>
               </a:ext>
             </a:extLst>
           </p:cNvPr>
           <p:cNvSpPr>
-            <a:spLocks xmlns:a="http://schemas.openxmlformats.org/drawingml/2006/main" noGrp="1"/>
-          </p:cNvSpPr>
-          <p:nvPr/>
-        </p:nvSpPr>
-        <p:spPr>
-          <a:xfrm xmlns:a="http://schemas.openxmlformats.org/drawingml/2006/main">
+            <a:spLocks noGrp="1"/>
+          </p:cNvSpPr>
+          <p:nvPr/>
+        </p:nvSpPr>
+        <p:spPr>
+          <a:xfrm>
             <a:off x="609600" y="2571750"/>
             <a:ext cx="666750" cy="523875"/>
           </a:xfrm>
-          <a:prstGeom xmlns:a="http://schemas.openxmlformats.org/drawingml/2006/main" prst="rect">
-            <a:avLst/>
-          </a:prstGeom>
-          <a:noFill xmlns:a="http://schemas.openxmlformats.org/drawingml/2006/main"/>
-          <a:ln xmlns:a="http://schemas.openxmlformats.org/drawingml/2006/main" w="0">
+          <a:prstGeom prst="rect">
+            <a:avLst/>
+          </a:prstGeom>
+          <a:noFill/>
+          <a:ln w="0">
             <a:noFill/>
           </a:ln>
         </p:spPr>
         <p:txBody>
-          <a:bodyPr xmlns:a="http://schemas.openxmlformats.org/drawingml/2006/main">
+          <a:bodyPr>
             <a:noAutofit/>
           </a:bodyPr>
-          <a:lstStyle xmlns:a="http://schemas.openxmlformats.org/drawingml/2006/main"/>
-          <a:p xmlns:a="http://schemas.openxmlformats.org/drawingml/2006/main">
+          <a:lstStyle/>
+          <a:p>
             <a:pPr>
               <a:defRPr sz="2925" b="1">
                 <a:solidFill>
@@ -2544,37 +2337,37 @@
       </p:sp>
       <p:sp>
         <p:nvSpPr>
-          <p:cNvPr id="7" name="">
-            <a:extLst xmlns:a="http://schemas.openxmlformats.org/drawingml/2006/main">
+          <p:cNvPr id="7" name="Rectangle 6">
+            <a:extLst>
               <a:ext uri="{FF2B5EF4-FFF2-40B4-BE49-F238E27FC236}">
                 <a16:creationId xmlns:a16="http://schemas.microsoft.com/office/drawing/2014/main" id="{FD7984A3-654D-4EEF-B0A6-A9F86F939C77}"/>
               </a:ext>
             </a:extLst>
           </p:cNvPr>
           <p:cNvSpPr>
-            <a:spLocks xmlns:a="http://schemas.openxmlformats.org/drawingml/2006/main" noGrp="1"/>
-          </p:cNvSpPr>
-          <p:nvPr/>
-        </p:nvSpPr>
-        <p:spPr>
-          <a:xfrm xmlns:a="http://schemas.openxmlformats.org/drawingml/2006/main">
+            <a:spLocks noGrp="1"/>
+          </p:cNvSpPr>
+          <p:nvPr/>
+        </p:nvSpPr>
+        <p:spPr>
+          <a:xfrm>
             <a:off x="1466850" y="2571750"/>
             <a:ext cx="4286250" cy="457200"/>
           </a:xfrm>
-          <a:prstGeom xmlns:a="http://schemas.openxmlformats.org/drawingml/2006/main" prst="rect">
-            <a:avLst/>
-          </a:prstGeom>
-          <a:noFill xmlns:a="http://schemas.openxmlformats.org/drawingml/2006/main"/>
-          <a:ln xmlns:a="http://schemas.openxmlformats.org/drawingml/2006/main" w="0">
+          <a:prstGeom prst="rect">
+            <a:avLst/>
+          </a:prstGeom>
+          <a:noFill/>
+          <a:ln w="0">
             <a:noFill/>
           </a:ln>
         </p:spPr>
         <p:txBody>
-          <a:bodyPr xmlns:a="http://schemas.openxmlformats.org/drawingml/2006/main">
+          <a:bodyPr>
             <a:noAutofit/>
           </a:bodyPr>
-          <a:lstStyle xmlns:a="http://schemas.openxmlformats.org/drawingml/2006/main"/>
-          <a:p xmlns:a="http://schemas.openxmlformats.org/drawingml/2006/main">
+          <a:lstStyle/>
+          <a:p>
             <a:pPr>
               <a:defRPr sz="2175" b="1">
                 <a:solidFill>
@@ -2601,37 +2394,37 @@
       </p:sp>
       <p:sp>
         <p:nvSpPr>
-          <p:cNvPr id="8" name="">
-            <a:extLst xmlns:a="http://schemas.openxmlformats.org/drawingml/2006/main">
+          <p:cNvPr id="8" name="Rectangle 7">
+            <a:extLst>
               <a:ext uri="{FF2B5EF4-FFF2-40B4-BE49-F238E27FC236}">
                 <a16:creationId xmlns:a16="http://schemas.microsoft.com/office/drawing/2014/main" id="{BA85B0F8-E75F-48ED-867C-D45A8B045F24}"/>
               </a:ext>
             </a:extLst>
           </p:cNvPr>
           <p:cNvSpPr>
-            <a:spLocks xmlns:a="http://schemas.openxmlformats.org/drawingml/2006/main" noGrp="1"/>
-          </p:cNvSpPr>
-          <p:nvPr/>
-        </p:nvSpPr>
-        <p:spPr>
-          <a:xfrm xmlns:a="http://schemas.openxmlformats.org/drawingml/2006/main">
+            <a:spLocks noGrp="1"/>
+          </p:cNvSpPr>
+          <p:nvPr/>
+        </p:nvSpPr>
+        <p:spPr>
+          <a:xfrm>
             <a:off x="1466850" y="3028950"/>
             <a:ext cx="9620250" cy="457200"/>
           </a:xfrm>
-          <a:prstGeom xmlns:a="http://schemas.openxmlformats.org/drawingml/2006/main" prst="rect">
-            <a:avLst/>
-          </a:prstGeom>
-          <a:noFill xmlns:a="http://schemas.openxmlformats.org/drawingml/2006/main"/>
-          <a:ln xmlns:a="http://schemas.openxmlformats.org/drawingml/2006/main" w="0">
+          <a:prstGeom prst="rect">
+            <a:avLst/>
+          </a:prstGeom>
+          <a:noFill/>
+          <a:ln w="0">
             <a:noFill/>
           </a:ln>
         </p:spPr>
         <p:txBody>
-          <a:bodyPr xmlns:a="http://schemas.openxmlformats.org/drawingml/2006/main">
+          <a:bodyPr>
             <a:noAutofit/>
           </a:bodyPr>
-          <a:lstStyle xmlns:a="http://schemas.openxmlformats.org/drawingml/2006/main"/>
-          <a:p xmlns:a="http://schemas.openxmlformats.org/drawingml/2006/main">
+          <a:lstStyle/>
+          <a:p>
             <a:pPr>
               <a:defRPr sz="1875" b="0">
                 <a:solidFill>
@@ -2658,37 +2451,37 @@
       </p:sp>
       <p:sp>
         <p:nvSpPr>
-          <p:cNvPr id="9" name="">
-            <a:extLst xmlns:a="http://schemas.openxmlformats.org/drawingml/2006/main">
+          <p:cNvPr id="9" name="Rectangle 8">
+            <a:extLst>
               <a:ext uri="{FF2B5EF4-FFF2-40B4-BE49-F238E27FC236}">
                 <a16:creationId xmlns:a16="http://schemas.microsoft.com/office/drawing/2014/main" id="{5F9CFACF-D445-4E2E-B7B1-B02A24E597D2}"/>
               </a:ext>
             </a:extLst>
           </p:cNvPr>
           <p:cNvSpPr>
-            <a:spLocks xmlns:a="http://schemas.openxmlformats.org/drawingml/2006/main" noGrp="1"/>
-          </p:cNvSpPr>
-          <p:nvPr/>
-        </p:nvSpPr>
-        <p:spPr>
-          <a:xfrm xmlns:a="http://schemas.openxmlformats.org/drawingml/2006/main">
+            <a:spLocks noGrp="1"/>
+          </p:cNvSpPr>
+          <p:nvPr/>
+        </p:nvSpPr>
+        <p:spPr>
+          <a:xfrm>
             <a:off x="609600" y="3619500"/>
             <a:ext cx="666750" cy="523875"/>
           </a:xfrm>
-          <a:prstGeom xmlns:a="http://schemas.openxmlformats.org/drawingml/2006/main" prst="rect">
-            <a:avLst/>
-          </a:prstGeom>
-          <a:noFill xmlns:a="http://schemas.openxmlformats.org/drawingml/2006/main"/>
-          <a:ln xmlns:a="http://schemas.openxmlformats.org/drawingml/2006/main" w="0">
+          <a:prstGeom prst="rect">
+            <a:avLst/>
+          </a:prstGeom>
+          <a:noFill/>
+          <a:ln w="0">
             <a:noFill/>
           </a:ln>
         </p:spPr>
         <p:txBody>
-          <a:bodyPr xmlns:a="http://schemas.openxmlformats.org/drawingml/2006/main">
+          <a:bodyPr>
             <a:noAutofit/>
           </a:bodyPr>
-          <a:lstStyle xmlns:a="http://schemas.openxmlformats.org/drawingml/2006/main"/>
-          <a:p xmlns:a="http://schemas.openxmlformats.org/drawingml/2006/main">
+          <a:lstStyle/>
+          <a:p>
             <a:pPr>
               <a:defRPr sz="2925" b="1">
                 <a:solidFill>
@@ -2715,37 +2508,37 @@
       </p:sp>
       <p:sp>
         <p:nvSpPr>
-          <p:cNvPr id="10" name="">
-            <a:extLst xmlns:a="http://schemas.openxmlformats.org/drawingml/2006/main">
+          <p:cNvPr id="10" name="Rectangle 9">
+            <a:extLst>
               <a:ext uri="{FF2B5EF4-FFF2-40B4-BE49-F238E27FC236}">
                 <a16:creationId xmlns:a16="http://schemas.microsoft.com/office/drawing/2014/main" id="{E97C1399-AA0E-44C0-85F5-49CD917E0E6F}"/>
               </a:ext>
             </a:extLst>
           </p:cNvPr>
           <p:cNvSpPr>
-            <a:spLocks xmlns:a="http://schemas.openxmlformats.org/drawingml/2006/main" noGrp="1"/>
-          </p:cNvSpPr>
-          <p:nvPr/>
-        </p:nvSpPr>
-        <p:spPr>
-          <a:xfrm xmlns:a="http://schemas.openxmlformats.org/drawingml/2006/main">
+            <a:spLocks noGrp="1"/>
+          </p:cNvSpPr>
+          <p:nvPr/>
+        </p:nvSpPr>
+        <p:spPr>
+          <a:xfrm>
             <a:off x="1466850" y="3619500"/>
             <a:ext cx="4286250" cy="457200"/>
           </a:xfrm>
-          <a:prstGeom xmlns:a="http://schemas.openxmlformats.org/drawingml/2006/main" prst="rect">
-            <a:avLst/>
-          </a:prstGeom>
-          <a:noFill xmlns:a="http://schemas.openxmlformats.org/drawingml/2006/main"/>
-          <a:ln xmlns:a="http://schemas.openxmlformats.org/drawingml/2006/main" w="0">
+          <a:prstGeom prst="rect">
+            <a:avLst/>
+          </a:prstGeom>
+          <a:noFill/>
+          <a:ln w="0">
             <a:noFill/>
           </a:ln>
         </p:spPr>
         <p:txBody>
-          <a:bodyPr xmlns:a="http://schemas.openxmlformats.org/drawingml/2006/main">
+          <a:bodyPr>
             <a:noAutofit/>
           </a:bodyPr>
-          <a:lstStyle xmlns:a="http://schemas.openxmlformats.org/drawingml/2006/main"/>
-          <a:p xmlns:a="http://schemas.openxmlformats.org/drawingml/2006/main">
+          <a:lstStyle/>
+          <a:p>
             <a:pPr>
               <a:defRPr sz="2175" b="1">
                 <a:solidFill>
@@ -2772,37 +2565,37 @@
       </p:sp>
       <p:sp>
         <p:nvSpPr>
-          <p:cNvPr id="11" name="">
-            <a:extLst xmlns:a="http://schemas.openxmlformats.org/drawingml/2006/main">
+          <p:cNvPr id="11" name="Rectangle 10">
+            <a:extLst>
               <a:ext uri="{FF2B5EF4-FFF2-40B4-BE49-F238E27FC236}">
                 <a16:creationId xmlns:a16="http://schemas.microsoft.com/office/drawing/2014/main" id="{3ACE9503-9C91-4AE4-8F2E-EA959FB41D72}"/>
               </a:ext>
             </a:extLst>
           </p:cNvPr>
           <p:cNvSpPr>
-            <a:spLocks xmlns:a="http://schemas.openxmlformats.org/drawingml/2006/main" noGrp="1"/>
-          </p:cNvSpPr>
-          <p:nvPr/>
-        </p:nvSpPr>
-        <p:spPr>
-          <a:xfrm xmlns:a="http://schemas.openxmlformats.org/drawingml/2006/main">
+            <a:spLocks noGrp="1"/>
+          </p:cNvSpPr>
+          <p:nvPr/>
+        </p:nvSpPr>
+        <p:spPr>
+          <a:xfrm>
             <a:off x="1466850" y="4076700"/>
             <a:ext cx="9620250" cy="457200"/>
           </a:xfrm>
-          <a:prstGeom xmlns:a="http://schemas.openxmlformats.org/drawingml/2006/main" prst="rect">
-            <a:avLst/>
-          </a:prstGeom>
-          <a:noFill xmlns:a="http://schemas.openxmlformats.org/drawingml/2006/main"/>
-          <a:ln xmlns:a="http://schemas.openxmlformats.org/drawingml/2006/main" w="0">
+          <a:prstGeom prst="rect">
+            <a:avLst/>
+          </a:prstGeom>
+          <a:noFill/>
+          <a:ln w="0">
             <a:noFill/>
           </a:ln>
         </p:spPr>
         <p:txBody>
-          <a:bodyPr xmlns:a="http://schemas.openxmlformats.org/drawingml/2006/main">
+          <a:bodyPr>
             <a:noAutofit/>
           </a:bodyPr>
-          <a:lstStyle xmlns:a="http://schemas.openxmlformats.org/drawingml/2006/main"/>
-          <a:p xmlns:a="http://schemas.openxmlformats.org/drawingml/2006/main">
+          <a:lstStyle/>
+          <a:p>
             <a:pPr>
               <a:defRPr sz="1875" b="0">
                 <a:solidFill>
@@ -2829,37 +2622,37 @@
       </p:sp>
       <p:sp>
         <p:nvSpPr>
-          <p:cNvPr id="12" name="">
-            <a:extLst xmlns:a="http://schemas.openxmlformats.org/drawingml/2006/main">
+          <p:cNvPr id="12" name="Rectangle 11">
+            <a:extLst>
               <a:ext uri="{FF2B5EF4-FFF2-40B4-BE49-F238E27FC236}">
                 <a16:creationId xmlns:a16="http://schemas.microsoft.com/office/drawing/2014/main" id="{14A9B9E9-62E4-4237-AC2C-EB440953CEEC}"/>
               </a:ext>
             </a:extLst>
           </p:cNvPr>
           <p:cNvSpPr>
-            <a:spLocks xmlns:a="http://schemas.openxmlformats.org/drawingml/2006/main" noGrp="1"/>
-          </p:cNvSpPr>
-          <p:nvPr/>
-        </p:nvSpPr>
-        <p:spPr>
-          <a:xfrm xmlns:a="http://schemas.openxmlformats.org/drawingml/2006/main">
+            <a:spLocks noGrp="1"/>
+          </p:cNvSpPr>
+          <p:nvPr/>
+        </p:nvSpPr>
+        <p:spPr>
+          <a:xfrm>
             <a:off x="609600" y="4667250"/>
             <a:ext cx="666750" cy="523875"/>
           </a:xfrm>
-          <a:prstGeom xmlns:a="http://schemas.openxmlformats.org/drawingml/2006/main" prst="rect">
-            <a:avLst/>
-          </a:prstGeom>
-          <a:noFill xmlns:a="http://schemas.openxmlformats.org/drawingml/2006/main"/>
-          <a:ln xmlns:a="http://schemas.openxmlformats.org/drawingml/2006/main" w="0">
+          <a:prstGeom prst="rect">
+            <a:avLst/>
+          </a:prstGeom>
+          <a:noFill/>
+          <a:ln w="0">
             <a:noFill/>
           </a:ln>
         </p:spPr>
         <p:txBody>
-          <a:bodyPr xmlns:a="http://schemas.openxmlformats.org/drawingml/2006/main">
+          <a:bodyPr>
             <a:noAutofit/>
           </a:bodyPr>
-          <a:lstStyle xmlns:a="http://schemas.openxmlformats.org/drawingml/2006/main"/>
-          <a:p xmlns:a="http://schemas.openxmlformats.org/drawingml/2006/main">
+          <a:lstStyle/>
+          <a:p>
             <a:pPr>
               <a:defRPr sz="2925" b="1">
                 <a:solidFill>
@@ -2886,37 +2679,37 @@
       </p:sp>
       <p:sp>
         <p:nvSpPr>
-          <p:cNvPr id="13" name="">
-            <a:extLst xmlns:a="http://schemas.openxmlformats.org/drawingml/2006/main">
+          <p:cNvPr id="13" name="Rectangle 12">
+            <a:extLst>
               <a:ext uri="{FF2B5EF4-FFF2-40B4-BE49-F238E27FC236}">
                 <a16:creationId xmlns:a16="http://schemas.microsoft.com/office/drawing/2014/main" id="{55C9C11F-4FE3-4733-AC8B-E6C178E5A9EE}"/>
               </a:ext>
             </a:extLst>
           </p:cNvPr>
           <p:cNvSpPr>
-            <a:spLocks xmlns:a="http://schemas.openxmlformats.org/drawingml/2006/main" noGrp="1"/>
-          </p:cNvSpPr>
-          <p:nvPr/>
-        </p:nvSpPr>
-        <p:spPr>
-          <a:xfrm xmlns:a="http://schemas.openxmlformats.org/drawingml/2006/main">
+            <a:spLocks noGrp="1"/>
+          </p:cNvSpPr>
+          <p:nvPr/>
+        </p:nvSpPr>
+        <p:spPr>
+          <a:xfrm>
             <a:off x="1466850" y="4667250"/>
             <a:ext cx="4286250" cy="457200"/>
           </a:xfrm>
-          <a:prstGeom xmlns:a="http://schemas.openxmlformats.org/drawingml/2006/main" prst="rect">
-            <a:avLst/>
-          </a:prstGeom>
-          <a:noFill xmlns:a="http://schemas.openxmlformats.org/drawingml/2006/main"/>
-          <a:ln xmlns:a="http://schemas.openxmlformats.org/drawingml/2006/main" w="0">
+          <a:prstGeom prst="rect">
+            <a:avLst/>
+          </a:prstGeom>
+          <a:noFill/>
+          <a:ln w="0">
             <a:noFill/>
           </a:ln>
         </p:spPr>
         <p:txBody>
-          <a:bodyPr xmlns:a="http://schemas.openxmlformats.org/drawingml/2006/main">
+          <a:bodyPr>
             <a:noAutofit/>
           </a:bodyPr>
-          <a:lstStyle xmlns:a="http://schemas.openxmlformats.org/drawingml/2006/main"/>
-          <a:p xmlns:a="http://schemas.openxmlformats.org/drawingml/2006/main">
+          <a:lstStyle/>
+          <a:p>
             <a:pPr>
               <a:defRPr sz="2175" b="1">
                 <a:solidFill>
@@ -2943,37 +2736,37 @@
       </p:sp>
       <p:sp>
         <p:nvSpPr>
-          <p:cNvPr id="14" name="">
-            <a:extLst xmlns:a="http://schemas.openxmlformats.org/drawingml/2006/main">
+          <p:cNvPr id="14" name="Rectangle 13">
+            <a:extLst>
               <a:ext uri="{FF2B5EF4-FFF2-40B4-BE49-F238E27FC236}">
                 <a16:creationId xmlns:a16="http://schemas.microsoft.com/office/drawing/2014/main" id="{B0697E6F-1CD9-41D3-AA7C-CD67BA9365FB}"/>
               </a:ext>
             </a:extLst>
           </p:cNvPr>
           <p:cNvSpPr>
-            <a:spLocks xmlns:a="http://schemas.openxmlformats.org/drawingml/2006/main" noGrp="1"/>
-          </p:cNvSpPr>
-          <p:nvPr/>
-        </p:nvSpPr>
-        <p:spPr>
-          <a:xfrm xmlns:a="http://schemas.openxmlformats.org/drawingml/2006/main">
+            <a:spLocks noGrp="1"/>
+          </p:cNvSpPr>
+          <p:nvPr/>
+        </p:nvSpPr>
+        <p:spPr>
+          <a:xfrm>
             <a:off x="1466850" y="5124450"/>
             <a:ext cx="9620250" cy="457200"/>
           </a:xfrm>
-          <a:prstGeom xmlns:a="http://schemas.openxmlformats.org/drawingml/2006/main" prst="rect">
-            <a:avLst/>
-          </a:prstGeom>
-          <a:noFill xmlns:a="http://schemas.openxmlformats.org/drawingml/2006/main"/>
-          <a:ln xmlns:a="http://schemas.openxmlformats.org/drawingml/2006/main" w="0">
+          <a:prstGeom prst="rect">
+            <a:avLst/>
+          </a:prstGeom>
+          <a:noFill/>
+          <a:ln w="0">
             <a:noFill/>
           </a:ln>
         </p:spPr>
         <p:txBody>
-          <a:bodyPr xmlns:a="http://schemas.openxmlformats.org/drawingml/2006/main">
+          <a:bodyPr>
             <a:noAutofit/>
           </a:bodyPr>
-          <a:lstStyle xmlns:a="http://schemas.openxmlformats.org/drawingml/2006/main"/>
-          <a:p xmlns:a="http://schemas.openxmlformats.org/drawingml/2006/main">
+          <a:lstStyle/>
+          <a:p>
             <a:pPr>
               <a:defRPr sz="1875" b="0">
                 <a:solidFill>
@@ -3000,37 +2793,37 @@
       </p:sp>
       <p:sp>
         <p:nvSpPr>
-          <p:cNvPr id="15" name="">
-            <a:extLst xmlns:a="http://schemas.openxmlformats.org/drawingml/2006/main">
+          <p:cNvPr id="15" name="Rectangle 14">
+            <a:extLst>
               <a:ext uri="{FF2B5EF4-FFF2-40B4-BE49-F238E27FC236}">
                 <a16:creationId xmlns:a16="http://schemas.microsoft.com/office/drawing/2014/main" id="{D9BE8FF7-76ED-4858-92BF-9A111C2B89FE}"/>
               </a:ext>
             </a:extLst>
           </p:cNvPr>
           <p:cNvSpPr>
-            <a:spLocks xmlns:a="http://schemas.openxmlformats.org/drawingml/2006/main" noGrp="1"/>
-          </p:cNvSpPr>
-          <p:nvPr/>
-        </p:nvSpPr>
-        <p:spPr>
-          <a:xfrm xmlns:a="http://schemas.openxmlformats.org/drawingml/2006/main">
+            <a:spLocks noGrp="1"/>
+          </p:cNvSpPr>
+          <p:nvPr/>
+        </p:nvSpPr>
+        <p:spPr>
+          <a:xfrm>
             <a:off x="609600" y="6000750"/>
             <a:ext cx="10668000" cy="342900"/>
           </a:xfrm>
-          <a:prstGeom xmlns:a="http://schemas.openxmlformats.org/drawingml/2006/main" prst="rect">
-            <a:avLst/>
-          </a:prstGeom>
-          <a:noFill xmlns:a="http://schemas.openxmlformats.org/drawingml/2006/main"/>
-          <a:ln xmlns:a="http://schemas.openxmlformats.org/drawingml/2006/main" w="0">
+          <a:prstGeom prst="rect">
+            <a:avLst/>
+          </a:prstGeom>
+          <a:noFill/>
+          <a:ln w="0">
             <a:noFill/>
           </a:ln>
         </p:spPr>
         <p:txBody>
-          <a:bodyPr xmlns:a="http://schemas.openxmlformats.org/drawingml/2006/main">
+          <a:bodyPr>
             <a:noAutofit/>
           </a:bodyPr>
-          <a:lstStyle xmlns:a="http://schemas.openxmlformats.org/drawingml/2006/main"/>
-          <a:p xmlns:a="http://schemas.openxmlformats.org/drawingml/2006/main">
+          <a:lstStyle/>
+          <a:p>
             <a:pPr>
               <a:defRPr sz="1650" b="0">
                 <a:solidFill>
@@ -3062,17 +2855,21 @@
       </p:ext>
     </p:extLst>
   </p:cSld>
+  <p:clrMapOvr>
+    <a:masterClrMapping/>
+  </p:clrMapOvr>
 </p:sld>
 </file>
 
 <file path=ppt/slides/slide3.xml><?xml version="1.0" encoding="utf-8"?>
-<p:sld xmlns:p="http://schemas.openxmlformats.org/presentationml/2006/main">
+<p:sld xmlns:a="http://schemas.openxmlformats.org/drawingml/2006/main" xmlns:r="http://schemas.openxmlformats.org/officeDocument/2006/relationships" xmlns:p="http://schemas.openxmlformats.org/presentationml/2006/main">
   <p:cSld>
     <p:bg>
       <p:bgPr>
-        <a:solidFill xmlns:a="http://schemas.openxmlformats.org/drawingml/2006/main">
+        <a:solidFill>
           <a:srgbClr val="F5F4EF"/>
         </a:solidFill>
+        <a:effectLst/>
       </p:bgPr>
     </p:bg>
     <p:spTree>
@@ -3082,41 +2879,46 @@
         <p:nvPr/>
       </p:nvGrpSpPr>
       <p:grpSpPr>
-        <a:xfrm xmlns:a="http://schemas.openxmlformats.org/drawingml/2006/main"/>
+        <a:xfrm>
+          <a:off x="0" y="0"/>
+          <a:ext cx="0" cy="0"/>
+          <a:chOff x="0" y="0"/>
+          <a:chExt cx="0" cy="0"/>
+        </a:xfrm>
       </p:grpSpPr>
       <p:sp>
         <p:nvSpPr>
-          <p:cNvPr id="11" name="">
-            <a:extLst xmlns:a="http://schemas.openxmlformats.org/drawingml/2006/main">
+          <p:cNvPr id="11" name="Rectangle 10">
+            <a:extLst>
               <a:ext uri="{FF2B5EF4-FFF2-40B4-BE49-F238E27FC236}">
                 <a16:creationId xmlns:a16="http://schemas.microsoft.com/office/drawing/2014/main" id="{59343C8F-C72F-4E26-98A3-29E9CF0EEE4A}"/>
               </a:ext>
             </a:extLst>
           </p:cNvPr>
           <p:cNvSpPr>
-            <a:spLocks xmlns:a="http://schemas.openxmlformats.org/drawingml/2006/main" noGrp="1"/>
-          </p:cNvSpPr>
-          <p:nvPr/>
-        </p:nvSpPr>
-        <p:spPr>
-          <a:xfrm xmlns:a="http://schemas.openxmlformats.org/drawingml/2006/main">
+            <a:spLocks noGrp="1"/>
+          </p:cNvSpPr>
+          <p:nvPr/>
+        </p:nvSpPr>
+        <p:spPr>
+          <a:xfrm>
             <a:off x="609600" y="409575"/>
             <a:ext cx="10953750" cy="714375"/>
           </a:xfrm>
-          <a:prstGeom xmlns:a="http://schemas.openxmlformats.org/drawingml/2006/main" prst="rect">
-            <a:avLst/>
-          </a:prstGeom>
-          <a:noFill xmlns:a="http://schemas.openxmlformats.org/drawingml/2006/main"/>
-          <a:ln xmlns:a="http://schemas.openxmlformats.org/drawingml/2006/main" w="0">
+          <a:prstGeom prst="rect">
+            <a:avLst/>
+          </a:prstGeom>
+          <a:noFill/>
+          <a:ln w="0">
             <a:noFill/>
           </a:ln>
         </p:spPr>
         <p:txBody>
-          <a:bodyPr xmlns:a="http://schemas.openxmlformats.org/drawingml/2006/main">
+          <a:bodyPr>
             <a:noAutofit/>
           </a:bodyPr>
-          <a:lstStyle xmlns:a="http://schemas.openxmlformats.org/drawingml/2006/main"/>
-          <a:p xmlns:a="http://schemas.openxmlformats.org/drawingml/2006/main">
+          <a:lstStyle/>
+          <a:p>
             <a:pPr>
               <a:defRPr sz="3225" b="1">
                 <a:solidFill>
@@ -3143,37 +2945,37 @@
       </p:sp>
       <p:sp>
         <p:nvSpPr>
-          <p:cNvPr id="2" name="">
-            <a:extLst xmlns:a="http://schemas.openxmlformats.org/drawingml/2006/main">
+          <p:cNvPr id="2" name="Rectangle 1">
+            <a:extLst>
               <a:ext uri="{FF2B5EF4-FFF2-40B4-BE49-F238E27FC236}">
                 <a16:creationId xmlns:a16="http://schemas.microsoft.com/office/drawing/2014/main" id="{9C7512A1-E156-4F74-A433-F181D6C45214}"/>
               </a:ext>
             </a:extLst>
           </p:cNvPr>
           <p:cNvSpPr>
-            <a:spLocks xmlns:a="http://schemas.openxmlformats.org/drawingml/2006/main" noGrp="1"/>
-          </p:cNvSpPr>
-          <p:nvPr/>
-        </p:nvSpPr>
-        <p:spPr>
-          <a:xfrm xmlns:a="http://schemas.openxmlformats.org/drawingml/2006/main">
+            <a:spLocks noGrp="1"/>
+          </p:cNvSpPr>
+          <p:nvPr/>
+        </p:nvSpPr>
+        <p:spPr>
+          <a:xfrm>
             <a:off x="11144250" y="6324600"/>
             <a:ext cx="476250" cy="285750"/>
           </a:xfrm>
-          <a:prstGeom xmlns:a="http://schemas.openxmlformats.org/drawingml/2006/main" prst="rect">
-            <a:avLst/>
-          </a:prstGeom>
-          <a:noFill xmlns:a="http://schemas.openxmlformats.org/drawingml/2006/main"/>
-          <a:ln xmlns:a="http://schemas.openxmlformats.org/drawingml/2006/main" w="0">
+          <a:prstGeom prst="rect">
+            <a:avLst/>
+          </a:prstGeom>
+          <a:noFill/>
+          <a:ln w="0">
             <a:noFill/>
           </a:ln>
         </p:spPr>
         <p:txBody>
-          <a:bodyPr xmlns:a="http://schemas.openxmlformats.org/drawingml/2006/main">
+          <a:bodyPr>
             <a:noAutofit/>
           </a:bodyPr>
-          <a:lstStyle xmlns:a="http://schemas.openxmlformats.org/drawingml/2006/main"/>
-          <a:p xmlns:a="http://schemas.openxmlformats.org/drawingml/2006/main">
+          <a:lstStyle/>
+          <a:p>
             <a:pPr>
               <a:defRPr sz="1350" b="0">
                 <a:solidFill>
@@ -3200,59 +3002,59 @@
       </p:sp>
       <p:pic>
         <p:nvPicPr>
-          <p:cNvPr id="13" name=""/>
+          <p:cNvPr id="13" name="Image 12"/>
           <p:cNvPicPr>
-            <a:picLocks xmlns:a="http://schemas.openxmlformats.org/drawingml/2006/main" noChangeAspect="1"/>
+            <a:picLocks noChangeAspect="1"/>
           </p:cNvPicPr>
           <p:nvPr/>
         </p:nvPicPr>
         <p:blipFill>
-          <a:blip xmlns:r="http://schemas.openxmlformats.org/officeDocument/2006/relationships" xmlns:a="http://schemas.openxmlformats.org/drawingml/2006/main" r:embed="Reefc1f0573744b84"/>
-          <a:stretch xmlns:a="http://schemas.openxmlformats.org/drawingml/2006/main"/>
+          <a:blip r:embed="rId3"/>
+          <a:stretch/>
         </p:blipFill>
         <p:spPr>
-          <a:xfrm xmlns:a="http://schemas.openxmlformats.org/drawingml/2006/main">
+          <a:xfrm>
             <a:off x="803659" y="1495425"/>
             <a:ext cx="3279006" cy="4267200"/>
           </a:xfrm>
-          <a:prstGeom xmlns:a="http://schemas.openxmlformats.org/drawingml/2006/main" prst="rect">
+          <a:prstGeom prst="rect">
             <a:avLst/>
           </a:prstGeom>
         </p:spPr>
       </p:pic>
       <p:sp>
         <p:nvSpPr>
-          <p:cNvPr id="4" name="">
-            <a:extLst xmlns:a="http://schemas.openxmlformats.org/drawingml/2006/main">
+          <p:cNvPr id="4" name="Rectangle 3">
+            <a:extLst>
               <a:ext uri="{FF2B5EF4-FFF2-40B4-BE49-F238E27FC236}">
                 <a16:creationId xmlns:a16="http://schemas.microsoft.com/office/drawing/2014/main" id="{7F8B9516-A0A7-48AF-AA02-72325DBFF296}"/>
               </a:ext>
             </a:extLst>
           </p:cNvPr>
           <p:cNvSpPr>
-            <a:spLocks xmlns:a="http://schemas.openxmlformats.org/drawingml/2006/main" noGrp="1"/>
-          </p:cNvSpPr>
-          <p:nvPr/>
-        </p:nvSpPr>
-        <p:spPr>
-          <a:xfrm xmlns:a="http://schemas.openxmlformats.org/drawingml/2006/main">
+            <a:spLocks noGrp="1"/>
+          </p:cNvSpPr>
+          <p:nvPr/>
+        </p:nvSpPr>
+        <p:spPr>
+          <a:xfrm>
             <a:off x="4752975" y="1438275"/>
             <a:ext cx="6762750" cy="381000"/>
           </a:xfrm>
-          <a:prstGeom xmlns:a="http://schemas.openxmlformats.org/drawingml/2006/main" prst="rect">
-            <a:avLst/>
-          </a:prstGeom>
-          <a:noFill xmlns:a="http://schemas.openxmlformats.org/drawingml/2006/main"/>
-          <a:ln xmlns:a="http://schemas.openxmlformats.org/drawingml/2006/main" w="0">
+          <a:prstGeom prst="rect">
+            <a:avLst/>
+          </a:prstGeom>
+          <a:noFill/>
+          <a:ln w="0">
             <a:noFill/>
           </a:ln>
         </p:spPr>
         <p:txBody>
-          <a:bodyPr xmlns:a="http://schemas.openxmlformats.org/drawingml/2006/main">
+          <a:bodyPr>
             <a:noAutofit/>
           </a:bodyPr>
-          <a:lstStyle xmlns:a="http://schemas.openxmlformats.org/drawingml/2006/main"/>
-          <a:p xmlns:a="http://schemas.openxmlformats.org/drawingml/2006/main">
+          <a:lstStyle/>
+          <a:p>
             <a:pPr>
               <a:defRPr sz="1800" b="0">
                 <a:solidFill>
@@ -3279,37 +3081,37 @@
       </p:sp>
       <p:sp>
         <p:nvSpPr>
-          <p:cNvPr id="5" name="">
-            <a:extLst xmlns:a="http://schemas.openxmlformats.org/drawingml/2006/main">
+          <p:cNvPr id="5" name="Rectangle 4">
+            <a:extLst>
               <a:ext uri="{FF2B5EF4-FFF2-40B4-BE49-F238E27FC236}">
                 <a16:creationId xmlns:a16="http://schemas.microsoft.com/office/drawing/2014/main" id="{A8E82463-8164-459A-A467-8190536EA681}"/>
               </a:ext>
             </a:extLst>
           </p:cNvPr>
           <p:cNvSpPr>
-            <a:spLocks xmlns:a="http://schemas.openxmlformats.org/drawingml/2006/main" noGrp="1"/>
-          </p:cNvSpPr>
-          <p:nvPr/>
-        </p:nvSpPr>
-        <p:spPr>
-          <a:xfrm xmlns:a="http://schemas.openxmlformats.org/drawingml/2006/main">
+            <a:spLocks noGrp="1"/>
+          </p:cNvSpPr>
+          <p:nvPr/>
+        </p:nvSpPr>
+        <p:spPr>
+          <a:xfrm>
             <a:off x="4752975" y="1952625"/>
             <a:ext cx="6619875" cy="1409700"/>
           </a:xfrm>
-          <a:prstGeom xmlns:a="http://schemas.openxmlformats.org/drawingml/2006/main" prst="rect">
-            <a:avLst/>
-          </a:prstGeom>
-          <a:noFill xmlns:a="http://schemas.openxmlformats.org/drawingml/2006/main"/>
-          <a:ln xmlns:a="http://schemas.openxmlformats.org/drawingml/2006/main" w="0">
+          <a:prstGeom prst="rect">
+            <a:avLst/>
+          </a:prstGeom>
+          <a:noFill/>
+          <a:ln w="0">
             <a:noFill/>
           </a:ln>
         </p:spPr>
         <p:txBody>
-          <a:bodyPr xmlns:a="http://schemas.openxmlformats.org/drawingml/2006/main">
+          <a:bodyPr>
             <a:noAutofit/>
           </a:bodyPr>
-          <a:lstStyle xmlns:a="http://schemas.openxmlformats.org/drawingml/2006/main"/>
-          <a:p xmlns:a="http://schemas.openxmlformats.org/drawingml/2006/main">
+          <a:lstStyle/>
+          <a:p>
             <a:pPr>
               <a:defRPr sz="2325" b="1">
                 <a:solidFill>
@@ -3336,37 +3138,37 @@
       </p:sp>
       <p:sp>
         <p:nvSpPr>
-          <p:cNvPr id="6" name="">
-            <a:extLst xmlns:a="http://schemas.openxmlformats.org/drawingml/2006/main">
+          <p:cNvPr id="6" name="Rectangle 5">
+            <a:extLst>
               <a:ext uri="{FF2B5EF4-FFF2-40B4-BE49-F238E27FC236}">
                 <a16:creationId xmlns:a16="http://schemas.microsoft.com/office/drawing/2014/main" id="{2D7890BD-BBDB-44A7-9228-E205246E8691}"/>
               </a:ext>
             </a:extLst>
           </p:cNvPr>
           <p:cNvSpPr>
-            <a:spLocks xmlns:a="http://schemas.openxmlformats.org/drawingml/2006/main" noGrp="1"/>
-          </p:cNvSpPr>
-          <p:nvPr/>
-        </p:nvSpPr>
-        <p:spPr>
-          <a:xfrm xmlns:a="http://schemas.openxmlformats.org/drawingml/2006/main">
+            <a:spLocks noGrp="1"/>
+          </p:cNvSpPr>
+          <p:nvPr/>
+        </p:nvSpPr>
+        <p:spPr>
+          <a:xfrm>
             <a:off x="4752975" y="3714750"/>
             <a:ext cx="6667500" cy="438150"/>
           </a:xfrm>
-          <a:prstGeom xmlns:a="http://schemas.openxmlformats.org/drawingml/2006/main" prst="rect">
-            <a:avLst/>
-          </a:prstGeom>
-          <a:noFill xmlns:a="http://schemas.openxmlformats.org/drawingml/2006/main"/>
-          <a:ln xmlns:a="http://schemas.openxmlformats.org/drawingml/2006/main" w="0">
+          <a:prstGeom prst="rect">
+            <a:avLst/>
+          </a:prstGeom>
+          <a:noFill/>
+          <a:ln w="0">
             <a:noFill/>
           </a:ln>
         </p:spPr>
         <p:txBody>
-          <a:bodyPr xmlns:a="http://schemas.openxmlformats.org/drawingml/2006/main">
+          <a:bodyPr>
             <a:noAutofit/>
           </a:bodyPr>
-          <a:lstStyle xmlns:a="http://schemas.openxmlformats.org/drawingml/2006/main"/>
-          <a:p xmlns:a="http://schemas.openxmlformats.org/drawingml/2006/main">
+          <a:lstStyle/>
+          <a:p>
             <a:pPr>
               <a:defRPr sz="2250" b="1">
                 <a:solidFill>
@@ -3393,37 +3195,37 @@
       </p:sp>
       <p:sp>
         <p:nvSpPr>
-          <p:cNvPr id="7" name="">
-            <a:extLst xmlns:a="http://schemas.openxmlformats.org/drawingml/2006/main">
+          <p:cNvPr id="7" name="Rectangle 6">
+            <a:extLst>
               <a:ext uri="{FF2B5EF4-FFF2-40B4-BE49-F238E27FC236}">
                 <a16:creationId xmlns:a16="http://schemas.microsoft.com/office/drawing/2014/main" id="{7E7D4C20-20CD-4F28-8EE6-FE33C8EEEBD3}"/>
               </a:ext>
             </a:extLst>
           </p:cNvPr>
           <p:cNvSpPr>
-            <a:spLocks xmlns:a="http://schemas.openxmlformats.org/drawingml/2006/main" noGrp="1"/>
-          </p:cNvSpPr>
-          <p:nvPr/>
-        </p:nvSpPr>
-        <p:spPr>
-          <a:xfrm xmlns:a="http://schemas.openxmlformats.org/drawingml/2006/main">
+            <a:spLocks noGrp="1"/>
+          </p:cNvSpPr>
+          <p:nvPr/>
+        </p:nvSpPr>
+        <p:spPr>
+          <a:xfrm>
             <a:off x="4752975" y="4181475"/>
             <a:ext cx="6667500" cy="400050"/>
           </a:xfrm>
-          <a:prstGeom xmlns:a="http://schemas.openxmlformats.org/drawingml/2006/main" prst="rect">
-            <a:avLst/>
-          </a:prstGeom>
-          <a:noFill xmlns:a="http://schemas.openxmlformats.org/drawingml/2006/main"/>
-          <a:ln xmlns:a="http://schemas.openxmlformats.org/drawingml/2006/main" w="0">
+          <a:prstGeom prst="rect">
+            <a:avLst/>
+          </a:prstGeom>
+          <a:noFill/>
+          <a:ln w="0">
             <a:noFill/>
           </a:ln>
         </p:spPr>
         <p:txBody>
-          <a:bodyPr xmlns:a="http://schemas.openxmlformats.org/drawingml/2006/main">
+          <a:bodyPr>
             <a:noAutofit/>
           </a:bodyPr>
-          <a:lstStyle xmlns:a="http://schemas.openxmlformats.org/drawingml/2006/main"/>
-          <a:p xmlns:a="http://schemas.openxmlformats.org/drawingml/2006/main">
+          <a:lstStyle/>
+          <a:p>
             <a:pPr>
               <a:defRPr sz="1725" b="0">
                 <a:solidFill>
@@ -3450,37 +3252,37 @@
       </p:sp>
       <p:sp>
         <p:nvSpPr>
-          <p:cNvPr id="8" name="">
-            <a:extLst xmlns:a="http://schemas.openxmlformats.org/drawingml/2006/main">
+          <p:cNvPr id="8" name="Rectangle 7">
+            <a:extLst>
               <a:ext uri="{FF2B5EF4-FFF2-40B4-BE49-F238E27FC236}">
                 <a16:creationId xmlns:a16="http://schemas.microsoft.com/office/drawing/2014/main" id="{EA8B30F0-31F1-46E0-AE5C-E3104BBCFA2D}"/>
               </a:ext>
             </a:extLst>
           </p:cNvPr>
           <p:cNvSpPr>
-            <a:spLocks xmlns:a="http://schemas.openxmlformats.org/drawingml/2006/main" noGrp="1"/>
-          </p:cNvSpPr>
-          <p:nvPr/>
-        </p:nvSpPr>
-        <p:spPr>
-          <a:xfrm xmlns:a="http://schemas.openxmlformats.org/drawingml/2006/main">
+            <a:spLocks noGrp="1"/>
+          </p:cNvSpPr>
+          <p:nvPr/>
+        </p:nvSpPr>
+        <p:spPr>
+          <a:xfrm>
             <a:off x="4752975" y="4810125"/>
             <a:ext cx="6667500" cy="438150"/>
           </a:xfrm>
-          <a:prstGeom xmlns:a="http://schemas.openxmlformats.org/drawingml/2006/main" prst="rect">
-            <a:avLst/>
-          </a:prstGeom>
-          <a:noFill xmlns:a="http://schemas.openxmlformats.org/drawingml/2006/main"/>
-          <a:ln xmlns:a="http://schemas.openxmlformats.org/drawingml/2006/main" w="0">
+          <a:prstGeom prst="rect">
+            <a:avLst/>
+          </a:prstGeom>
+          <a:noFill/>
+          <a:ln w="0">
             <a:noFill/>
           </a:ln>
         </p:spPr>
         <p:txBody>
-          <a:bodyPr xmlns:a="http://schemas.openxmlformats.org/drawingml/2006/main">
+          <a:bodyPr>
             <a:noAutofit/>
           </a:bodyPr>
-          <a:lstStyle xmlns:a="http://schemas.openxmlformats.org/drawingml/2006/main"/>
-          <a:p xmlns:a="http://schemas.openxmlformats.org/drawingml/2006/main">
+          <a:lstStyle/>
+          <a:p>
             <a:pPr>
               <a:defRPr sz="2250" b="1">
                 <a:solidFill>
@@ -3507,37 +3309,37 @@
       </p:sp>
       <p:sp>
         <p:nvSpPr>
-          <p:cNvPr id="9" name="">
-            <a:extLst xmlns:a="http://schemas.openxmlformats.org/drawingml/2006/main">
+          <p:cNvPr id="9" name="Rectangle 8">
+            <a:extLst>
               <a:ext uri="{FF2B5EF4-FFF2-40B4-BE49-F238E27FC236}">
                 <a16:creationId xmlns:a16="http://schemas.microsoft.com/office/drawing/2014/main" id="{D4D9FFF9-F3B1-4C6B-B46F-9707F7DA2075}"/>
               </a:ext>
             </a:extLst>
           </p:cNvPr>
           <p:cNvSpPr>
-            <a:spLocks xmlns:a="http://schemas.openxmlformats.org/drawingml/2006/main" noGrp="1"/>
-          </p:cNvSpPr>
-          <p:nvPr/>
-        </p:nvSpPr>
-        <p:spPr>
-          <a:xfrm xmlns:a="http://schemas.openxmlformats.org/drawingml/2006/main">
+            <a:spLocks noGrp="1"/>
+          </p:cNvSpPr>
+          <p:nvPr/>
+        </p:nvSpPr>
+        <p:spPr>
+          <a:xfrm>
             <a:off x="4752975" y="5276850"/>
             <a:ext cx="6667500" cy="400050"/>
           </a:xfrm>
-          <a:prstGeom xmlns:a="http://schemas.openxmlformats.org/drawingml/2006/main" prst="rect">
-            <a:avLst/>
-          </a:prstGeom>
-          <a:noFill xmlns:a="http://schemas.openxmlformats.org/drawingml/2006/main"/>
-          <a:ln xmlns:a="http://schemas.openxmlformats.org/drawingml/2006/main" w="0">
+          <a:prstGeom prst="rect">
+            <a:avLst/>
+          </a:prstGeom>
+          <a:noFill/>
+          <a:ln w="0">
             <a:noFill/>
           </a:ln>
         </p:spPr>
         <p:txBody>
-          <a:bodyPr xmlns:a="http://schemas.openxmlformats.org/drawingml/2006/main">
+          <a:bodyPr>
             <a:noAutofit/>
           </a:bodyPr>
-          <a:lstStyle xmlns:a="http://schemas.openxmlformats.org/drawingml/2006/main"/>
-          <a:p xmlns:a="http://schemas.openxmlformats.org/drawingml/2006/main">
+          <a:lstStyle/>
+          <a:p>
             <a:pPr>
               <a:defRPr sz="1725" b="0">
                 <a:solidFill>
@@ -3564,37 +3366,37 @@
       </p:sp>
       <p:sp>
         <p:nvSpPr>
-          <p:cNvPr id="10" name="">
-            <a:extLst xmlns:a="http://schemas.openxmlformats.org/drawingml/2006/main">
+          <p:cNvPr id="10" name="Rectangle 9">
+            <a:extLst>
               <a:ext uri="{FF2B5EF4-FFF2-40B4-BE49-F238E27FC236}">
                 <a16:creationId xmlns:a16="http://schemas.microsoft.com/office/drawing/2014/main" id="{FF9E7BB0-FA91-4AED-9E53-92FB47A31E2D}"/>
               </a:ext>
             </a:extLst>
           </p:cNvPr>
           <p:cNvSpPr>
-            <a:spLocks xmlns:a="http://schemas.openxmlformats.org/drawingml/2006/main" noGrp="1"/>
-          </p:cNvSpPr>
-          <p:nvPr/>
-        </p:nvSpPr>
-        <p:spPr>
-          <a:xfrm xmlns:a="http://schemas.openxmlformats.org/drawingml/2006/main">
+            <a:spLocks noGrp="1"/>
+          </p:cNvSpPr>
+          <p:nvPr/>
+        </p:nvSpPr>
+        <p:spPr>
+          <a:xfrm>
             <a:off x="609600" y="6000750"/>
             <a:ext cx="10763250" cy="333375"/>
           </a:xfrm>
-          <a:prstGeom xmlns:a="http://schemas.openxmlformats.org/drawingml/2006/main" prst="rect">
-            <a:avLst/>
-          </a:prstGeom>
-          <a:noFill xmlns:a="http://schemas.openxmlformats.org/drawingml/2006/main"/>
-          <a:ln xmlns:a="http://schemas.openxmlformats.org/drawingml/2006/main" w="0">
+          <a:prstGeom prst="rect">
+            <a:avLst/>
+          </a:prstGeom>
+          <a:noFill/>
+          <a:ln w="0">
             <a:noFill/>
           </a:ln>
         </p:spPr>
         <p:txBody>
-          <a:bodyPr xmlns:a="http://schemas.openxmlformats.org/drawingml/2006/main">
+          <a:bodyPr>
             <a:noAutofit/>
           </a:bodyPr>
-          <a:lstStyle xmlns:a="http://schemas.openxmlformats.org/drawingml/2006/main"/>
-          <a:p xmlns:a="http://schemas.openxmlformats.org/drawingml/2006/main">
+          <a:lstStyle/>
+          <a:p>
             <a:pPr>
               <a:defRPr sz="1575" b="0">
                 <a:solidFill>
@@ -3626,17 +3428,21 @@
       </p:ext>
     </p:extLst>
   </p:cSld>
+  <p:clrMapOvr>
+    <a:masterClrMapping/>
+  </p:clrMapOvr>
 </p:sld>
 </file>
 
 <file path=ppt/slides/slide4.xml><?xml version="1.0" encoding="utf-8"?>
-<p:sld xmlns:p="http://schemas.openxmlformats.org/presentationml/2006/main">
+<p:sld xmlns:a="http://schemas.openxmlformats.org/drawingml/2006/main" xmlns:r="http://schemas.openxmlformats.org/officeDocument/2006/relationships" xmlns:p="http://schemas.openxmlformats.org/presentationml/2006/main">
   <p:cSld>
     <p:bg>
       <p:bgPr>
-        <a:solidFill xmlns:a="http://schemas.openxmlformats.org/drawingml/2006/main">
+        <a:solidFill>
           <a:srgbClr val="F5F4EF"/>
         </a:solidFill>
+        <a:effectLst/>
       </p:bgPr>
     </p:bg>
     <p:spTree>
@@ -3646,41 +3452,46 @@
         <p:nvPr/>
       </p:nvGrpSpPr>
       <p:grpSpPr>
-        <a:xfrm xmlns:a="http://schemas.openxmlformats.org/drawingml/2006/main"/>
+        <a:xfrm>
+          <a:off x="0" y="0"/>
+          <a:ext cx="0" cy="0"/>
+          <a:chOff x="0" y="0"/>
+          <a:chExt cx="0" cy="0"/>
+        </a:xfrm>
       </p:grpSpPr>
       <p:sp>
         <p:nvSpPr>
-          <p:cNvPr id="10" name="">
-            <a:extLst xmlns:a="http://schemas.openxmlformats.org/drawingml/2006/main">
+          <p:cNvPr id="10" name="Rectangle 9">
+            <a:extLst>
               <a:ext uri="{FF2B5EF4-FFF2-40B4-BE49-F238E27FC236}">
                 <a16:creationId xmlns:a16="http://schemas.microsoft.com/office/drawing/2014/main" id="{513CDD1D-DFF0-4CDA-B318-74930B76E136}"/>
               </a:ext>
             </a:extLst>
           </p:cNvPr>
           <p:cNvSpPr>
-            <a:spLocks xmlns:a="http://schemas.openxmlformats.org/drawingml/2006/main" noGrp="1"/>
-          </p:cNvSpPr>
-          <p:nvPr/>
-        </p:nvSpPr>
-        <p:spPr>
-          <a:xfrm xmlns:a="http://schemas.openxmlformats.org/drawingml/2006/main">
+            <a:spLocks noGrp="1"/>
+          </p:cNvSpPr>
+          <p:nvPr/>
+        </p:nvSpPr>
+        <p:spPr>
+          <a:xfrm>
             <a:off x="609600" y="409575"/>
             <a:ext cx="10953750" cy="714375"/>
           </a:xfrm>
-          <a:prstGeom xmlns:a="http://schemas.openxmlformats.org/drawingml/2006/main" prst="rect">
-            <a:avLst/>
-          </a:prstGeom>
-          <a:noFill xmlns:a="http://schemas.openxmlformats.org/drawingml/2006/main"/>
-          <a:ln xmlns:a="http://schemas.openxmlformats.org/drawingml/2006/main" w="0">
+          <a:prstGeom prst="rect">
+            <a:avLst/>
+          </a:prstGeom>
+          <a:noFill/>
+          <a:ln w="0">
             <a:noFill/>
           </a:ln>
         </p:spPr>
         <p:txBody>
-          <a:bodyPr xmlns:a="http://schemas.openxmlformats.org/drawingml/2006/main">
+          <a:bodyPr>
             <a:noAutofit/>
           </a:bodyPr>
-          <a:lstStyle xmlns:a="http://schemas.openxmlformats.org/drawingml/2006/main"/>
-          <a:p xmlns:a="http://schemas.openxmlformats.org/drawingml/2006/main">
+          <a:lstStyle/>
+          <a:p>
             <a:pPr>
               <a:defRPr sz="3225" b="1">
                 <a:solidFill>
@@ -3707,37 +3518,37 @@
       </p:sp>
       <p:sp>
         <p:nvSpPr>
-          <p:cNvPr id="2" name="">
-            <a:extLst xmlns:a="http://schemas.openxmlformats.org/drawingml/2006/main">
+          <p:cNvPr id="2" name="Rectangle 1">
+            <a:extLst>
               <a:ext uri="{FF2B5EF4-FFF2-40B4-BE49-F238E27FC236}">
                 <a16:creationId xmlns:a16="http://schemas.microsoft.com/office/drawing/2014/main" id="{A85C8F2D-C6E1-4DC9-9E03-CFF45966A424}"/>
               </a:ext>
             </a:extLst>
           </p:cNvPr>
           <p:cNvSpPr>
-            <a:spLocks xmlns:a="http://schemas.openxmlformats.org/drawingml/2006/main" noGrp="1"/>
-          </p:cNvSpPr>
-          <p:nvPr/>
-        </p:nvSpPr>
-        <p:spPr>
-          <a:xfrm xmlns:a="http://schemas.openxmlformats.org/drawingml/2006/main">
+            <a:spLocks noGrp="1"/>
+          </p:cNvSpPr>
+          <p:nvPr/>
+        </p:nvSpPr>
+        <p:spPr>
+          <a:xfrm>
             <a:off x="11144250" y="6324600"/>
             <a:ext cx="476250" cy="285750"/>
           </a:xfrm>
-          <a:prstGeom xmlns:a="http://schemas.openxmlformats.org/drawingml/2006/main" prst="rect">
-            <a:avLst/>
-          </a:prstGeom>
-          <a:noFill xmlns:a="http://schemas.openxmlformats.org/drawingml/2006/main"/>
-          <a:ln xmlns:a="http://schemas.openxmlformats.org/drawingml/2006/main" w="0">
+          <a:prstGeom prst="rect">
+            <a:avLst/>
+          </a:prstGeom>
+          <a:noFill/>
+          <a:ln w="0">
             <a:noFill/>
           </a:ln>
         </p:spPr>
         <p:txBody>
-          <a:bodyPr xmlns:a="http://schemas.openxmlformats.org/drawingml/2006/main">
+          <a:bodyPr>
             <a:noAutofit/>
           </a:bodyPr>
-          <a:lstStyle xmlns:a="http://schemas.openxmlformats.org/drawingml/2006/main"/>
-          <a:p xmlns:a="http://schemas.openxmlformats.org/drawingml/2006/main">
+          <a:lstStyle/>
+          <a:p>
             <a:pPr>
               <a:defRPr sz="1350" b="0">
                 <a:solidFill>
@@ -3764,37 +3575,37 @@
       </p:sp>
       <p:sp>
         <p:nvSpPr>
-          <p:cNvPr id="3" name="">
-            <a:extLst xmlns:a="http://schemas.openxmlformats.org/drawingml/2006/main">
+          <p:cNvPr id="3" name="Rectangle 2">
+            <a:extLst>
               <a:ext uri="{FF2B5EF4-FFF2-40B4-BE49-F238E27FC236}">
                 <a16:creationId xmlns:a16="http://schemas.microsoft.com/office/drawing/2014/main" id="{8AB64388-7E9E-4D82-BB03-4D42E09F0299}"/>
               </a:ext>
             </a:extLst>
           </p:cNvPr>
           <p:cNvSpPr>
-            <a:spLocks xmlns:a="http://schemas.openxmlformats.org/drawingml/2006/main" noGrp="1"/>
-          </p:cNvSpPr>
-          <p:nvPr/>
-        </p:nvSpPr>
-        <p:spPr>
-          <a:xfrm xmlns:a="http://schemas.openxmlformats.org/drawingml/2006/main">
+            <a:spLocks noGrp="1"/>
+          </p:cNvSpPr>
+          <p:nvPr/>
+        </p:nvSpPr>
+        <p:spPr>
+          <a:xfrm>
             <a:off x="609600" y="1390650"/>
             <a:ext cx="6715125" cy="409575"/>
           </a:xfrm>
-          <a:prstGeom xmlns:a="http://schemas.openxmlformats.org/drawingml/2006/main" prst="rect">
-            <a:avLst/>
-          </a:prstGeom>
-          <a:noFill xmlns:a="http://schemas.openxmlformats.org/drawingml/2006/main"/>
-          <a:ln xmlns:a="http://schemas.openxmlformats.org/drawingml/2006/main" w="0">
+          <a:prstGeom prst="rect">
+            <a:avLst/>
+          </a:prstGeom>
+          <a:noFill/>
+          <a:ln w="0">
             <a:noFill/>
           </a:ln>
         </p:spPr>
         <p:txBody>
-          <a:bodyPr xmlns:a="http://schemas.openxmlformats.org/drawingml/2006/main">
+          <a:bodyPr>
             <a:noAutofit/>
           </a:bodyPr>
-          <a:lstStyle xmlns:a="http://schemas.openxmlformats.org/drawingml/2006/main"/>
-          <a:p xmlns:a="http://schemas.openxmlformats.org/drawingml/2006/main">
+          <a:lstStyle/>
+          <a:p>
             <a:pPr>
               <a:defRPr sz="1950" b="1">
                 <a:solidFill>
@@ -3826,48 +3637,48 @@
           <p:nvPr/>
         </p:nvGraphicFramePr>
         <p:xfrm>
-          <a:off xmlns:a="http://schemas.openxmlformats.org/drawingml/2006/main" x="552450" y="1990725"/>
-          <a:ext xmlns:a="http://schemas.openxmlformats.org/drawingml/2006/main" cx="6858000" cy="3705225"/>
+          <a:off x="552450" y="1990725"/>
+          <a:ext cx="6858000" cy="3705225"/>
         </p:xfrm>
-        <a:graphic xmlns:a="http://schemas.openxmlformats.org/drawingml/2006/main">
+        <a:graphic>
           <a:graphicData uri="http://schemas.openxmlformats.org/drawingml/2006/chart">
-            <c:chart xmlns:r="http://schemas.openxmlformats.org/officeDocument/2006/relationships" xmlns:c="http://schemas.openxmlformats.org/drawingml/2006/chart" r:id="Rd9d7ee664a4f4304"/>
+            <c:chart xmlns:c="http://schemas.openxmlformats.org/drawingml/2006/chart" xmlns:r="http://schemas.openxmlformats.org/officeDocument/2006/relationships" r:id="rId3"/>
           </a:graphicData>
         </a:graphic>
       </p:graphicFrame>
       <p:sp>
         <p:nvSpPr>
-          <p:cNvPr id="5" name="">
-            <a:extLst xmlns:a="http://schemas.openxmlformats.org/drawingml/2006/main">
+          <p:cNvPr id="5" name="Rectangle 4">
+            <a:extLst>
               <a:ext uri="{FF2B5EF4-FFF2-40B4-BE49-F238E27FC236}">
                 <a16:creationId xmlns:a16="http://schemas.microsoft.com/office/drawing/2014/main" id="{EBEAD060-EE55-4496-B13D-FADDFCC87683}"/>
               </a:ext>
             </a:extLst>
           </p:cNvPr>
           <p:cNvSpPr>
-            <a:spLocks xmlns:a="http://schemas.openxmlformats.org/drawingml/2006/main" noGrp="1"/>
-          </p:cNvSpPr>
-          <p:nvPr/>
-        </p:nvSpPr>
-        <p:spPr>
-          <a:xfrm xmlns:a="http://schemas.openxmlformats.org/drawingml/2006/main">
+            <a:spLocks noGrp="1"/>
+          </p:cNvSpPr>
+          <p:nvPr/>
+        </p:nvSpPr>
+        <p:spPr>
+          <a:xfrm>
             <a:off x="7924800" y="1952625"/>
             <a:ext cx="3333750" cy="790575"/>
           </a:xfrm>
-          <a:prstGeom xmlns:a="http://schemas.openxmlformats.org/drawingml/2006/main" prst="rect">
-            <a:avLst/>
-          </a:prstGeom>
-          <a:noFill xmlns:a="http://schemas.openxmlformats.org/drawingml/2006/main"/>
-          <a:ln xmlns:a="http://schemas.openxmlformats.org/drawingml/2006/main" w="0">
+          <a:prstGeom prst="rect">
+            <a:avLst/>
+          </a:prstGeom>
+          <a:noFill/>
+          <a:ln w="0">
             <a:noFill/>
           </a:ln>
         </p:spPr>
         <p:txBody>
-          <a:bodyPr xmlns:a="http://schemas.openxmlformats.org/drawingml/2006/main">
+          <a:bodyPr>
             <a:noAutofit/>
           </a:bodyPr>
-          <a:lstStyle xmlns:a="http://schemas.openxmlformats.org/drawingml/2006/main"/>
-          <a:p xmlns:a="http://schemas.openxmlformats.org/drawingml/2006/main">
+          <a:lstStyle/>
+          <a:p>
             <a:pPr>
               <a:defRPr sz="4500" b="1">
                 <a:solidFill>
@@ -3894,37 +3705,37 @@
       </p:sp>
       <p:sp>
         <p:nvSpPr>
-          <p:cNvPr id="6" name="">
-            <a:extLst xmlns:a="http://schemas.openxmlformats.org/drawingml/2006/main">
+          <p:cNvPr id="6" name="Rectangle 5">
+            <a:extLst>
               <a:ext uri="{FF2B5EF4-FFF2-40B4-BE49-F238E27FC236}">
                 <a16:creationId xmlns:a16="http://schemas.microsoft.com/office/drawing/2014/main" id="{F8993B5B-F894-4BB0-95EE-611233AB2433}"/>
               </a:ext>
             </a:extLst>
           </p:cNvPr>
           <p:cNvSpPr>
-            <a:spLocks xmlns:a="http://schemas.openxmlformats.org/drawingml/2006/main" noGrp="1"/>
-          </p:cNvSpPr>
-          <p:nvPr/>
-        </p:nvSpPr>
-        <p:spPr>
-          <a:xfrm xmlns:a="http://schemas.openxmlformats.org/drawingml/2006/main">
+            <a:spLocks noGrp="1"/>
+          </p:cNvSpPr>
+          <p:nvPr/>
+        </p:nvSpPr>
+        <p:spPr>
+          <a:xfrm>
             <a:off x="7924800" y="2809875"/>
             <a:ext cx="3409950" cy="1085850"/>
           </a:xfrm>
-          <a:prstGeom xmlns:a="http://schemas.openxmlformats.org/drawingml/2006/main" prst="rect">
-            <a:avLst/>
-          </a:prstGeom>
-          <a:noFill xmlns:a="http://schemas.openxmlformats.org/drawingml/2006/main"/>
-          <a:ln xmlns:a="http://schemas.openxmlformats.org/drawingml/2006/main" w="0">
+          <a:prstGeom prst="rect">
+            <a:avLst/>
+          </a:prstGeom>
+          <a:noFill/>
+          <a:ln w="0">
             <a:noFill/>
           </a:ln>
         </p:spPr>
         <p:txBody>
-          <a:bodyPr xmlns:a="http://schemas.openxmlformats.org/drawingml/2006/main">
+          <a:bodyPr>
             <a:noAutofit/>
           </a:bodyPr>
-          <a:lstStyle xmlns:a="http://schemas.openxmlformats.org/drawingml/2006/main"/>
-          <a:p xmlns:a="http://schemas.openxmlformats.org/drawingml/2006/main">
+          <a:lstStyle/>
+          <a:p>
             <a:pPr>
               <a:defRPr sz="1875" b="0">
                 <a:solidFill>
@@ -3947,7 +3758,7 @@
               <a:t>of damage is parking</a:t>
             </a:r>
           </a:p>
-          <a:p xmlns:a="http://schemas.openxmlformats.org/drawingml/2006/main">
+          <a:p>
             <a:pPr>
               <a:defRPr sz="1875" b="0">
                 <a:solidFill>
@@ -3970,7 +3781,7 @@
               <a:t>or manoeuvring</a:t>
             </a:r>
           </a:p>
-          <a:p xmlns:a="http://schemas.openxmlformats.org/drawingml/2006/main">
+          <a:p>
             <a:pPr>
               <a:defRPr sz="1875" b="0">
                 <a:solidFill>
@@ -3997,37 +3808,37 @@
       </p:sp>
       <p:sp>
         <p:nvSpPr>
-          <p:cNvPr id="7" name="">
-            <a:extLst xmlns:a="http://schemas.openxmlformats.org/drawingml/2006/main">
+          <p:cNvPr id="7" name="Rectangle 6">
+            <a:extLst>
               <a:ext uri="{FF2B5EF4-FFF2-40B4-BE49-F238E27FC236}">
                 <a16:creationId xmlns:a16="http://schemas.microsoft.com/office/drawing/2014/main" id="{D456A6E0-94FF-46F8-9EF9-B1DD68D4F433}"/>
               </a:ext>
             </a:extLst>
           </p:cNvPr>
           <p:cNvSpPr>
-            <a:spLocks xmlns:a="http://schemas.openxmlformats.org/drawingml/2006/main" noGrp="1"/>
-          </p:cNvSpPr>
-          <p:nvPr/>
-        </p:nvSpPr>
-        <p:spPr>
-          <a:xfrm xmlns:a="http://schemas.openxmlformats.org/drawingml/2006/main">
+            <a:spLocks noGrp="1"/>
+          </p:cNvSpPr>
+          <p:nvPr/>
+        </p:nvSpPr>
+        <p:spPr>
+          <a:xfrm>
             <a:off x="7924800" y="4333875"/>
             <a:ext cx="3524250" cy="476250"/>
           </a:xfrm>
-          <a:prstGeom xmlns:a="http://schemas.openxmlformats.org/drawingml/2006/main" prst="rect">
-            <a:avLst/>
-          </a:prstGeom>
-          <a:noFill xmlns:a="http://schemas.openxmlformats.org/drawingml/2006/main"/>
-          <a:ln xmlns:a="http://schemas.openxmlformats.org/drawingml/2006/main" w="0">
+          <a:prstGeom prst="rect">
+            <a:avLst/>
+          </a:prstGeom>
+          <a:noFill/>
+          <a:ln w="0">
             <a:noFill/>
           </a:ln>
         </p:spPr>
         <p:txBody>
-          <a:bodyPr xmlns:a="http://schemas.openxmlformats.org/drawingml/2006/main">
+          <a:bodyPr>
             <a:noAutofit/>
           </a:bodyPr>
-          <a:lstStyle xmlns:a="http://schemas.openxmlformats.org/drawingml/2006/main"/>
-          <a:p xmlns:a="http://schemas.openxmlformats.org/drawingml/2006/main">
+          <a:lstStyle/>
+          <a:p>
             <a:pPr>
               <a:defRPr sz="2325" b="1">
                 <a:solidFill>
@@ -4054,37 +3865,37 @@
       </p:sp>
       <p:sp>
         <p:nvSpPr>
-          <p:cNvPr id="8" name="">
-            <a:extLst xmlns:a="http://schemas.openxmlformats.org/drawingml/2006/main">
+          <p:cNvPr id="8" name="Rectangle 7">
+            <a:extLst>
               <a:ext uri="{FF2B5EF4-FFF2-40B4-BE49-F238E27FC236}">
                 <a16:creationId xmlns:a16="http://schemas.microsoft.com/office/drawing/2014/main" id="{2AE3D056-AFD2-4B1F-A634-CA2CC5EDF2F2}"/>
               </a:ext>
             </a:extLst>
           </p:cNvPr>
           <p:cNvSpPr>
-            <a:spLocks xmlns:a="http://schemas.openxmlformats.org/drawingml/2006/main" noGrp="1"/>
-          </p:cNvSpPr>
-          <p:nvPr/>
-        </p:nvSpPr>
-        <p:spPr>
-          <a:xfrm xmlns:a="http://schemas.openxmlformats.org/drawingml/2006/main">
+            <a:spLocks noGrp="1"/>
+          </p:cNvSpPr>
+          <p:nvPr/>
+        </p:nvSpPr>
+        <p:spPr>
+          <a:xfrm>
             <a:off x="7924800" y="4933950"/>
             <a:ext cx="3409950" cy="904875"/>
           </a:xfrm>
-          <a:prstGeom xmlns:a="http://schemas.openxmlformats.org/drawingml/2006/main" prst="rect">
-            <a:avLst/>
-          </a:prstGeom>
-          <a:noFill xmlns:a="http://schemas.openxmlformats.org/drawingml/2006/main"/>
-          <a:ln xmlns:a="http://schemas.openxmlformats.org/drawingml/2006/main" w="0">
+          <a:prstGeom prst="rect">
+            <a:avLst/>
+          </a:prstGeom>
+          <a:noFill/>
+          <a:ln w="0">
             <a:noFill/>
           </a:ln>
         </p:spPr>
         <p:txBody>
-          <a:bodyPr xmlns:a="http://schemas.openxmlformats.org/drawingml/2006/main">
+          <a:bodyPr>
             <a:noAutofit/>
           </a:bodyPr>
-          <a:lstStyle xmlns:a="http://schemas.openxmlformats.org/drawingml/2006/main"/>
-          <a:p xmlns:a="http://schemas.openxmlformats.org/drawingml/2006/main">
+          <a:lstStyle/>
+          <a:p>
             <a:pPr>
               <a:defRPr sz="1800" b="0">
                 <a:solidFill>
@@ -4107,7 +3918,7 @@
               <a:t>Median age: 150 days</a:t>
             </a:r>
           </a:p>
-          <a:p xmlns:a="http://schemas.openxmlformats.org/drawingml/2006/main">
+          <a:p>
             <a:pPr>
               <a:defRPr sz="1800" b="0">
                 <a:solidFill>
@@ -4134,37 +3945,37 @@
       </p:sp>
       <p:sp>
         <p:nvSpPr>
-          <p:cNvPr id="9" name="">
-            <a:extLst xmlns:a="http://schemas.openxmlformats.org/drawingml/2006/main">
+          <p:cNvPr id="9" name="Rectangle 8">
+            <a:extLst>
               <a:ext uri="{FF2B5EF4-FFF2-40B4-BE49-F238E27FC236}">
                 <a16:creationId xmlns:a16="http://schemas.microsoft.com/office/drawing/2014/main" id="{9D437113-C8BC-46D9-90CA-275F57FD0849}"/>
               </a:ext>
             </a:extLst>
           </p:cNvPr>
           <p:cNvSpPr>
-            <a:spLocks xmlns:a="http://schemas.openxmlformats.org/drawingml/2006/main" noGrp="1"/>
-          </p:cNvSpPr>
-          <p:nvPr/>
-        </p:nvSpPr>
-        <p:spPr>
-          <a:xfrm xmlns:a="http://schemas.openxmlformats.org/drawingml/2006/main">
+            <a:spLocks noGrp="1"/>
+          </p:cNvSpPr>
+          <p:nvPr/>
+        </p:nvSpPr>
+        <p:spPr>
+          <a:xfrm>
             <a:off x="609600" y="6000750"/>
             <a:ext cx="10810875" cy="361950"/>
           </a:xfrm>
-          <a:prstGeom xmlns:a="http://schemas.openxmlformats.org/drawingml/2006/main" prst="rect">
-            <a:avLst/>
-          </a:prstGeom>
-          <a:noFill xmlns:a="http://schemas.openxmlformats.org/drawingml/2006/main"/>
-          <a:ln xmlns:a="http://schemas.openxmlformats.org/drawingml/2006/main" w="0">
+          <a:prstGeom prst="rect">
+            <a:avLst/>
+          </a:prstGeom>
+          <a:noFill/>
+          <a:ln w="0">
             <a:noFill/>
           </a:ln>
         </p:spPr>
         <p:txBody>
-          <a:bodyPr xmlns:a="http://schemas.openxmlformats.org/drawingml/2006/main">
+          <a:bodyPr>
             <a:noAutofit/>
           </a:bodyPr>
-          <a:lstStyle xmlns:a="http://schemas.openxmlformats.org/drawingml/2006/main"/>
-          <a:p xmlns:a="http://schemas.openxmlformats.org/drawingml/2006/main">
+          <a:lstStyle/>
+          <a:p>
             <a:pPr>
               <a:defRPr sz="1575" b="0">
                 <a:solidFill>
@@ -4196,17 +4007,21 @@
       </p:ext>
     </p:extLst>
   </p:cSld>
+  <p:clrMapOvr>
+    <a:masterClrMapping/>
+  </p:clrMapOvr>
 </p:sld>
 </file>
 
 <file path=ppt/slides/slide5.xml><?xml version="1.0" encoding="utf-8"?>
-<p:sld xmlns:p="http://schemas.openxmlformats.org/presentationml/2006/main">
+<p:sld xmlns:a="http://schemas.openxmlformats.org/drawingml/2006/main" xmlns:r="http://schemas.openxmlformats.org/officeDocument/2006/relationships" xmlns:p="http://schemas.openxmlformats.org/presentationml/2006/main">
   <p:cSld>
     <p:bg>
       <p:bgPr>
-        <a:solidFill xmlns:a="http://schemas.openxmlformats.org/drawingml/2006/main">
+        <a:solidFill>
           <a:srgbClr val="F5F4EF"/>
         </a:solidFill>
+        <a:effectLst/>
       </p:bgPr>
     </p:bg>
     <p:spTree>
@@ -4216,41 +4031,46 @@
         <p:nvPr/>
       </p:nvGrpSpPr>
       <p:grpSpPr>
-        <a:xfrm xmlns:a="http://schemas.openxmlformats.org/drawingml/2006/main"/>
+        <a:xfrm>
+          <a:off x="0" y="0"/>
+          <a:ext cx="0" cy="0"/>
+          <a:chOff x="0" y="0"/>
+          <a:chExt cx="0" cy="0"/>
+        </a:xfrm>
       </p:grpSpPr>
       <p:sp>
         <p:nvSpPr>
-          <p:cNvPr id="13" name="">
-            <a:extLst xmlns:a="http://schemas.openxmlformats.org/drawingml/2006/main">
+          <p:cNvPr id="13" name="Rectangle 12">
+            <a:extLst>
               <a:ext uri="{FF2B5EF4-FFF2-40B4-BE49-F238E27FC236}">
                 <a16:creationId xmlns:a16="http://schemas.microsoft.com/office/drawing/2014/main" id="{2919FD4F-95A4-4AD7-A89D-74BA38963ADC}"/>
               </a:ext>
             </a:extLst>
           </p:cNvPr>
           <p:cNvSpPr>
-            <a:spLocks xmlns:a="http://schemas.openxmlformats.org/drawingml/2006/main" noGrp="1"/>
-          </p:cNvSpPr>
-          <p:nvPr/>
-        </p:nvSpPr>
-        <p:spPr>
-          <a:xfrm xmlns:a="http://schemas.openxmlformats.org/drawingml/2006/main">
+            <a:spLocks noGrp="1"/>
+          </p:cNvSpPr>
+          <p:nvPr/>
+        </p:nvSpPr>
+        <p:spPr>
+          <a:xfrm>
             <a:off x="609600" y="409575"/>
             <a:ext cx="10953750" cy="714375"/>
           </a:xfrm>
-          <a:prstGeom xmlns:a="http://schemas.openxmlformats.org/drawingml/2006/main" prst="rect">
-            <a:avLst/>
-          </a:prstGeom>
-          <a:noFill xmlns:a="http://schemas.openxmlformats.org/drawingml/2006/main"/>
-          <a:ln xmlns:a="http://schemas.openxmlformats.org/drawingml/2006/main" w="0">
+          <a:prstGeom prst="rect">
+            <a:avLst/>
+          </a:prstGeom>
+          <a:noFill/>
+          <a:ln w="0">
             <a:noFill/>
           </a:ln>
         </p:spPr>
         <p:txBody>
-          <a:bodyPr xmlns:a="http://schemas.openxmlformats.org/drawingml/2006/main">
+          <a:bodyPr>
             <a:noAutofit/>
           </a:bodyPr>
-          <a:lstStyle xmlns:a="http://schemas.openxmlformats.org/drawingml/2006/main"/>
-          <a:p xmlns:a="http://schemas.openxmlformats.org/drawingml/2006/main">
+          <a:lstStyle/>
+          <a:p>
             <a:pPr>
               <a:defRPr sz="3225" b="1">
                 <a:solidFill>
@@ -4277,37 +4097,37 @@
       </p:sp>
       <p:sp>
         <p:nvSpPr>
-          <p:cNvPr id="2" name="">
-            <a:extLst xmlns:a="http://schemas.openxmlformats.org/drawingml/2006/main">
+          <p:cNvPr id="2" name="Rectangle 1">
+            <a:extLst>
               <a:ext uri="{FF2B5EF4-FFF2-40B4-BE49-F238E27FC236}">
                 <a16:creationId xmlns:a16="http://schemas.microsoft.com/office/drawing/2014/main" id="{EC40EA9D-5225-4F64-AE0C-40AE6DDC0D63}"/>
               </a:ext>
             </a:extLst>
           </p:cNvPr>
           <p:cNvSpPr>
-            <a:spLocks xmlns:a="http://schemas.openxmlformats.org/drawingml/2006/main" noGrp="1"/>
-          </p:cNvSpPr>
-          <p:nvPr/>
-        </p:nvSpPr>
-        <p:spPr>
-          <a:xfrm xmlns:a="http://schemas.openxmlformats.org/drawingml/2006/main">
+            <a:spLocks noGrp="1"/>
+          </p:cNvSpPr>
+          <p:nvPr/>
+        </p:nvSpPr>
+        <p:spPr>
+          <a:xfrm>
             <a:off x="11144250" y="6324600"/>
             <a:ext cx="476250" cy="285750"/>
           </a:xfrm>
-          <a:prstGeom xmlns:a="http://schemas.openxmlformats.org/drawingml/2006/main" prst="rect">
-            <a:avLst/>
-          </a:prstGeom>
-          <a:noFill xmlns:a="http://schemas.openxmlformats.org/drawingml/2006/main"/>
-          <a:ln xmlns:a="http://schemas.openxmlformats.org/drawingml/2006/main" w="0">
+          <a:prstGeom prst="rect">
+            <a:avLst/>
+          </a:prstGeom>
+          <a:noFill/>
+          <a:ln w="0">
             <a:noFill/>
           </a:ln>
         </p:spPr>
         <p:txBody>
-          <a:bodyPr xmlns:a="http://schemas.openxmlformats.org/drawingml/2006/main">
+          <a:bodyPr>
             <a:noAutofit/>
           </a:bodyPr>
-          <a:lstStyle xmlns:a="http://schemas.openxmlformats.org/drawingml/2006/main"/>
-          <a:p xmlns:a="http://schemas.openxmlformats.org/drawingml/2006/main">
+          <a:lstStyle/>
+          <a:p>
             <a:pPr>
               <a:defRPr sz="1350" b="0">
                 <a:solidFill>
@@ -4334,37 +4154,37 @@
       </p:sp>
       <p:sp>
         <p:nvSpPr>
-          <p:cNvPr id="3" name="">
-            <a:extLst xmlns:a="http://schemas.openxmlformats.org/drawingml/2006/main">
+          <p:cNvPr id="3" name="Rectangle 2">
+            <a:extLst>
               <a:ext uri="{FF2B5EF4-FFF2-40B4-BE49-F238E27FC236}">
                 <a16:creationId xmlns:a16="http://schemas.microsoft.com/office/drawing/2014/main" id="{61FB158A-2BF9-4B8F-8C37-9F5CF4DD267B}"/>
               </a:ext>
             </a:extLst>
           </p:cNvPr>
           <p:cNvSpPr>
-            <a:spLocks xmlns:a="http://schemas.openxmlformats.org/drawingml/2006/main" noGrp="1"/>
-          </p:cNvSpPr>
-          <p:nvPr/>
-        </p:nvSpPr>
-        <p:spPr>
-          <a:xfrm xmlns:a="http://schemas.openxmlformats.org/drawingml/2006/main">
+            <a:spLocks noGrp="1"/>
+          </p:cNvSpPr>
+          <p:nvPr/>
+        </p:nvSpPr>
+        <p:spPr>
+          <a:xfrm>
             <a:off x="609600" y="1428750"/>
             <a:ext cx="4953000" cy="428625"/>
           </a:xfrm>
-          <a:prstGeom xmlns:a="http://schemas.openxmlformats.org/drawingml/2006/main" prst="rect">
-            <a:avLst/>
-          </a:prstGeom>
-          <a:noFill xmlns:a="http://schemas.openxmlformats.org/drawingml/2006/main"/>
-          <a:ln xmlns:a="http://schemas.openxmlformats.org/drawingml/2006/main" w="0">
+          <a:prstGeom prst="rect">
+            <a:avLst/>
+          </a:prstGeom>
+          <a:noFill/>
+          <a:ln w="0">
             <a:noFill/>
           </a:ln>
         </p:spPr>
         <p:txBody>
-          <a:bodyPr xmlns:a="http://schemas.openxmlformats.org/drawingml/2006/main">
+          <a:bodyPr>
             <a:noAutofit/>
           </a:bodyPr>
-          <a:lstStyle xmlns:a="http://schemas.openxmlformats.org/drawingml/2006/main"/>
-          <a:p xmlns:a="http://schemas.openxmlformats.org/drawingml/2006/main">
+          <a:lstStyle/>
+          <a:p>
             <a:pPr>
               <a:defRPr sz="2175" b="1">
                 <a:solidFill>
@@ -4391,37 +4211,37 @@
       </p:sp>
       <p:sp>
         <p:nvSpPr>
-          <p:cNvPr id="4" name="">
-            <a:extLst xmlns:a="http://schemas.openxmlformats.org/drawingml/2006/main">
+          <p:cNvPr id="4" name="Rectangle 3">
+            <a:extLst>
               <a:ext uri="{FF2B5EF4-FFF2-40B4-BE49-F238E27FC236}">
                 <a16:creationId xmlns:a16="http://schemas.microsoft.com/office/drawing/2014/main" id="{ED27CB0E-249E-4788-8C0C-14911A92CB50}"/>
               </a:ext>
             </a:extLst>
           </p:cNvPr>
           <p:cNvSpPr>
-            <a:spLocks xmlns:a="http://schemas.openxmlformats.org/drawingml/2006/main" noGrp="1"/>
-          </p:cNvSpPr>
-          <p:nvPr/>
-        </p:nvSpPr>
-        <p:spPr>
-          <a:xfrm xmlns:a="http://schemas.openxmlformats.org/drawingml/2006/main">
+            <a:spLocks noGrp="1"/>
+          </p:cNvSpPr>
+          <p:nvPr/>
+        </p:nvSpPr>
+        <p:spPr>
+          <a:xfrm>
             <a:off x="609600" y="1924050"/>
             <a:ext cx="4953000" cy="333375"/>
           </a:xfrm>
-          <a:prstGeom xmlns:a="http://schemas.openxmlformats.org/drawingml/2006/main" prst="rect">
-            <a:avLst/>
-          </a:prstGeom>
-          <a:noFill xmlns:a="http://schemas.openxmlformats.org/drawingml/2006/main"/>
-          <a:ln xmlns:a="http://schemas.openxmlformats.org/drawingml/2006/main" w="0">
+          <a:prstGeom prst="rect">
+            <a:avLst/>
+          </a:prstGeom>
+          <a:noFill/>
+          <a:ln w="0">
             <a:noFill/>
           </a:ln>
         </p:spPr>
         <p:txBody>
-          <a:bodyPr xmlns:a="http://schemas.openxmlformats.org/drawingml/2006/main">
+          <a:bodyPr>
             <a:noAutofit/>
           </a:bodyPr>
-          <a:lstStyle xmlns:a="http://schemas.openxmlformats.org/drawingml/2006/main"/>
-          <a:p xmlns:a="http://schemas.openxmlformats.org/drawingml/2006/main">
+          <a:lstStyle/>
+          <a:p>
             <a:pPr>
               <a:defRPr sz="1725" b="0">
                 <a:solidFill>
@@ -4448,37 +4268,37 @@
       </p:sp>
       <p:sp>
         <p:nvSpPr>
-          <p:cNvPr id="5" name="">
-            <a:extLst xmlns:a="http://schemas.openxmlformats.org/drawingml/2006/main">
+          <p:cNvPr id="5" name="Rectangle 4">
+            <a:extLst>
               <a:ext uri="{FF2B5EF4-FFF2-40B4-BE49-F238E27FC236}">
                 <a16:creationId xmlns:a16="http://schemas.microsoft.com/office/drawing/2014/main" id="{45C1711F-AF88-48F5-A53C-43345F02B493}"/>
               </a:ext>
             </a:extLst>
           </p:cNvPr>
           <p:cNvSpPr>
-            <a:spLocks xmlns:a="http://schemas.openxmlformats.org/drawingml/2006/main" noGrp="1"/>
-          </p:cNvSpPr>
-          <p:nvPr/>
-        </p:nvSpPr>
-        <p:spPr>
-          <a:xfrm xmlns:a="http://schemas.openxmlformats.org/drawingml/2006/main">
+            <a:spLocks noGrp="1"/>
+          </p:cNvSpPr>
+          <p:nvPr/>
+        </p:nvSpPr>
+        <p:spPr>
+          <a:xfrm>
             <a:off x="609600" y="2619375"/>
             <a:ext cx="2381250" cy="714375"/>
           </a:xfrm>
-          <a:prstGeom xmlns:a="http://schemas.openxmlformats.org/drawingml/2006/main" prst="rect">
-            <a:avLst/>
-          </a:prstGeom>
-          <a:noFill xmlns:a="http://schemas.openxmlformats.org/drawingml/2006/main"/>
-          <a:ln xmlns:a="http://schemas.openxmlformats.org/drawingml/2006/main" w="0">
+          <a:prstGeom prst="rect">
+            <a:avLst/>
+          </a:prstGeom>
+          <a:noFill/>
+          <a:ln w="0">
             <a:noFill/>
           </a:ln>
         </p:spPr>
         <p:txBody>
-          <a:bodyPr xmlns:a="http://schemas.openxmlformats.org/drawingml/2006/main">
+          <a:bodyPr>
             <a:noAutofit/>
           </a:bodyPr>
-          <a:lstStyle xmlns:a="http://schemas.openxmlformats.org/drawingml/2006/main"/>
-          <a:p xmlns:a="http://schemas.openxmlformats.org/drawingml/2006/main">
+          <a:lstStyle/>
+          <a:p>
             <a:pPr>
               <a:defRPr sz="4275" b="1">
                 <a:solidFill>
@@ -4505,37 +4325,37 @@
       </p:sp>
       <p:sp>
         <p:nvSpPr>
-          <p:cNvPr id="6" name="">
-            <a:extLst xmlns:a="http://schemas.openxmlformats.org/drawingml/2006/main">
+          <p:cNvPr id="6" name="Rectangle 5">
+            <a:extLst>
               <a:ext uri="{FF2B5EF4-FFF2-40B4-BE49-F238E27FC236}">
                 <a16:creationId xmlns:a16="http://schemas.microsoft.com/office/drawing/2014/main" id="{E8E3E4AB-9A30-41F9-9AF3-BAE400140A35}"/>
               </a:ext>
             </a:extLst>
           </p:cNvPr>
           <p:cNvSpPr>
-            <a:spLocks xmlns:a="http://schemas.openxmlformats.org/drawingml/2006/main" noGrp="1"/>
-          </p:cNvSpPr>
-          <p:nvPr/>
-        </p:nvSpPr>
-        <p:spPr>
-          <a:xfrm xmlns:a="http://schemas.openxmlformats.org/drawingml/2006/main">
+            <a:spLocks noGrp="1"/>
+          </p:cNvSpPr>
+          <p:nvPr/>
+        </p:nvSpPr>
+        <p:spPr>
+          <a:xfrm>
             <a:off x="609600" y="3343275"/>
             <a:ext cx="4857750" cy="409575"/>
           </a:xfrm>
-          <a:prstGeom xmlns:a="http://schemas.openxmlformats.org/drawingml/2006/main" prst="rect">
-            <a:avLst/>
-          </a:prstGeom>
-          <a:noFill xmlns:a="http://schemas.openxmlformats.org/drawingml/2006/main"/>
-          <a:ln xmlns:a="http://schemas.openxmlformats.org/drawingml/2006/main" w="0">
+          <a:prstGeom prst="rect">
+            <a:avLst/>
+          </a:prstGeom>
+          <a:noFill/>
+          <a:ln w="0">
             <a:noFill/>
           </a:ln>
         </p:spPr>
         <p:txBody>
-          <a:bodyPr xmlns:a="http://schemas.openxmlformats.org/drawingml/2006/main">
+          <a:bodyPr>
             <a:noAutofit/>
           </a:bodyPr>
-          <a:lstStyle xmlns:a="http://schemas.openxmlformats.org/drawingml/2006/main"/>
-          <a:p xmlns:a="http://schemas.openxmlformats.org/drawingml/2006/main">
+          <a:lstStyle/>
+          <a:p>
             <a:pPr>
               <a:defRPr sz="1950" b="0">
                 <a:solidFill>
@@ -4562,37 +4382,37 @@
       </p:sp>
       <p:sp>
         <p:nvSpPr>
-          <p:cNvPr id="7" name="">
-            <a:extLst xmlns:a="http://schemas.openxmlformats.org/drawingml/2006/main">
+          <p:cNvPr id="7" name="Rectangle 6">
+            <a:extLst>
               <a:ext uri="{FF2B5EF4-FFF2-40B4-BE49-F238E27FC236}">
                 <a16:creationId xmlns:a16="http://schemas.microsoft.com/office/drawing/2014/main" id="{CC76E1AC-89FF-497E-B3D5-6B266C2C3536}"/>
               </a:ext>
             </a:extLst>
           </p:cNvPr>
           <p:cNvSpPr>
-            <a:spLocks xmlns:a="http://schemas.openxmlformats.org/drawingml/2006/main" noGrp="1"/>
-          </p:cNvSpPr>
-          <p:nvPr/>
-        </p:nvSpPr>
-        <p:spPr>
-          <a:xfrm xmlns:a="http://schemas.openxmlformats.org/drawingml/2006/main">
+            <a:spLocks noGrp="1"/>
+          </p:cNvSpPr>
+          <p:nvPr/>
+        </p:nvSpPr>
+        <p:spPr>
+          <a:xfrm>
             <a:off x="609600" y="4095750"/>
             <a:ext cx="2381250" cy="695325"/>
           </a:xfrm>
-          <a:prstGeom xmlns:a="http://schemas.openxmlformats.org/drawingml/2006/main" prst="rect">
-            <a:avLst/>
-          </a:prstGeom>
-          <a:noFill xmlns:a="http://schemas.openxmlformats.org/drawingml/2006/main"/>
-          <a:ln xmlns:a="http://schemas.openxmlformats.org/drawingml/2006/main" w="0">
+          <a:prstGeom prst="rect">
+            <a:avLst/>
+          </a:prstGeom>
+          <a:noFill/>
+          <a:ln w="0">
             <a:noFill/>
           </a:ln>
         </p:spPr>
         <p:txBody>
-          <a:bodyPr xmlns:a="http://schemas.openxmlformats.org/drawingml/2006/main">
+          <a:bodyPr>
             <a:noAutofit/>
           </a:bodyPr>
-          <a:lstStyle xmlns:a="http://schemas.openxmlformats.org/drawingml/2006/main"/>
-          <a:p xmlns:a="http://schemas.openxmlformats.org/drawingml/2006/main">
+          <a:lstStyle/>
+          <a:p>
             <a:pPr>
               <a:defRPr sz="3975" b="1">
                 <a:solidFill>
@@ -4619,37 +4439,37 @@
       </p:sp>
       <p:sp>
         <p:nvSpPr>
-          <p:cNvPr id="8" name="">
-            <a:extLst xmlns:a="http://schemas.openxmlformats.org/drawingml/2006/main">
+          <p:cNvPr id="8" name="Rectangle 7">
+            <a:extLst>
               <a:ext uri="{FF2B5EF4-FFF2-40B4-BE49-F238E27FC236}">
                 <a16:creationId xmlns:a16="http://schemas.microsoft.com/office/drawing/2014/main" id="{42DE4D00-D6F0-42B5-A59A-291785F1DBE2}"/>
               </a:ext>
             </a:extLst>
           </p:cNvPr>
           <p:cNvSpPr>
-            <a:spLocks xmlns:a="http://schemas.openxmlformats.org/drawingml/2006/main" noGrp="1"/>
-          </p:cNvSpPr>
-          <p:nvPr/>
-        </p:nvSpPr>
-        <p:spPr>
-          <a:xfrm xmlns:a="http://schemas.openxmlformats.org/drawingml/2006/main">
+            <a:spLocks noGrp="1"/>
+          </p:cNvSpPr>
+          <p:nvPr/>
+        </p:nvSpPr>
+        <p:spPr>
+          <a:xfrm>
             <a:off x="609600" y="4838700"/>
             <a:ext cx="4857750" cy="733425"/>
           </a:xfrm>
-          <a:prstGeom xmlns:a="http://schemas.openxmlformats.org/drawingml/2006/main" prst="rect">
-            <a:avLst/>
-          </a:prstGeom>
-          <a:noFill xmlns:a="http://schemas.openxmlformats.org/drawingml/2006/main"/>
-          <a:ln xmlns:a="http://schemas.openxmlformats.org/drawingml/2006/main" w="0">
+          <a:prstGeom prst="rect">
+            <a:avLst/>
+          </a:prstGeom>
+          <a:noFill/>
+          <a:ln w="0">
             <a:noFill/>
           </a:ln>
         </p:spPr>
         <p:txBody>
-          <a:bodyPr xmlns:a="http://schemas.openxmlformats.org/drawingml/2006/main">
+          <a:bodyPr>
             <a:noAutofit/>
           </a:bodyPr>
-          <a:lstStyle xmlns:a="http://schemas.openxmlformats.org/drawingml/2006/main"/>
-          <a:p xmlns:a="http://schemas.openxmlformats.org/drawingml/2006/main">
+          <a:lstStyle/>
+          <a:p>
             <a:pPr>
               <a:defRPr sz="1950" b="0">
                 <a:solidFill>
@@ -4672,7 +4492,7 @@
               <a:t>Case kind + insurance</a:t>
             </a:r>
           </a:p>
-          <a:p xmlns:a="http://schemas.openxmlformats.org/drawingml/2006/main">
+          <a:p>
             <a:pPr>
               <a:defRPr sz="1950" b="0">
                 <a:solidFill>
@@ -4699,37 +4519,37 @@
       </p:sp>
       <p:sp>
         <p:nvSpPr>
-          <p:cNvPr id="9" name="">
-            <a:extLst xmlns:a="http://schemas.openxmlformats.org/drawingml/2006/main">
+          <p:cNvPr id="9" name="Rectangle 8">
+            <a:extLst>
               <a:ext uri="{FF2B5EF4-FFF2-40B4-BE49-F238E27FC236}">
                 <a16:creationId xmlns:a16="http://schemas.microsoft.com/office/drawing/2014/main" id="{C0F99FCF-EDE9-4F21-A1CA-30393B17D845}"/>
               </a:ext>
             </a:extLst>
           </p:cNvPr>
           <p:cNvSpPr>
-            <a:spLocks xmlns:a="http://schemas.openxmlformats.org/drawingml/2006/main" noGrp="1"/>
-          </p:cNvSpPr>
-          <p:nvPr/>
-        </p:nvSpPr>
-        <p:spPr>
-          <a:xfrm xmlns:a="http://schemas.openxmlformats.org/drawingml/2006/main">
+            <a:spLocks noGrp="1"/>
+          </p:cNvSpPr>
+          <p:nvPr/>
+        </p:nvSpPr>
+        <p:spPr>
+          <a:xfrm>
             <a:off x="5838825" y="1428750"/>
             <a:ext cx="5810250" cy="428625"/>
           </a:xfrm>
-          <a:prstGeom xmlns:a="http://schemas.openxmlformats.org/drawingml/2006/main" prst="rect">
-            <a:avLst/>
-          </a:prstGeom>
-          <a:noFill xmlns:a="http://schemas.openxmlformats.org/drawingml/2006/main"/>
-          <a:ln xmlns:a="http://schemas.openxmlformats.org/drawingml/2006/main" w="0">
+          <a:prstGeom prst="rect">
+            <a:avLst/>
+          </a:prstGeom>
+          <a:noFill/>
+          <a:ln w="0">
             <a:noFill/>
           </a:ln>
         </p:spPr>
         <p:txBody>
-          <a:bodyPr xmlns:a="http://schemas.openxmlformats.org/drawingml/2006/main">
+          <a:bodyPr>
             <a:noAutofit/>
           </a:bodyPr>
-          <a:lstStyle xmlns:a="http://schemas.openxmlformats.org/drawingml/2006/main"/>
-          <a:p xmlns:a="http://schemas.openxmlformats.org/drawingml/2006/main">
+          <a:lstStyle/>
+          <a:p>
             <a:pPr>
               <a:defRPr sz="2100" b="1">
                 <a:solidFill>
@@ -4756,37 +4576,37 @@
       </p:sp>
       <p:sp>
         <p:nvSpPr>
-          <p:cNvPr id="10" name="">
-            <a:extLst xmlns:a="http://schemas.openxmlformats.org/drawingml/2006/main">
+          <p:cNvPr id="10" name="Rectangle 9">
+            <a:extLst>
               <a:ext uri="{FF2B5EF4-FFF2-40B4-BE49-F238E27FC236}">
                 <a16:creationId xmlns:a16="http://schemas.microsoft.com/office/drawing/2014/main" id="{A3104A55-52D7-4274-8694-F124332AF5F2}"/>
               </a:ext>
             </a:extLst>
           </p:cNvPr>
           <p:cNvSpPr>
-            <a:spLocks xmlns:a="http://schemas.openxmlformats.org/drawingml/2006/main" noGrp="1"/>
-          </p:cNvSpPr>
-          <p:nvPr/>
-        </p:nvSpPr>
-        <p:spPr>
-          <a:xfrm xmlns:a="http://schemas.openxmlformats.org/drawingml/2006/main">
+            <a:spLocks noGrp="1"/>
+          </p:cNvSpPr>
+          <p:nvPr/>
+        </p:nvSpPr>
+        <p:spPr>
+          <a:xfrm>
             <a:off x="5838825" y="1924050"/>
             <a:ext cx="5810250" cy="333375"/>
           </a:xfrm>
-          <a:prstGeom xmlns:a="http://schemas.openxmlformats.org/drawingml/2006/main" prst="rect">
-            <a:avLst/>
-          </a:prstGeom>
-          <a:noFill xmlns:a="http://schemas.openxmlformats.org/drawingml/2006/main"/>
-          <a:ln xmlns:a="http://schemas.openxmlformats.org/drawingml/2006/main" w="0">
+          <a:prstGeom prst="rect">
+            <a:avLst/>
+          </a:prstGeom>
+          <a:noFill/>
+          <a:ln w="0">
             <a:noFill/>
           </a:ln>
         </p:spPr>
         <p:txBody>
-          <a:bodyPr xmlns:a="http://schemas.openxmlformats.org/drawingml/2006/main">
+          <a:bodyPr>
             <a:noAutofit/>
           </a:bodyPr>
-          <a:lstStyle xmlns:a="http://schemas.openxmlformats.org/drawingml/2006/main"/>
-          <a:p xmlns:a="http://schemas.openxmlformats.org/drawingml/2006/main">
+          <a:lstStyle/>
+          <a:p>
             <a:pPr>
               <a:defRPr sz="1725" b="0">
                 <a:solidFill>
@@ -4813,21 +4633,33 @@
       </p:sp>
       <p:graphicFrame>
         <p:nvGraphicFramePr>
-          <p:cNvPr id="23" name=""/>
+          <p:cNvPr id="23" name="Tableau 22"/>
           <p:cNvGraphicFramePr/>
           <p:nvPr/>
         </p:nvGraphicFramePr>
         <p:xfrm>
-          <a:off xmlns:a="http://schemas.openxmlformats.org/drawingml/2006/main" x="5829300" y="2466975"/>
-          <a:ext xmlns:a="http://schemas.openxmlformats.org/drawingml/2006/main" cx="5715000" cy="3000375"/>
+          <a:off x="5829300" y="2466975"/>
+          <a:ext cx="5715000" cy="3000378"/>
         </p:xfrm>
-        <a:graphic xmlns:a="http://schemas.openxmlformats.org/drawingml/2006/main">
+        <a:graphic>
           <a:graphicData uri="http://schemas.openxmlformats.org/drawingml/2006/table">
             <a:tbl>
               <a:tblPr/>
               <a:tblGrid>
-                <a:gridCol w="3952875"/>
-                <a:gridCol w="1762125"/>
+                <a:gridCol w="3952875">
+                  <a:extLst>
+                    <a:ext uri="{9D8B030D-6E8A-4147-A177-3AD203B41FA5}">
+                      <a16:colId xmlns:a16="http://schemas.microsoft.com/office/drawing/2014/main" val="20000"/>
+                    </a:ext>
+                  </a:extLst>
+                </a:gridCol>
+                <a:gridCol w="1762125">
+                  <a:extLst>
+                    <a:ext uri="{9D8B030D-6E8A-4147-A177-3AD203B41FA5}">
+                      <a16:colId xmlns:a16="http://schemas.microsoft.com/office/drawing/2014/main" val="20001"/>
+                    </a:ext>
+                  </a:extLst>
+                </a:gridCol>
               </a:tblGrid>
               <a:tr h="500063">
                 <a:tc>
@@ -4840,7 +4672,7 @@
                       </a:r>
                     </a:p>
                   </a:txBody>
-                  <a:tcPr marL="91440" marR="91440" marT="45720" marB="45720">
+                  <a:tcPr>
                     <a:solidFill>
                       <a:srgbClr val="102C36"/>
                     </a:solidFill>
@@ -4856,12 +4688,17 @@
                       </a:r>
                     </a:p>
                   </a:txBody>
-                  <a:tcPr marL="91440" marR="91440" marT="45720" marB="45720">
+                  <a:tcPr>
                     <a:solidFill>
                       <a:srgbClr val="102C36"/>
                     </a:solidFill>
                   </a:tcPr>
                 </a:tc>
+                <a:extLst>
+                  <a:ext uri="{0D108BD9-81ED-4DB2-BD59-A6C34878D82A}">
+                    <a16:rowId xmlns:a16="http://schemas.microsoft.com/office/drawing/2014/main" val="10000"/>
+                  </a:ext>
+                </a:extLst>
               </a:tr>
               <a:tr h="500063">
                 <a:tc>
@@ -4882,7 +4719,7 @@
                       </a:r>
                     </a:p>
                   </a:txBody>
-                  <a:tcPr marL="91440" marR="91440" marT="45720" marB="45720">
+                  <a:tcPr>
                     <a:solidFill>
                       <a:srgbClr val="DFEDE7"/>
                     </a:solidFill>
@@ -4898,12 +4735,17 @@
                       </a:r>
                     </a:p>
                   </a:txBody>
-                  <a:tcPr marL="91440" marR="91440" marT="45720" marB="45720">
+                  <a:tcPr>
                     <a:solidFill>
                       <a:srgbClr val="DFEDE7"/>
                     </a:solidFill>
                   </a:tcPr>
                 </a:tc>
+                <a:extLst>
+                  <a:ext uri="{0D108BD9-81ED-4DB2-BD59-A6C34878D82A}">
+                    <a16:rowId xmlns:a16="http://schemas.microsoft.com/office/drawing/2014/main" val="10001"/>
+                  </a:ext>
+                </a:extLst>
               </a:tr>
               <a:tr h="500063">
                 <a:tc>
@@ -4916,7 +4758,7 @@
                       </a:r>
                     </a:p>
                   </a:txBody>
-                  <a:tcPr marL="91440" marR="91440" marT="45720" marB="45720">
+                  <a:tcPr>
                     <a:solidFill>
                       <a:srgbClr val="F5F4EF"/>
                     </a:solidFill>
@@ -4932,12 +4774,17 @@
                       </a:r>
                     </a:p>
                   </a:txBody>
-                  <a:tcPr marL="91440" marR="91440" marT="45720" marB="45720">
+                  <a:tcPr>
                     <a:solidFill>
                       <a:srgbClr val="F5F4EF"/>
                     </a:solidFill>
                   </a:tcPr>
                 </a:tc>
+                <a:extLst>
+                  <a:ext uri="{0D108BD9-81ED-4DB2-BD59-A6C34878D82A}">
+                    <a16:rowId xmlns:a16="http://schemas.microsoft.com/office/drawing/2014/main" val="10002"/>
+                  </a:ext>
+                </a:extLst>
               </a:tr>
               <a:tr h="500063">
                 <a:tc>
@@ -4950,7 +4797,7 @@
                       </a:r>
                     </a:p>
                   </a:txBody>
-                  <a:tcPr marL="91440" marR="91440" marT="45720" marB="45720">
+                  <a:tcPr>
                     <a:solidFill>
                       <a:srgbClr val="F5F4EF"/>
                     </a:solidFill>
@@ -4966,12 +4813,17 @@
                       </a:r>
                     </a:p>
                   </a:txBody>
-                  <a:tcPr marL="91440" marR="91440" marT="45720" marB="45720">
+                  <a:tcPr>
                     <a:solidFill>
                       <a:srgbClr val="F5F4EF"/>
                     </a:solidFill>
                   </a:tcPr>
                 </a:tc>
+                <a:extLst>
+                  <a:ext uri="{0D108BD9-81ED-4DB2-BD59-A6C34878D82A}">
+                    <a16:rowId xmlns:a16="http://schemas.microsoft.com/office/drawing/2014/main" val="10003"/>
+                  </a:ext>
+                </a:extLst>
               </a:tr>
               <a:tr h="500063">
                 <a:tc>
@@ -4992,7 +4844,7 @@
                       </a:r>
                     </a:p>
                   </a:txBody>
-                  <a:tcPr marL="91440" marR="91440" marT="45720" marB="45720">
+                  <a:tcPr>
                     <a:solidFill>
                       <a:srgbClr val="F5F4EF"/>
                     </a:solidFill>
@@ -5008,12 +4860,17 @@
                       </a:r>
                     </a:p>
                   </a:txBody>
-                  <a:tcPr marL="91440" marR="91440" marT="45720" marB="45720">
+                  <a:tcPr>
                     <a:solidFill>
                       <a:srgbClr val="F5F4EF"/>
                     </a:solidFill>
                   </a:tcPr>
                 </a:tc>
+                <a:extLst>
+                  <a:ext uri="{0D108BD9-81ED-4DB2-BD59-A6C34878D82A}">
+                    <a16:rowId xmlns:a16="http://schemas.microsoft.com/office/drawing/2014/main" val="10004"/>
+                  </a:ext>
+                </a:extLst>
               </a:tr>
               <a:tr h="500063">
                 <a:tc>
@@ -5034,7 +4891,7 @@
                       </a:r>
                     </a:p>
                   </a:txBody>
-                  <a:tcPr marL="91440" marR="91440" marT="45720" marB="45720">
+                  <a:tcPr>
                     <a:solidFill>
                       <a:srgbClr val="F5F4EF"/>
                     </a:solidFill>
@@ -5050,12 +4907,17 @@
                       </a:r>
                     </a:p>
                   </a:txBody>
-                  <a:tcPr marL="91440" marR="91440" marT="45720" marB="45720">
+                  <a:tcPr>
                     <a:solidFill>
                       <a:srgbClr val="F5F4EF"/>
                     </a:solidFill>
                   </a:tcPr>
                 </a:tc>
+                <a:extLst>
+                  <a:ext uri="{0D108BD9-81ED-4DB2-BD59-A6C34878D82A}">
+                    <a16:rowId xmlns:a16="http://schemas.microsoft.com/office/drawing/2014/main" val="10005"/>
+                  </a:ext>
+                </a:extLst>
               </a:tr>
             </a:tbl>
           </a:graphicData>
@@ -5063,37 +4925,37 @@
       </p:graphicFrame>
       <p:sp>
         <p:nvSpPr>
-          <p:cNvPr id="12" name="">
-            <a:extLst xmlns:a="http://schemas.openxmlformats.org/drawingml/2006/main">
+          <p:cNvPr id="12" name="Rectangle 11">
+            <a:extLst>
               <a:ext uri="{FF2B5EF4-FFF2-40B4-BE49-F238E27FC236}">
                 <a16:creationId xmlns:a16="http://schemas.microsoft.com/office/drawing/2014/main" id="{53E3152F-9ACB-4845-AA41-2553BF79334F}"/>
               </a:ext>
             </a:extLst>
           </p:cNvPr>
           <p:cNvSpPr>
-            <a:spLocks xmlns:a="http://schemas.openxmlformats.org/drawingml/2006/main" noGrp="1"/>
-          </p:cNvSpPr>
-          <p:nvPr/>
-        </p:nvSpPr>
-        <p:spPr>
-          <a:xfrm xmlns:a="http://schemas.openxmlformats.org/drawingml/2006/main">
+            <a:spLocks noGrp="1"/>
+          </p:cNvSpPr>
+          <p:nvPr/>
+        </p:nvSpPr>
+        <p:spPr>
+          <a:xfrm>
             <a:off x="609600" y="5934075"/>
             <a:ext cx="10858500" cy="495300"/>
           </a:xfrm>
-          <a:prstGeom xmlns:a="http://schemas.openxmlformats.org/drawingml/2006/main" prst="rect">
-            <a:avLst/>
-          </a:prstGeom>
-          <a:noFill xmlns:a="http://schemas.openxmlformats.org/drawingml/2006/main"/>
-          <a:ln xmlns:a="http://schemas.openxmlformats.org/drawingml/2006/main" w="0">
+          <a:prstGeom prst="rect">
+            <a:avLst/>
+          </a:prstGeom>
+          <a:noFill/>
+          <a:ln w="0">
             <a:noFill/>
           </a:ln>
         </p:spPr>
         <p:txBody>
-          <a:bodyPr xmlns:a="http://schemas.openxmlformats.org/drawingml/2006/main">
+          <a:bodyPr>
             <a:noAutofit/>
           </a:bodyPr>
-          <a:lstStyle xmlns:a="http://schemas.openxmlformats.org/drawingml/2006/main"/>
-          <a:p xmlns:a="http://schemas.openxmlformats.org/drawingml/2006/main">
+          <a:lstStyle/>
+          <a:p>
             <a:pPr>
               <a:defRPr sz="1500" b="0">
                 <a:solidFill>
@@ -5125,17 +4987,21 @@
       </p:ext>
     </p:extLst>
   </p:cSld>
+  <p:clrMapOvr>
+    <a:masterClrMapping/>
+  </p:clrMapOvr>
 </p:sld>
 </file>
 
 <file path=ppt/slides/slide6.xml><?xml version="1.0" encoding="utf-8"?>
-<p:sld xmlns:p="http://schemas.openxmlformats.org/presentationml/2006/main">
+<p:sld xmlns:a="http://schemas.openxmlformats.org/drawingml/2006/main" xmlns:r="http://schemas.openxmlformats.org/officeDocument/2006/relationships" xmlns:p="http://schemas.openxmlformats.org/presentationml/2006/main">
   <p:cSld>
     <p:bg>
       <p:bgPr>
-        <a:solidFill xmlns:a="http://schemas.openxmlformats.org/drawingml/2006/main">
+        <a:solidFill>
           <a:srgbClr val="F5F4EF"/>
         </a:solidFill>
+        <a:effectLst/>
       </p:bgPr>
     </p:bg>
     <p:spTree>
@@ -5145,41 +5011,46 @@
         <p:nvPr/>
       </p:nvGrpSpPr>
       <p:grpSpPr>
-        <a:xfrm xmlns:a="http://schemas.openxmlformats.org/drawingml/2006/main"/>
+        <a:xfrm>
+          <a:off x="0" y="0"/>
+          <a:ext cx="0" cy="0"/>
+          <a:chOff x="0" y="0"/>
+          <a:chExt cx="0" cy="0"/>
+        </a:xfrm>
       </p:grpSpPr>
       <p:sp>
         <p:nvSpPr>
-          <p:cNvPr id="12" name="">
-            <a:extLst xmlns:a="http://schemas.openxmlformats.org/drawingml/2006/main">
+          <p:cNvPr id="12" name="Rectangle 11">
+            <a:extLst>
               <a:ext uri="{FF2B5EF4-FFF2-40B4-BE49-F238E27FC236}">
                 <a16:creationId xmlns:a16="http://schemas.microsoft.com/office/drawing/2014/main" id="{BC389F48-7629-4AD2-B4AD-5458322DA05D}"/>
               </a:ext>
             </a:extLst>
           </p:cNvPr>
           <p:cNvSpPr>
-            <a:spLocks xmlns:a="http://schemas.openxmlformats.org/drawingml/2006/main" noGrp="1"/>
-          </p:cNvSpPr>
-          <p:nvPr/>
-        </p:nvSpPr>
-        <p:spPr>
-          <a:xfrm xmlns:a="http://schemas.openxmlformats.org/drawingml/2006/main">
+            <a:spLocks noGrp="1"/>
+          </p:cNvSpPr>
+          <p:nvPr/>
+        </p:nvSpPr>
+        <p:spPr>
+          <a:xfrm>
             <a:off x="609600" y="409575"/>
             <a:ext cx="10953750" cy="714375"/>
           </a:xfrm>
-          <a:prstGeom xmlns:a="http://schemas.openxmlformats.org/drawingml/2006/main" prst="rect">
-            <a:avLst/>
-          </a:prstGeom>
-          <a:noFill xmlns:a="http://schemas.openxmlformats.org/drawingml/2006/main"/>
-          <a:ln xmlns:a="http://schemas.openxmlformats.org/drawingml/2006/main" w="0">
+          <a:prstGeom prst="rect">
+            <a:avLst/>
+          </a:prstGeom>
+          <a:noFill/>
+          <a:ln w="0">
             <a:noFill/>
           </a:ln>
         </p:spPr>
         <p:txBody>
-          <a:bodyPr xmlns:a="http://schemas.openxmlformats.org/drawingml/2006/main">
+          <a:bodyPr>
             <a:noAutofit/>
           </a:bodyPr>
-          <a:lstStyle xmlns:a="http://schemas.openxmlformats.org/drawingml/2006/main"/>
-          <a:p xmlns:a="http://schemas.openxmlformats.org/drawingml/2006/main">
+          <a:lstStyle/>
+          <a:p>
             <a:pPr>
               <a:defRPr sz="3225" b="1">
                 <a:solidFill>
@@ -5206,37 +5077,37 @@
       </p:sp>
       <p:sp>
         <p:nvSpPr>
-          <p:cNvPr id="2" name="">
-            <a:extLst xmlns:a="http://schemas.openxmlformats.org/drawingml/2006/main">
+          <p:cNvPr id="2" name="Rectangle 1">
+            <a:extLst>
               <a:ext uri="{FF2B5EF4-FFF2-40B4-BE49-F238E27FC236}">
                 <a16:creationId xmlns:a16="http://schemas.microsoft.com/office/drawing/2014/main" id="{1F279D86-D8BF-4076-A107-1F1D8EDDFB29}"/>
               </a:ext>
             </a:extLst>
           </p:cNvPr>
           <p:cNvSpPr>
-            <a:spLocks xmlns:a="http://schemas.openxmlformats.org/drawingml/2006/main" noGrp="1"/>
-          </p:cNvSpPr>
-          <p:nvPr/>
-        </p:nvSpPr>
-        <p:spPr>
-          <a:xfrm xmlns:a="http://schemas.openxmlformats.org/drawingml/2006/main">
+            <a:spLocks noGrp="1"/>
+          </p:cNvSpPr>
+          <p:nvPr/>
+        </p:nvSpPr>
+        <p:spPr>
+          <a:xfrm>
             <a:off x="11144250" y="6324600"/>
             <a:ext cx="476250" cy="285750"/>
           </a:xfrm>
-          <a:prstGeom xmlns:a="http://schemas.openxmlformats.org/drawingml/2006/main" prst="rect">
-            <a:avLst/>
-          </a:prstGeom>
-          <a:noFill xmlns:a="http://schemas.openxmlformats.org/drawingml/2006/main"/>
-          <a:ln xmlns:a="http://schemas.openxmlformats.org/drawingml/2006/main" w="0">
+          <a:prstGeom prst="rect">
+            <a:avLst/>
+          </a:prstGeom>
+          <a:noFill/>
+          <a:ln w="0">
             <a:noFill/>
           </a:ln>
         </p:spPr>
         <p:txBody>
-          <a:bodyPr xmlns:a="http://schemas.openxmlformats.org/drawingml/2006/main">
+          <a:bodyPr>
             <a:noAutofit/>
           </a:bodyPr>
-          <a:lstStyle xmlns:a="http://schemas.openxmlformats.org/drawingml/2006/main"/>
-          <a:p xmlns:a="http://schemas.openxmlformats.org/drawingml/2006/main">
+          <a:lstStyle/>
+          <a:p>
             <a:pPr>
               <a:defRPr sz="1350" b="0">
                 <a:solidFill>
@@ -5263,37 +5134,37 @@
       </p:sp>
       <p:sp>
         <p:nvSpPr>
-          <p:cNvPr id="3" name="">
-            <a:extLst xmlns:a="http://schemas.openxmlformats.org/drawingml/2006/main">
+          <p:cNvPr id="3" name="Rectangle 2">
+            <a:extLst>
               <a:ext uri="{FF2B5EF4-FFF2-40B4-BE49-F238E27FC236}">
                 <a16:creationId xmlns:a16="http://schemas.microsoft.com/office/drawing/2014/main" id="{0E181C90-9565-4CBE-99B0-94615C2FE127}"/>
               </a:ext>
             </a:extLst>
           </p:cNvPr>
           <p:cNvSpPr>
-            <a:spLocks xmlns:a="http://schemas.openxmlformats.org/drawingml/2006/main" noGrp="1"/>
-          </p:cNvSpPr>
-          <p:nvPr/>
-        </p:nvSpPr>
-        <p:spPr>
-          <a:xfrm xmlns:a="http://schemas.openxmlformats.org/drawingml/2006/main">
+            <a:spLocks noGrp="1"/>
+          </p:cNvSpPr>
+          <p:nvPr/>
+        </p:nvSpPr>
+        <p:spPr>
+          <a:xfrm>
             <a:off x="609600" y="1466850"/>
             <a:ext cx="6286500" cy="447675"/>
           </a:xfrm>
-          <a:prstGeom xmlns:a="http://schemas.openxmlformats.org/drawingml/2006/main" prst="rect">
-            <a:avLst/>
-          </a:prstGeom>
-          <a:noFill xmlns:a="http://schemas.openxmlformats.org/drawingml/2006/main"/>
-          <a:ln xmlns:a="http://schemas.openxmlformats.org/drawingml/2006/main" w="0">
+          <a:prstGeom prst="rect">
+            <a:avLst/>
+          </a:prstGeom>
+          <a:noFill/>
+          <a:ln w="0">
             <a:noFill/>
           </a:ln>
         </p:spPr>
         <p:txBody>
-          <a:bodyPr xmlns:a="http://schemas.openxmlformats.org/drawingml/2006/main">
+          <a:bodyPr>
             <a:noAutofit/>
           </a:bodyPr>
-          <a:lstStyle xmlns:a="http://schemas.openxmlformats.org/drawingml/2006/main"/>
-          <a:p xmlns:a="http://schemas.openxmlformats.org/drawingml/2006/main">
+          <a:lstStyle/>
+          <a:p>
             <a:pPr>
               <a:defRPr sz="2250" b="1">
                 <a:solidFill>
@@ -5320,37 +5191,37 @@
       </p:sp>
       <p:sp>
         <p:nvSpPr>
-          <p:cNvPr id="4" name="">
-            <a:extLst xmlns:a="http://schemas.openxmlformats.org/drawingml/2006/main">
+          <p:cNvPr id="4" name="Rectangle 3">
+            <a:extLst>
               <a:ext uri="{FF2B5EF4-FFF2-40B4-BE49-F238E27FC236}">
                 <a16:creationId xmlns:a16="http://schemas.microsoft.com/office/drawing/2014/main" id="{F76A8715-957D-41E5-BAD0-0B3F1591C4E3}"/>
               </a:ext>
             </a:extLst>
           </p:cNvPr>
           <p:cNvSpPr>
-            <a:spLocks xmlns:a="http://schemas.openxmlformats.org/drawingml/2006/main" noGrp="1"/>
-          </p:cNvSpPr>
-          <p:nvPr/>
-        </p:nvSpPr>
-        <p:spPr>
-          <a:xfrm xmlns:a="http://schemas.openxmlformats.org/drawingml/2006/main">
+            <a:spLocks noGrp="1"/>
+          </p:cNvSpPr>
+          <p:nvPr/>
+        </p:nvSpPr>
+        <p:spPr>
+          <a:xfrm>
             <a:off x="609600" y="2114550"/>
             <a:ext cx="6667500" cy="952500"/>
           </a:xfrm>
-          <a:prstGeom xmlns:a="http://schemas.openxmlformats.org/drawingml/2006/main" prst="rect">
-            <a:avLst/>
-          </a:prstGeom>
-          <a:noFill xmlns:a="http://schemas.openxmlformats.org/drawingml/2006/main"/>
-          <a:ln xmlns:a="http://schemas.openxmlformats.org/drawingml/2006/main" w="0">
+          <a:prstGeom prst="rect">
+            <a:avLst/>
+          </a:prstGeom>
+          <a:noFill/>
+          <a:ln w="0">
             <a:noFill/>
           </a:ln>
         </p:spPr>
         <p:txBody>
-          <a:bodyPr xmlns:a="http://schemas.openxmlformats.org/drawingml/2006/main">
+          <a:bodyPr>
             <a:noAutofit/>
           </a:bodyPr>
-          <a:lstStyle xmlns:a="http://schemas.openxmlformats.org/drawingml/2006/main"/>
-          <a:p xmlns:a="http://schemas.openxmlformats.org/drawingml/2006/main">
+          <a:lstStyle/>
+          <a:p>
             <a:pPr>
               <a:defRPr sz="2025" b="0">
                 <a:solidFill>
@@ -5373,7 +5244,7 @@
               <a:t>"How do we know which parts to remove to repair another one?" Today that comes from a hand-reviewed adjacency table (bodywork only).</a:t>
             </a:r>
           </a:p>
-          <a:p xmlns:a="http://schemas.openxmlformats.org/drawingml/2006/main">
+          <a:p>
             <a:pPr>
               <a:defRPr sz="2025" b="0">
                 <a:solidFill>
@@ -5384,53 +5255,50 @@
                 <a:cs typeface="Arial"/>
               </a:defRPr>
             </a:pPr>
-            <a:r>
-              <a:rPr sz="2025" b="0">
-                <a:solidFill>
-                  <a:srgbClr val="102C36"/>
-                </a:solidFill>
-                <a:latin typeface="Arial"/>
-                <a:ea typeface="Arial"/>
-                <a:cs typeface="Arial"/>
-              </a:rPr>
-              <a:t/>
-            </a:r>
-          </a:p>
-        </p:txBody>
-      </p:sp>
-      <p:sp>
-        <p:nvSpPr>
-          <p:cNvPr id="5" name="">
-            <a:extLst xmlns:a="http://schemas.openxmlformats.org/drawingml/2006/main">
+            <a:endParaRPr sz="2025" b="0">
+              <a:solidFill>
+                <a:srgbClr val="102C36"/>
+              </a:solidFill>
+              <a:latin typeface="Arial"/>
+              <a:ea typeface="Arial"/>
+              <a:cs typeface="Arial"/>
+            </a:endParaRPr>
+          </a:p>
+        </p:txBody>
+      </p:sp>
+      <p:sp>
+        <p:nvSpPr>
+          <p:cNvPr id="5" name="Rectangle 4">
+            <a:extLst>
               <a:ext uri="{FF2B5EF4-FFF2-40B4-BE49-F238E27FC236}">
                 <a16:creationId xmlns:a16="http://schemas.microsoft.com/office/drawing/2014/main" id="{B819C22A-19B2-4757-8D54-2B69F0CDC573}"/>
               </a:ext>
             </a:extLst>
           </p:cNvPr>
           <p:cNvSpPr>
-            <a:spLocks xmlns:a="http://schemas.openxmlformats.org/drawingml/2006/main" noGrp="1"/>
-          </p:cNvSpPr>
-          <p:nvPr/>
-        </p:nvSpPr>
-        <p:spPr>
-          <a:xfrm xmlns:a="http://schemas.openxmlformats.org/drawingml/2006/main">
+            <a:spLocks noGrp="1"/>
+          </p:cNvSpPr>
+          <p:nvPr/>
+        </p:nvSpPr>
+        <p:spPr>
+          <a:xfrm>
             <a:off x="609600" y="3381375"/>
             <a:ext cx="6667500" cy="857250"/>
           </a:xfrm>
-          <a:prstGeom xmlns:a="http://schemas.openxmlformats.org/drawingml/2006/main" prst="rect">
-            <a:avLst/>
-          </a:prstGeom>
-          <a:noFill xmlns:a="http://schemas.openxmlformats.org/drawingml/2006/main"/>
-          <a:ln xmlns:a="http://schemas.openxmlformats.org/drawingml/2006/main" w="0">
+          <a:prstGeom prst="rect">
+            <a:avLst/>
+          </a:prstGeom>
+          <a:noFill/>
+          <a:ln w="0">
             <a:noFill/>
           </a:ln>
         </p:spPr>
         <p:txBody>
-          <a:bodyPr xmlns:a="http://schemas.openxmlformats.org/drawingml/2006/main">
+          <a:bodyPr>
             <a:noAutofit/>
           </a:bodyPr>
-          <a:lstStyle xmlns:a="http://schemas.openxmlformats.org/drawingml/2006/main"/>
-          <a:p xmlns:a="http://schemas.openxmlformats.org/drawingml/2006/main">
+          <a:lstStyle/>
+          <a:p>
             <a:pPr>
               <a:defRPr sz="2025" b="0">
                 <a:solidFill>
@@ -5442,7 +5310,7 @@
               </a:defRPr>
             </a:pPr>
             <a:r>
-              <a:rPr sz="2025" b="0">
+              <a:rPr sz="2025" b="0" dirty="0">
                 <a:solidFill>
                   <a:srgbClr val="102C36"/>
                 </a:solidFill>
@@ -5453,7 +5321,7 @@
               <a:t>The dataset has NO parts, operation or removal labels — so remove-and-install is expert-rule-based and unverified. Mechanical R&amp;I (brake pads → wheels) is out of scope.</a:t>
             </a:r>
           </a:p>
-          <a:p xmlns:a="http://schemas.openxmlformats.org/drawingml/2006/main">
+          <a:p>
             <a:pPr>
               <a:defRPr sz="2025" b="0">
                 <a:solidFill>
@@ -5464,53 +5332,50 @@
                 <a:cs typeface="Arial"/>
               </a:defRPr>
             </a:pPr>
-            <a:r>
-              <a:rPr sz="2025" b="0">
-                <a:solidFill>
-                  <a:srgbClr val="102C36"/>
-                </a:solidFill>
-                <a:latin typeface="Arial"/>
-                <a:ea typeface="Arial"/>
-                <a:cs typeface="Arial"/>
-              </a:rPr>
-              <a:t/>
-            </a:r>
-          </a:p>
-        </p:txBody>
-      </p:sp>
-      <p:sp>
-        <p:nvSpPr>
-          <p:cNvPr id="6" name="">
-            <a:extLst xmlns:a="http://schemas.openxmlformats.org/drawingml/2006/main">
+            <a:endParaRPr sz="2025" b="0" dirty="0">
+              <a:solidFill>
+                <a:srgbClr val="102C36"/>
+              </a:solidFill>
+              <a:latin typeface="Arial"/>
+              <a:ea typeface="Arial"/>
+              <a:cs typeface="Arial"/>
+            </a:endParaRPr>
+          </a:p>
+        </p:txBody>
+      </p:sp>
+      <p:sp>
+        <p:nvSpPr>
+          <p:cNvPr id="6" name="Rectangle 5">
+            <a:extLst>
               <a:ext uri="{FF2B5EF4-FFF2-40B4-BE49-F238E27FC236}">
                 <a16:creationId xmlns:a16="http://schemas.microsoft.com/office/drawing/2014/main" id="{CD561742-7960-4149-933B-C9EE70756C2D}"/>
               </a:ext>
             </a:extLst>
           </p:cNvPr>
           <p:cNvSpPr>
-            <a:spLocks xmlns:a="http://schemas.openxmlformats.org/drawingml/2006/main" noGrp="1"/>
-          </p:cNvSpPr>
-          <p:nvPr/>
-        </p:nvSpPr>
-        <p:spPr>
-          <a:xfrm xmlns:a="http://schemas.openxmlformats.org/drawingml/2006/main">
-            <a:off x="609600" y="4505325"/>
+            <a:spLocks noGrp="1"/>
+          </p:cNvSpPr>
+          <p:nvPr/>
+        </p:nvSpPr>
+        <p:spPr>
+          <a:xfrm>
+            <a:off x="609600" y="4733925"/>
             <a:ext cx="6667500" cy="895350"/>
           </a:xfrm>
-          <a:prstGeom xmlns:a="http://schemas.openxmlformats.org/drawingml/2006/main" prst="rect">
-            <a:avLst/>
-          </a:prstGeom>
-          <a:noFill xmlns:a="http://schemas.openxmlformats.org/drawingml/2006/main"/>
-          <a:ln xmlns:a="http://schemas.openxmlformats.org/drawingml/2006/main" w="0">
+          <a:prstGeom prst="rect">
+            <a:avLst/>
+          </a:prstGeom>
+          <a:noFill/>
+          <a:ln w="0">
             <a:noFill/>
           </a:ln>
         </p:spPr>
         <p:txBody>
-          <a:bodyPr xmlns:a="http://schemas.openxmlformats.org/drawingml/2006/main">
+          <a:bodyPr>
             <a:noAutofit/>
           </a:bodyPr>
-          <a:lstStyle xmlns:a="http://schemas.openxmlformats.org/drawingml/2006/main"/>
-          <a:p xmlns:a="http://schemas.openxmlformats.org/drawingml/2006/main">
+          <a:lstStyle/>
+          <a:p>
             <a:pPr>
               <a:defRPr sz="2025" b="0">
                 <a:solidFill>
@@ -5522,7 +5387,7 @@
               </a:defRPr>
             </a:pPr>
             <a:r>
-              <a:rPr sz="2025" b="0">
+              <a:rPr sz="2025" b="0" dirty="0">
                 <a:solidFill>
                   <a:srgbClr val="102C36"/>
                 </a:solidFill>
@@ -5533,7 +5398,7 @@
               <a:t>Severity is a data limit: the identical sentence carries light, medium AND severe labels — a ~79.5% ceiling, not a model gap.</a:t>
             </a:r>
           </a:p>
-          <a:p xmlns:a="http://schemas.openxmlformats.org/drawingml/2006/main">
+          <a:p>
             <a:pPr>
               <a:defRPr sz="2025" b="0">
                 <a:solidFill>
@@ -5544,53 +5409,50 @@
                 <a:cs typeface="Arial"/>
               </a:defRPr>
             </a:pPr>
-            <a:r>
-              <a:rPr sz="2025" b="0">
-                <a:solidFill>
-                  <a:srgbClr val="102C36"/>
-                </a:solidFill>
-                <a:latin typeface="Arial"/>
-                <a:ea typeface="Arial"/>
-                <a:cs typeface="Arial"/>
-              </a:rPr>
-              <a:t/>
-            </a:r>
-          </a:p>
-        </p:txBody>
-      </p:sp>
-      <p:sp>
-        <p:nvSpPr>
-          <p:cNvPr id="7" name="">
-            <a:extLst xmlns:a="http://schemas.openxmlformats.org/drawingml/2006/main">
+            <a:endParaRPr sz="2025" b="0" dirty="0">
+              <a:solidFill>
+                <a:srgbClr val="102C36"/>
+              </a:solidFill>
+              <a:latin typeface="Arial"/>
+              <a:ea typeface="Arial"/>
+              <a:cs typeface="Arial"/>
+            </a:endParaRPr>
+          </a:p>
+        </p:txBody>
+      </p:sp>
+      <p:sp>
+        <p:nvSpPr>
+          <p:cNvPr id="7" name="Rectangle 6">
+            <a:extLst>
               <a:ext uri="{FF2B5EF4-FFF2-40B4-BE49-F238E27FC236}">
                 <a16:creationId xmlns:a16="http://schemas.microsoft.com/office/drawing/2014/main" id="{05C8C0DA-366F-48DC-9AED-DBFE564313CB}"/>
               </a:ext>
             </a:extLst>
           </p:cNvPr>
           <p:cNvSpPr>
-            <a:spLocks xmlns:a="http://schemas.openxmlformats.org/drawingml/2006/main" noGrp="1"/>
-          </p:cNvSpPr>
-          <p:nvPr/>
-        </p:nvSpPr>
-        <p:spPr>
-          <a:xfrm xmlns:a="http://schemas.openxmlformats.org/drawingml/2006/main">
+            <a:spLocks noGrp="1"/>
+          </p:cNvSpPr>
+          <p:nvPr/>
+        </p:nvSpPr>
+        <p:spPr>
+          <a:xfrm>
             <a:off x="7962900" y="1466850"/>
             <a:ext cx="3333750" cy="447675"/>
           </a:xfrm>
-          <a:prstGeom xmlns:a="http://schemas.openxmlformats.org/drawingml/2006/main" prst="rect">
-            <a:avLst/>
-          </a:prstGeom>
-          <a:noFill xmlns:a="http://schemas.openxmlformats.org/drawingml/2006/main"/>
-          <a:ln xmlns:a="http://schemas.openxmlformats.org/drawingml/2006/main" w="0">
+          <a:prstGeom prst="rect">
+            <a:avLst/>
+          </a:prstGeom>
+          <a:noFill/>
+          <a:ln w="0">
             <a:noFill/>
           </a:ln>
         </p:spPr>
         <p:txBody>
-          <a:bodyPr xmlns:a="http://schemas.openxmlformats.org/drawingml/2006/main">
+          <a:bodyPr>
             <a:noAutofit/>
           </a:bodyPr>
-          <a:lstStyle xmlns:a="http://schemas.openxmlformats.org/drawingml/2006/main"/>
-          <a:p xmlns:a="http://schemas.openxmlformats.org/drawingml/2006/main">
+          <a:lstStyle/>
+          <a:p>
             <a:pPr>
               <a:defRPr sz="2250" b="1">
                 <a:solidFill>
@@ -5617,37 +5479,37 @@
       </p:sp>
       <p:sp>
         <p:nvSpPr>
-          <p:cNvPr id="8" name="">
-            <a:extLst xmlns:a="http://schemas.openxmlformats.org/drawingml/2006/main">
+          <p:cNvPr id="8" name="Rectangle 7">
+            <a:extLst>
               <a:ext uri="{FF2B5EF4-FFF2-40B4-BE49-F238E27FC236}">
                 <a16:creationId xmlns:a16="http://schemas.microsoft.com/office/drawing/2014/main" id="{3B75BDFE-74AA-4D75-B56B-D4D3E2FBC8FF}"/>
               </a:ext>
             </a:extLst>
           </p:cNvPr>
           <p:cNvSpPr>
-            <a:spLocks xmlns:a="http://schemas.openxmlformats.org/drawingml/2006/main" noGrp="1"/>
-          </p:cNvSpPr>
-          <p:nvPr/>
-        </p:nvSpPr>
-        <p:spPr>
-          <a:xfrm xmlns:a="http://schemas.openxmlformats.org/drawingml/2006/main">
+            <a:spLocks noGrp="1"/>
+          </p:cNvSpPr>
+          <p:nvPr/>
+        </p:nvSpPr>
+        <p:spPr>
+          <a:xfrm>
             <a:off x="7962900" y="2219325"/>
             <a:ext cx="3333750" cy="876300"/>
           </a:xfrm>
-          <a:prstGeom xmlns:a="http://schemas.openxmlformats.org/drawingml/2006/main" prst="rect">
-            <a:avLst/>
-          </a:prstGeom>
-          <a:noFill xmlns:a="http://schemas.openxmlformats.org/drawingml/2006/main"/>
-          <a:ln xmlns:a="http://schemas.openxmlformats.org/drawingml/2006/main" w="0">
+          <a:prstGeom prst="rect">
+            <a:avLst/>
+          </a:prstGeom>
+          <a:noFill/>
+          <a:ln w="0">
             <a:noFill/>
           </a:ln>
         </p:spPr>
         <p:txBody>
-          <a:bodyPr xmlns:a="http://schemas.openxmlformats.org/drawingml/2006/main">
+          <a:bodyPr>
             <a:noAutofit/>
           </a:bodyPr>
-          <a:lstStyle xmlns:a="http://schemas.openxmlformats.org/drawingml/2006/main"/>
-          <a:p xmlns:a="http://schemas.openxmlformats.org/drawingml/2006/main">
+          <a:lstStyle/>
+          <a:p>
             <a:pPr>
               <a:defRPr sz="1875" b="0">
                 <a:solidFill>
@@ -5670,7 +5532,7 @@
               <a:t>Validate the adjacency</a:t>
             </a:r>
           </a:p>
-          <a:p xmlns:a="http://schemas.openxmlformats.org/drawingml/2006/main">
+          <a:p>
             <a:pPr>
               <a:defRPr sz="1875" b="0">
                 <a:solidFill>
@@ -5697,37 +5559,37 @@
       </p:sp>
       <p:sp>
         <p:nvSpPr>
-          <p:cNvPr id="9" name="">
-            <a:extLst xmlns:a="http://schemas.openxmlformats.org/drawingml/2006/main">
+          <p:cNvPr id="9" name="Rectangle 8">
+            <a:extLst>
               <a:ext uri="{FF2B5EF4-FFF2-40B4-BE49-F238E27FC236}">
                 <a16:creationId xmlns:a16="http://schemas.microsoft.com/office/drawing/2014/main" id="{083F0F77-EC28-4E74-B2DD-1DAC3E22F23D}"/>
               </a:ext>
             </a:extLst>
           </p:cNvPr>
           <p:cNvSpPr>
-            <a:spLocks xmlns:a="http://schemas.openxmlformats.org/drawingml/2006/main" noGrp="1"/>
-          </p:cNvSpPr>
-          <p:nvPr/>
-        </p:nvSpPr>
-        <p:spPr>
-          <a:xfrm xmlns:a="http://schemas.openxmlformats.org/drawingml/2006/main">
+            <a:spLocks noGrp="1"/>
+          </p:cNvSpPr>
+          <p:nvPr/>
+        </p:nvSpPr>
+        <p:spPr>
+          <a:xfrm>
             <a:off x="7962900" y="3457575"/>
             <a:ext cx="3333750" cy="876300"/>
           </a:xfrm>
-          <a:prstGeom xmlns:a="http://schemas.openxmlformats.org/drawingml/2006/main" prst="rect">
-            <a:avLst/>
-          </a:prstGeom>
-          <a:noFill xmlns:a="http://schemas.openxmlformats.org/drawingml/2006/main"/>
-          <a:ln xmlns:a="http://schemas.openxmlformats.org/drawingml/2006/main" w="0">
+          <a:prstGeom prst="rect">
+            <a:avLst/>
+          </a:prstGeom>
+          <a:noFill/>
+          <a:ln w="0">
             <a:noFill/>
           </a:ln>
         </p:spPr>
         <p:txBody>
-          <a:bodyPr xmlns:a="http://schemas.openxmlformats.org/drawingml/2006/main">
+          <a:bodyPr>
             <a:noAutofit/>
           </a:bodyPr>
-          <a:lstStyle xmlns:a="http://schemas.openxmlformats.org/drawingml/2006/main"/>
-          <a:p xmlns:a="http://schemas.openxmlformats.org/drawingml/2006/main">
+          <a:lstStyle/>
+          <a:p>
             <a:pPr>
               <a:defRPr sz="1875" b="0">
                 <a:solidFill>
@@ -5750,7 +5612,7 @@
               <a:t>Learn R&amp;I from real</a:t>
             </a:r>
           </a:p>
-          <a:p xmlns:a="http://schemas.openxmlformats.org/drawingml/2006/main">
+          <a:p>
             <a:pPr>
               <a:defRPr sz="1875" b="0">
                 <a:solidFill>
@@ -5777,37 +5639,37 @@
       </p:sp>
       <p:sp>
         <p:nvSpPr>
-          <p:cNvPr id="10" name="">
-            <a:extLst xmlns:a="http://schemas.openxmlformats.org/drawingml/2006/main">
+          <p:cNvPr id="10" name="Rectangle 9">
+            <a:extLst>
               <a:ext uri="{FF2B5EF4-FFF2-40B4-BE49-F238E27FC236}">
                 <a16:creationId xmlns:a16="http://schemas.microsoft.com/office/drawing/2014/main" id="{E7E7DBCA-9497-4FB0-A559-61AD4249BD49}"/>
               </a:ext>
             </a:extLst>
           </p:cNvPr>
           <p:cNvSpPr>
-            <a:spLocks xmlns:a="http://schemas.openxmlformats.org/drawingml/2006/main" noGrp="1"/>
-          </p:cNvSpPr>
-          <p:nvPr/>
-        </p:nvSpPr>
-        <p:spPr>
-          <a:xfrm xmlns:a="http://schemas.openxmlformats.org/drawingml/2006/main">
+            <a:spLocks noGrp="1"/>
+          </p:cNvSpPr>
+          <p:nvPr/>
+        </p:nvSpPr>
+        <p:spPr>
+          <a:xfrm>
             <a:off x="7962900" y="4695825"/>
             <a:ext cx="3333750" cy="876300"/>
           </a:xfrm>
-          <a:prstGeom xmlns:a="http://schemas.openxmlformats.org/drawingml/2006/main" prst="rect">
-            <a:avLst/>
-          </a:prstGeom>
-          <a:noFill xmlns:a="http://schemas.openxmlformats.org/drawingml/2006/main"/>
-          <a:ln xmlns:a="http://schemas.openxmlformats.org/drawingml/2006/main" w="0">
+          <a:prstGeom prst="rect">
+            <a:avLst/>
+          </a:prstGeom>
+          <a:noFill/>
+          <a:ln w="0">
             <a:noFill/>
           </a:ln>
         </p:spPr>
         <p:txBody>
-          <a:bodyPr xmlns:a="http://schemas.openxmlformats.org/drawingml/2006/main">
+          <a:bodyPr>
             <a:noAutofit/>
           </a:bodyPr>
-          <a:lstStyle xmlns:a="http://schemas.openxmlformats.org/drawingml/2006/main"/>
-          <a:p xmlns:a="http://schemas.openxmlformats.org/drawingml/2006/main">
+          <a:lstStyle/>
+          <a:p>
             <a:pPr>
               <a:defRPr sz="1875" b="0">
                 <a:solidFill>
@@ -5830,7 +5692,7 @@
               <a:t>Test on real</a:t>
             </a:r>
           </a:p>
-          <a:p xmlns:a="http://schemas.openxmlformats.org/drawingml/2006/main">
+          <a:p>
             <a:pPr>
               <a:defRPr sz="1875" b="0">
                 <a:solidFill>
@@ -5857,37 +5719,37 @@
       </p:sp>
       <p:sp>
         <p:nvSpPr>
-          <p:cNvPr id="11" name="">
-            <a:extLst xmlns:a="http://schemas.openxmlformats.org/drawingml/2006/main">
+          <p:cNvPr id="11" name="Rectangle 10">
+            <a:extLst>
               <a:ext uri="{FF2B5EF4-FFF2-40B4-BE49-F238E27FC236}">
                 <a16:creationId xmlns:a16="http://schemas.microsoft.com/office/drawing/2014/main" id="{CD34A495-CE5A-4E7E-9DBF-ED860B8E05B7}"/>
               </a:ext>
             </a:extLst>
           </p:cNvPr>
           <p:cNvSpPr>
-            <a:spLocks xmlns:a="http://schemas.openxmlformats.org/drawingml/2006/main" noGrp="1"/>
-          </p:cNvSpPr>
-          <p:nvPr/>
-        </p:nvSpPr>
-        <p:spPr>
-          <a:xfrm xmlns:a="http://schemas.openxmlformats.org/drawingml/2006/main">
+            <a:spLocks noGrp="1"/>
+          </p:cNvSpPr>
+          <p:nvPr/>
+        </p:nvSpPr>
+        <p:spPr>
+          <a:xfrm>
             <a:off x="609600" y="6000750"/>
             <a:ext cx="10763250" cy="381000"/>
           </a:xfrm>
-          <a:prstGeom xmlns:a="http://schemas.openxmlformats.org/drawingml/2006/main" prst="rect">
-            <a:avLst/>
-          </a:prstGeom>
-          <a:noFill xmlns:a="http://schemas.openxmlformats.org/drawingml/2006/main"/>
-          <a:ln xmlns:a="http://schemas.openxmlformats.org/drawingml/2006/main" w="0">
+          <a:prstGeom prst="rect">
+            <a:avLst/>
+          </a:prstGeom>
+          <a:noFill/>
+          <a:ln w="0">
             <a:noFill/>
           </a:ln>
         </p:spPr>
         <p:txBody>
-          <a:bodyPr xmlns:a="http://schemas.openxmlformats.org/drawingml/2006/main">
+          <a:bodyPr>
             <a:noAutofit/>
           </a:bodyPr>
-          <a:lstStyle xmlns:a="http://schemas.openxmlformats.org/drawingml/2006/main"/>
-          <a:p xmlns:a="http://schemas.openxmlformats.org/drawingml/2006/main">
+          <a:lstStyle/>
+          <a:p>
             <a:pPr>
               <a:defRPr sz="1650" b="0">
                 <a:solidFill>
@@ -5919,6 +5781,9 @@
       </p:ext>
     </p:extLst>
   </p:cSld>
+  <p:clrMapOvr>
+    <a:masterClrMapping/>
+  </p:clrMapOvr>
 </p:sld>
 </file>
 
@@ -6164,5 +6029,254 @@
       </a:bgFillStyleLst>
     </a:fmtScheme>
   </a:themeElements>
+  <a:objectDefaults/>
+  <a:extraClrSchemeLst/>
+</a:theme>
+</file>
+
+<file path=ppt/theme/theme2.xml><?xml version="1.0" encoding="utf-8"?>
+<a:theme xmlns:a="http://schemas.openxmlformats.org/drawingml/2006/main" name="ChatGPT">
+  <a:themeElements>
+    <a:clrScheme name="ChatGPT">
+      <a:dk1>
+        <a:srgbClr val="000000"/>
+      </a:dk1>
+      <a:lt1>
+        <a:srgbClr val="FFFFFF"/>
+      </a:lt1>
+      <a:dk2>
+        <a:srgbClr val="0E2841"/>
+      </a:dk2>
+      <a:lt2>
+        <a:srgbClr val="E8E8E8"/>
+      </a:lt2>
+      <a:accent1>
+        <a:srgbClr val="156082"/>
+      </a:accent1>
+      <a:accent2>
+        <a:srgbClr val="E97132"/>
+      </a:accent2>
+      <a:accent3>
+        <a:srgbClr val="196B24"/>
+      </a:accent3>
+      <a:accent4>
+        <a:srgbClr val="0F9ED5"/>
+      </a:accent4>
+      <a:accent5>
+        <a:srgbClr val="A02B93"/>
+      </a:accent5>
+      <a:accent6>
+        <a:srgbClr val="4EA72E"/>
+      </a:accent6>
+      <a:hlink>
+        <a:srgbClr val="467886"/>
+      </a:hlink>
+      <a:folHlink>
+        <a:srgbClr val="96607D"/>
+      </a:folHlink>
+    </a:clrScheme>
+    <a:fontScheme name="Office">
+      <a:majorFont>
+        <a:latin typeface="Calibri Light"/>
+        <a:ea typeface="Calibri Light"/>
+        <a:cs typeface="Calibri Light"/>
+      </a:majorFont>
+      <a:minorFont>
+        <a:latin typeface="Calibri"/>
+        <a:ea typeface="Calibri"/>
+        <a:cs typeface="Calibri"/>
+      </a:minorFont>
+    </a:fontScheme>
+    <a:fmtScheme name="ChatGPT">
+      <a:fillStyleLst>
+        <a:solidFill>
+          <a:schemeClr val="phClr"/>
+        </a:solidFill>
+        <a:gradFill>
+          <a:gsLst>
+            <a:gs pos="0">
+              <a:schemeClr val="phClr">
+                <a:tint val="67000"/>
+                <a:lumMod val="110000"/>
+                <a:satMod val="105000"/>
+              </a:schemeClr>
+            </a:gs>
+            <a:gs pos="50000">
+              <a:schemeClr val="phClr">
+                <a:tint val="73000"/>
+                <a:lumMod val="105000"/>
+                <a:satMod val="103000"/>
+              </a:schemeClr>
+            </a:gs>
+            <a:gs pos="100000">
+              <a:schemeClr val="phClr">
+                <a:tint val="81000"/>
+                <a:lumMod val="105000"/>
+                <a:satMod val="109000"/>
+              </a:schemeClr>
+            </a:gs>
+          </a:gsLst>
+          <a:lin ang="5400000" scaled="0"/>
+        </a:gradFill>
+        <a:gradFill>
+          <a:gsLst>
+            <a:gs pos="0">
+              <a:schemeClr val="phClr">
+                <a:tint val="94000"/>
+                <a:lumMod val="102000"/>
+                <a:satMod val="103000"/>
+              </a:schemeClr>
+            </a:gs>
+            <a:gs pos="50000">
+              <a:schemeClr val="phClr">
+                <a:shade val="100000"/>
+                <a:lumMod val="100000"/>
+                <a:satMod val="110000"/>
+              </a:schemeClr>
+            </a:gs>
+            <a:gs pos="100000">
+              <a:schemeClr val="phClr">
+                <a:shade val="78000"/>
+                <a:lumMod val="99000"/>
+                <a:satMod val="120000"/>
+              </a:schemeClr>
+            </a:gs>
+          </a:gsLst>
+          <a:lin ang="5400000" scaled="0"/>
+        </a:gradFill>
+      </a:fillStyleLst>
+      <a:lnStyleLst>
+        <a:ln w="12700">
+          <a:solidFill>
+            <a:schemeClr val="phClr"/>
+          </a:solidFill>
+          <a:prstDash val="solid"/>
+        </a:ln>
+        <a:ln w="19050">
+          <a:solidFill>
+            <a:schemeClr val="phClr"/>
+          </a:solidFill>
+          <a:prstDash val="solid"/>
+        </a:ln>
+        <a:ln w="25400">
+          <a:solidFill>
+            <a:schemeClr val="phClr"/>
+          </a:solidFill>
+          <a:prstDash val="solid"/>
+        </a:ln>
+      </a:lnStyleLst>
+      <a:effectStyleLst>
+        <a:effectStyle>
+          <a:effectLst/>
+        </a:effectStyle>
+        <a:effectStyle>
+          <a:effectLst/>
+        </a:effectStyle>
+        <a:effectStyle>
+          <a:effectLst>
+            <a:outerShdw blurRad="57150" dist="19050" dir="5400000">
+              <a:srgbClr val="000000">
+                <a:alpha val="16000"/>
+              </a:srgbClr>
+            </a:outerShdw>
+          </a:effectLst>
+        </a:effectStyle>
+        <a:effectStyle>
+          <a:effectLst>
+            <a:outerShdw blurRad="19050" dist="9525" dir="5400000">
+              <a:srgbClr val="000000">
+                <a:alpha val="6000"/>
+              </a:srgbClr>
+            </a:outerShdw>
+          </a:effectLst>
+        </a:effectStyle>
+        <a:effectStyle>
+          <a:effectLst>
+            <a:outerShdw blurRad="28575" dist="9525" dir="5400000">
+              <a:srgbClr val="000000">
+                <a:alpha val="8000"/>
+              </a:srgbClr>
+            </a:outerShdw>
+          </a:effectLst>
+        </a:effectStyle>
+        <a:effectStyle>
+          <a:effectLst>
+            <a:outerShdw blurRad="57150" dist="19050" dir="5400000">
+              <a:srgbClr val="000000">
+                <a:alpha val="10000"/>
+              </a:srgbClr>
+            </a:outerShdw>
+          </a:effectLst>
+        </a:effectStyle>
+        <a:effectStyle>
+          <a:effectLst>
+            <a:outerShdw blurRad="114300" dist="38100" dir="5400000">
+              <a:srgbClr val="000000">
+                <a:alpha val="12000"/>
+              </a:srgbClr>
+            </a:outerShdw>
+          </a:effectLst>
+        </a:effectStyle>
+        <a:effectStyle>
+          <a:effectLst>
+            <a:outerShdw blurRad="171450" dist="57150" dir="5400000">
+              <a:srgbClr val="000000">
+                <a:alpha val="16000"/>
+              </a:srgbClr>
+            </a:outerShdw>
+          </a:effectLst>
+        </a:effectStyle>
+        <a:effectStyle>
+          <a:effectLst>
+            <a:outerShdw blurRad="266700" dist="95250" dir="5400000">
+              <a:srgbClr val="000000">
+                <a:alpha val="24000"/>
+              </a:srgbClr>
+            </a:outerShdw>
+          </a:effectLst>
+        </a:effectStyle>
+      </a:effectStyleLst>
+      <a:bgFillStyleLst>
+        <a:solidFill>
+          <a:schemeClr val="phClr"/>
+        </a:solidFill>
+        <a:solidFill>
+          <a:schemeClr val="phClr">
+            <a:tint val="95000"/>
+            <a:satMod val="170000"/>
+          </a:schemeClr>
+        </a:solidFill>
+        <a:gradFill>
+          <a:gsLst>
+            <a:gs pos="0">
+              <a:schemeClr val="phClr">
+                <a:tint val="93000"/>
+                <a:shade val="98000"/>
+                <a:lumMod val="102000"/>
+                <a:satMod val="150000"/>
+              </a:schemeClr>
+            </a:gs>
+            <a:gs pos="50000">
+              <a:schemeClr val="phClr">
+                <a:tint val="98000"/>
+                <a:shade val="90000"/>
+                <a:lumMod val="103000"/>
+                <a:satMod val="130000"/>
+              </a:schemeClr>
+            </a:gs>
+            <a:gs pos="100000">
+              <a:schemeClr val="phClr">
+                <a:shade val="63000"/>
+                <a:satMod val="120000"/>
+              </a:schemeClr>
+            </a:gs>
+          </a:gsLst>
+          <a:lin ang="5400000" scaled="0"/>
+        </a:gradFill>
+      </a:bgFillStyleLst>
+    </a:fmtScheme>
+  </a:themeElements>
+  <a:objectDefaults/>
+  <a:extraClrSchemeLst/>
 </a:theme>
 </file>
--- a/Data/Damage_Intelligence_EN_v2.pptx
+++ b/Data/Damage_Intelligence_EN_v2.pptx
@@ -112,6 +112,11 @@
       </a:defRPr>
     </a:lvl9pPr>
   </p:defaultTextStyle>
+  <p:extLst>
+    <p:ext uri="{EFAFB233-063F-42B5-8137-9DF3F51BA10A}">
+      <p15:sldGuideLst xmlns:p15="http://schemas.microsoft.com/office/powerpoint/2012/main"/>
+    </p:ext>
+  </p:extLst>
 </p:presentation>
 </file>
 
@@ -604,7 +609,17 @@
           <a:lstStyle/>
           <a:p>
             <a:r>
-              <a:t>Opening pitch: "Before we dive in, here's the live link so you can follow along: wolf-day-damage.vercel.app/dashboard. I'll walk you through what we built, then we'll review the dashboard together — it's designed for the workshop mechanic."</a:t>
+              <a:t>Prefer the product to the pipeline? Follow along on the live dashboard.</a:t>
+            </a:r>
+          </a:p>
+          <a:p>
+            <a:r>
+              <a:t>- We built this for a German car dealership group.</a:t>
+            </a:r>
+          </a:p>
+          <a:p>
+            <a:r>
+              <a:t>- I'll walk you through what we built, then we review the dashboard together — it's made for the workshop mechanic.</a:t>
             </a:r>
           </a:p>
         </p:txBody>
@@ -681,33 +696,27 @@
           <a:lstStyle/>
           <a:p>
             <a:r>
-              <a:t>50 seconds. The AI fills a strict schema and must keep a German excerpt justifying each damage. The closed vocabulary links a part and its side to the visualisation. Statuses come from structured data. An explicit action in the note takes priority; otherwise, rules propose the operations. Remove-and-install (R&amp;I) uses a dependency table — it separates a damaged part from a neighbouring part that must be taken off. The per-case cache avoids redoing successful calls. Failures are flagged; calls retry with increasing back-off. Passing format validation does not prove the meaning is correct.</a:t>
-            </a:r>
-          </a:p>
-          <a:p/>
-          <a:p>
-            <a:r>
-              <a:t>Local sources:</a:t>
-            </a:r>
-          </a:p>
-          <a:p>
-            <a:r>
-              <a:t>Work/pipeline/extract.py</a:t>
-            </a:r>
-          </a:p>
-          <a:p>
-            <a:r>
-              <a:t>Work/pipeline/schema.py</a:t>
-            </a:r>
-          </a:p>
-          <a:p>
-            <a:r>
-              <a:t>Work/pipeline/repair_logic.py</a:t>
-            </a:r>
-          </a:p>
-          <a:p>
-            <a:r>
-              <a:t>Work/pipeline/build_dataset.py</a:t>
+              <a:t>The hard part isn't drawing a car — it's turning messy free-text German into reliable structure.</a:t>
+            </a:r>
+          </a:p>
+          <a:p>
+            <a:r>
+              <a:t>- One extraction feeds both deliverables.</a:t>
+            </a:r>
+          </a:p>
+          <a:p>
+            <a:r>
+              <a:t>- The AI only reads the note into a strict schema, keeping a German quote for each damage.</a:t>
+            </a:r>
+          </a:p>
+          <a:p>
+            <a:r>
+              <a:t>- Deterministic rules, not the AI, decide the operations and the remove-and-install parts.</a:t>
+            </a:r>
+          </a:p>
+          <a:p>
+            <a:r>
+              <a:t>- Idempotent: per-case cache, retry on failure. Passing validation isn't proof of meaning — that's why we score it.</a:t>
             </a:r>
           </a:p>
         </p:txBody>
@@ -784,33 +793,27 @@
           <a:lstStyle/>
           <a:p>
             <a:r>
-              <a:t>45 seconds. Show the German sentence before the colours. The note says the windscreen cannot be repaired and needs replacing. The windscreen shows orange, which here matches the extracted medium severity. Blue marks a trim piece to remove and reinstall per the business rule, not a second damage. This example is from the development pilot: it illustrates how it works, not proof of generalisation. The prototype also has a 3D view, but the capture uses the 2D view, clearer for explaining the data-to-zone link. Local demo: /dashboard/cases/820002/.</a:t>
-            </a:r>
-          </a:p>
-          <a:p/>
-          <a:p>
-            <a:r>
-              <a:t>Local sources:</a:t>
-            </a:r>
-          </a:p>
-          <a:p>
-            <a:r>
-              <a:t>Data/frontend/public/data/cases.json</a:t>
-            </a:r>
-          </a:p>
-          <a:p>
-            <a:r>
-              <a:t>Data/frontend/src/sections/damage/car-diagram.tsx</a:t>
-            </a:r>
-          </a:p>
-          <a:p>
-            <a:r>
-              <a:t>Work/pipeline/repair_logic.py</a:t>
-            </a:r>
-          </a:p>
-          <a:p>
-            <a:r>
-              <a:t>Work/pipeline/ml_common.py</a:t>
+              <a:t>Show the German sentence first, then the colours.</a:t>
+            </a:r>
+          </a:p>
+          <a:p>
+            <a:r>
+              <a:t>- Case 820002: the note says the windscreen can't be repaired and needs replacing → orange (medium severity).</a:t>
+            </a:r>
+          </a:p>
+          <a:p>
+            <a:r>
+              <a:t>- Blue = a trim piece to remove and reinstall, from the rule — not a second damage.</a:t>
+            </a:r>
+          </a:p>
+          <a:p>
+            <a:r>
+              <a:t>- Every coloured region traces back to an exact German quote.</a:t>
+            </a:r>
+          </a:p>
+          <a:p>
+            <a:r>
+              <a:t>- 2D here for clarity; there's also a 3D view.</a:t>
             </a:r>
           </a:p>
         </p:txBody>
@@ -887,28 +890,22 @@
           <a:lstStyle/>
           <a:p>
             <a:r>
-              <a:t>40 seconds. The corpus has 550 service cases and 450 damage cases. Among the latter, 110 are parking and 76 are manoeuvring, i.e. 186/450 = 41.3%. A business angle would be to look at their bodywork load, but we do not measure an operational gain here. The 668 cases on the open worklist have a median age of 150 days as of 18 September 2026. That is time since creation, not repair time, and some statuses may need checking. The observations describe this synthetic set, with no extrapolation to the market. The source notes stay in German.</a:t>
-            </a:r>
-          </a:p>
-          <a:p/>
-          <a:p>
-            <a:r>
-              <a:t>Local sources:</a:t>
-            </a:r>
-          </a:p>
-          <a:p>
-            <a:r>
-              <a:t>Data/frontend/public/data/aggregates.json</a:t>
-            </a:r>
-          </a:p>
-          <a:p>
-            <a:r>
-              <a:t>Work/pipeline/build_dataset.py</a:t>
-            </a:r>
-          </a:p>
-          <a:p>
-            <a:r>
-              <a:t>Dataset/DATASET.md</a:t>
+              <a:t>550 service cases, 450 damage.</a:t>
+            </a:r>
+          </a:p>
+          <a:p>
+            <a:r>
+              <a:t>- 41.3% of damage is parking or manoeuvring — high volume, low severity.</a:t>
+            </a:r>
+          </a:p>
+          <a:p>
+            <a:r>
+              <a:t>- 668 cases still open, median 150 days — a queue to review with the shop.</a:t>
+            </a:r>
+          </a:p>
+          <a:p>
+            <a:r>
+              <a:t>- Synthetic data: it describes this set, not the market. The notes stay German.</a:t>
             </a:r>
           </a:p>
         </p:txBody>
@@ -985,38 +982,27 @@
           <a:lstStyle/>
           <a:p>
             <a:r>
-              <a:t>60 seconds. Two protocols appear here. On the left, the DeepSeek extraction is evaluated on 977 cases, excluding the 3 prompt examples and the 20 pilot cases. Zones give 751 true positives, zero false positives and one false negative — an F1 of 99.93%. Case kind reaches 100%. Insurance reaches 100% on the 434 damage cases of this test. DeepSeek severity on those 434 cases is 68.7%, not to be compared directly with the table on the right. On the right, every model uses exactly the same 150 held-out ids for severity. The supervised models have 284 training examples. Verified counts: XGBoost 123/150, gbert 118/150, logistic regression 110/150, DeepSeek 109/150, LightGBM 98/150. These results describe a single split of the synthetic corpus. Recurring phrasings limit their reach. The lexical baseline also reaches 100% F1 on the zones of this corpus — so the scores do not prove a universal superiority of the LLM.</a:t>
-            </a:r>
-          </a:p>
-          <a:p/>
-          <a:p>
-            <a:r>
-              <a:t>Local sources:</a:t>
-            </a:r>
-          </a:p>
-          <a:p>
-            <a:r>
-              <a:t>Work/pipeline/eval_report.json</a:t>
-            </a:r>
-          </a:p>
-          <a:p>
-            <a:r>
-              <a:t>Work/pipeline/ml_split.json</a:t>
-            </a:r>
-          </a:p>
-          <a:p>
-            <a:r>
-              <a:t>Work/pipeline/gbert_result.json</a:t>
-            </a:r>
-          </a:p>
-          <a:p>
-            <a:r>
-              <a:t>Data/frontend/public/data/model_comparison.json</a:t>
-            </a:r>
-          </a:p>
-          <a:p>
-            <a:r>
-              <a:t>Work/pipeline/train_cpu_models.py</a:t>
+              <a:t>Two things measured here.</a:t>
+            </a:r>
+          </a:p>
+          <a:p>
+            <a:r>
+              <a:t>- Extraction on 977 unseen cases: zones F1 99.9%, case kind 100%, insurance 100% — every quote verbatim, nothing lost.</a:t>
+            </a:r>
+          </a:p>
+          <a:p>
+            <a:r>
+              <a:t>- Severity is the hard field: DeepSeek 68.7% on the 434 damage cases.</a:t>
+            </a:r>
+          </a:p>
+          <a:p>
+            <a:r>
+              <a:t>- Right: the 5-model shootout on the same 150 cases. Careful — a regex ties on zones; the LLM's real value is insurance and severity.</a:t>
+            </a:r>
+          </a:p>
+          <a:p>
+            <a:r>
+              <a:t>- The trained models win on synthetic data by memorizing the phrasings; they'd drop on real notes. We keep DeepSeek.</a:t>
             </a:r>
           </a:p>
         </p:txBody>
@@ -1093,33 +1079,27 @@
           <a:lstStyle/>
           <a:p>
             <a:r>
-              <a:t>45 seconds. Be explicit about the limits: the corpus is synthetic and reuses phrasings. Test ids are separate, but close phrasings can appear on both sides of the split. Validation by phrasing family, then on real notes, would be more convincing. The report shows the same stone-chip sentence can carry several severities. It estimates a 79.5% score for a text-fingerprint match on the full damage set: that estimate is specific to its method and scope, not a universal bound for the 150-case test (where the same method gives ~88.7%). We do not oppose it to XGBoost's 82%. Verbatim quotes and Pydantic enable auditing but do not guarantee semantic correctness. The R&amp;I and replacement rules have no ground-truth labels in this set. Next steps: measure latency and real cost, plus external validation on real notes. No financial figure is claimed.</a:t>
-            </a:r>
-          </a:p>
-          <a:p/>
-          <a:p>
-            <a:r>
-              <a:t>Local sources:</a:t>
-            </a:r>
-          </a:p>
-          <a:p>
-            <a:r>
-              <a:t>docs/jury-reliability-report.md</a:t>
-            </a:r>
-          </a:p>
-          <a:p>
-            <a:r>
-              <a:t>Work/pipeline/repair_logic.py</a:t>
-            </a:r>
-          </a:p>
-          <a:p>
-            <a:r>
-              <a:t>Dataset/DATASET.md</a:t>
-            </a:r>
-          </a:p>
-          <a:p>
-            <a:r>
-              <a:t>Work/pipeline/eval_report.json</a:t>
+              <a:t>Be upfront about the limits.</a:t>
+            </a:r>
+          </a:p>
+          <a:p>
+            <a:r>
+              <a:t>- Synthetic corpus reuses phrasings — a regex baseline looks strong on the zones.</a:t>
+            </a:r>
+          </a:p>
+          <a:p>
+            <a:r>
+              <a:t>- Severity has a data ceiling: the same sentence carries light, medium and severe labels.</a:t>
+            </a:r>
+          </a:p>
+          <a:p>
+            <a:r>
+              <a:t>- The key one: how do we know which parts to remove to repair another? From a hand-reviewed adjacency table — the dataset has no parts or removal labels, so it's expert rules, not measured. Mechanical R&amp;I (brakes → wheels) is out of scope.</a:t>
+            </a:r>
+          </a:p>
+          <a:p>
+            <a:r>
+              <a:t>- Next: validate on real production notes, and learn the R&amp;I table from repair-order histories.</a:t>
             </a:r>
           </a:p>
         </p:txBody>
@@ -1525,7 +1505,7 @@
         </p:nvSpPr>
         <p:spPr>
           <a:xfrm>
-            <a:off x="609600" y="409575"/>
+            <a:off x="2867025" y="61913"/>
             <a:ext cx="10953750" cy="714375"/>
           </a:xfrm>
           <a:prstGeom prst="rect">
@@ -1553,7 +1533,7 @@
               </a:defRPr>
             </a:pPr>
             <a:r>
-              <a:rPr sz="4800" b="1">
+              <a:rPr sz="4800" b="1" dirty="0">
                 <a:solidFill>
                   <a:srgbClr val="FFFFFF"/>
                 </a:solidFill>
@@ -1639,7 +1619,7 @@
         </p:nvSpPr>
         <p:spPr>
           <a:xfrm>
-            <a:off x="609600" y="1885950"/>
+            <a:off x="628650" y="1228725"/>
             <a:ext cx="5857875" cy="1485900"/>
           </a:xfrm>
           <a:prstGeom prst="rect">
@@ -1657,6 +1637,7 @@
           <a:lstStyle/>
           <a:p>
             <a:pPr>
+              <a:buNone/>
               <a:defRPr sz="3600" b="1">
                 <a:solidFill>
                   <a:srgbClr val="FFFFFF"/>
@@ -1667,7 +1648,7 @@
               </a:defRPr>
             </a:pPr>
             <a:r>
-              <a:rPr sz="3600" b="1" dirty="0">
+              <a:rPr lang="en-US" sz="3600" b="1" dirty="0">
                 <a:solidFill>
                   <a:srgbClr val="FFFFFF"/>
                 </a:solidFill>
@@ -1675,11 +1656,12 @@
                 <a:ea typeface="Arial"/>
                 <a:cs typeface="Arial"/>
               </a:rPr>
-              <a:t>Reading messy German workshop notes,</a:t>
-            </a:r>
-          </a:p>
-          <a:p>
-            <a:pPr>
+              <a:t>Prefer the product to the pipeline? </a:t>
+            </a:r>
+          </a:p>
+          <a:p>
+            <a:pPr>
+              <a:buNone/>
               <a:defRPr sz="3600" b="1">
                 <a:solidFill>
                   <a:srgbClr val="FFFFFF"/>
@@ -1690,7 +1672,7 @@
               </a:defRPr>
             </a:pPr>
             <a:r>
-              <a:rPr sz="3600" b="1" dirty="0">
+              <a:rPr lang="en-US" sz="3600" b="1" dirty="0">
                 <a:solidFill>
                   <a:srgbClr val="FFFFFF"/>
                 </a:solidFill>
@@ -1698,7 +1680,7 @@
                 <a:ea typeface="Arial"/>
                 <a:cs typeface="Arial"/>
               </a:rPr>
-              <a:t>one case at a time</a:t>
+              <a:t>Follow along on the live dashboard.</a:t>
             </a:r>
           </a:p>
         </p:txBody>
@@ -1719,8 +1701,8 @@
         </p:nvSpPr>
         <p:spPr>
           <a:xfrm>
-            <a:off x="504825" y="4057650"/>
-            <a:ext cx="10001250" cy="952500"/>
+            <a:off x="1123950" y="3667126"/>
+            <a:ext cx="5362575" cy="952500"/>
           </a:xfrm>
           <a:prstGeom prst="rect">
             <a:avLst/>
@@ -1736,7 +1718,8 @@
           </a:bodyPr>
           <a:lstStyle/>
           <a:p>
-            <a:pPr>
+            <a:pPr algn="ctr">
+              <a:buNone/>
               <a:defRPr sz="2325" b="0">
                 <a:solidFill>
                   <a:srgbClr val="B9D7D4"/>
@@ -1755,30 +1738,7 @@
                 <a:ea typeface="Arial"/>
                 <a:cs typeface="Arial"/>
               </a:rPr>
-              <a:t>A visual damage sheet per vehicle,</a:t>
-            </a:r>
-          </a:p>
-          <a:p>
-            <a:pPr>
-              <a:defRPr sz="2325" b="0">
-                <a:solidFill>
-                  <a:srgbClr val="B9D7D4"/>
-                </a:solidFill>
-                <a:latin typeface="Arial"/>
-                <a:ea typeface="Arial"/>
-                <a:cs typeface="Arial"/>
-              </a:defRPr>
-            </a:pPr>
-            <a:r>
-              <a:rPr lang="en-US" sz="2325" b="0" dirty="0">
-                <a:solidFill>
-                  <a:srgbClr val="B9D7D4"/>
-                </a:solidFill>
-                <a:latin typeface="Arial"/>
-                <a:ea typeface="Arial"/>
-                <a:cs typeface="Arial"/>
-              </a:rPr>
-              <a:t>and an operational read on 1,000 dealership cases</a:t>
+              <a:t>Mechanics write messy German notes; our app turns them into a clear per-car dashboard damage, severity, who pays, parts to replace.</a:t>
             </a:r>
           </a:p>
         </p:txBody>
@@ -1799,7 +1759,7 @@
         </p:nvSpPr>
         <p:spPr>
           <a:xfrm>
-            <a:off x="609600" y="5267325"/>
+            <a:off x="552450" y="5753100"/>
             <a:ext cx="8572500" cy="457200"/>
           </a:xfrm>
           <a:prstGeom prst="rect">
@@ -1836,85 +1796,6 @@
                 <a:cs typeface="Arial"/>
               </a:rPr>
               <a:t>1,000 synthetic cases · German kept in German</a:t>
-            </a:r>
-          </a:p>
-        </p:txBody>
-      </p:sp>
-      <p:sp>
-        <p:nvSpPr>
-          <p:cNvPr id="6" name="Rectangle 5">
-            <a:extLst>
-              <a:ext uri="{FF2B5EF4-FFF2-40B4-BE49-F238E27FC236}">
-                <a16:creationId xmlns:a16="http://schemas.microsoft.com/office/drawing/2014/main" id="{48B40988-B505-4F64-8226-EBD18CC71F5E}"/>
-              </a:ext>
-            </a:extLst>
-          </p:cNvPr>
-          <p:cNvSpPr>
-            <a:spLocks noGrp="1"/>
-          </p:cNvSpPr>
-          <p:nvPr/>
-        </p:nvSpPr>
-        <p:spPr>
-          <a:xfrm>
-            <a:off x="609600" y="5981700"/>
-            <a:ext cx="10001250" cy="333375"/>
-          </a:xfrm>
-          <a:prstGeom prst="rect">
-            <a:avLst/>
-          </a:prstGeom>
-          <a:noFill/>
-          <a:ln w="0">
-            <a:noFill/>
-          </a:ln>
-        </p:spPr>
-        <p:txBody>
-          <a:bodyPr>
-            <a:noAutofit/>
-          </a:bodyPr>
-          <a:lstStyle/>
-          <a:p>
-            <a:pPr>
-              <a:defRPr sz="1650" b="0">
-                <a:solidFill>
-                  <a:srgbClr val="B9D7D4"/>
-                </a:solidFill>
-                <a:latin typeface="Arial"/>
-                <a:ea typeface="Arial"/>
-                <a:cs typeface="Arial"/>
-              </a:defRPr>
-            </a:pPr>
-            <a:r>
-              <a:rPr sz="1650" b="0" dirty="0">
-                <a:solidFill>
-                  <a:srgbClr val="B9D7D4"/>
-                </a:solidFill>
-                <a:latin typeface="Arial"/>
-                <a:ea typeface="Arial"/>
-                <a:cs typeface="Arial"/>
-              </a:rPr>
-              <a:t>Wolf Day · </a:t>
-            </a:r>
-            <a:r>
-              <a:rPr sz="1650" b="0" dirty="0" err="1">
-                <a:solidFill>
-                  <a:srgbClr val="B9D7D4"/>
-                </a:solidFill>
-                <a:latin typeface="Arial"/>
-                <a:ea typeface="Arial"/>
-                <a:cs typeface="Arial"/>
-              </a:rPr>
-              <a:t>DaiL</a:t>
-            </a:r>
-            <a:r>
-              <a:rPr sz="1650" b="0" dirty="0">
-                <a:solidFill>
-                  <a:srgbClr val="B9D7D4"/>
-                </a:solidFill>
-                <a:latin typeface="Arial"/>
-                <a:ea typeface="Arial"/>
-                <a:cs typeface="Arial"/>
-              </a:rPr>
-              <a:t> · Track B</a:t>
             </a:r>
           </a:p>
         </p:txBody>
@@ -5128,63 +5009,6 @@
                 <a:cs typeface="Arial"/>
               </a:rPr>
               <a:t>06</a:t>
-            </a:r>
-          </a:p>
-        </p:txBody>
-      </p:sp>
-      <p:sp>
-        <p:nvSpPr>
-          <p:cNvPr id="3" name="Rectangle 2">
-            <a:extLst>
-              <a:ext uri="{FF2B5EF4-FFF2-40B4-BE49-F238E27FC236}">
-                <a16:creationId xmlns:a16="http://schemas.microsoft.com/office/drawing/2014/main" id="{0E181C90-9565-4CBE-99B0-94615C2FE127}"/>
-              </a:ext>
-            </a:extLst>
-          </p:cNvPr>
-          <p:cNvSpPr>
-            <a:spLocks noGrp="1"/>
-          </p:cNvSpPr>
-          <p:nvPr/>
-        </p:nvSpPr>
-        <p:spPr>
-          <a:xfrm>
-            <a:off x="609600" y="1466850"/>
-            <a:ext cx="6286500" cy="447675"/>
-          </a:xfrm>
-          <a:prstGeom prst="rect">
-            <a:avLst/>
-          </a:prstGeom>
-          <a:noFill/>
-          <a:ln w="0">
-            <a:noFill/>
-          </a:ln>
-        </p:spPr>
-        <p:txBody>
-          <a:bodyPr>
-            <a:noAutofit/>
-          </a:bodyPr>
-          <a:lstStyle/>
-          <a:p>
-            <a:pPr>
-              <a:defRPr sz="2250" b="1">
-                <a:solidFill>
-                  <a:srgbClr val="102C36"/>
-                </a:solidFill>
-                <a:latin typeface="Arial"/>
-                <a:ea typeface="Arial"/>
-                <a:cs typeface="Arial"/>
-              </a:defRPr>
-            </a:pPr>
-            <a:r>
-              <a:rPr sz="2250" b="1">
-                <a:solidFill>
-                  <a:srgbClr val="102C36"/>
-                </a:solidFill>
-                <a:latin typeface="Arial"/>
-                <a:ea typeface="Arial"/>
-                <a:cs typeface="Arial"/>
-              </a:rPr>
-              <a:t>The question the jury pressed on</a:t>
             </a:r>
           </a:p>
         </p:txBody>
